--- a/docs/draft_atl-13.pptx
+++ b/docs/draft_atl-13.pptx
@@ -6,16 +6,15 @@
     <p:sldMasterId id="2147483673" r:id="rId2"/>
   </p:sldMasterIdLst>
   <p:notesMasterIdLst>
-    <p:notesMasterId r:id="rId13"/>
+    <p:notesMasterId r:id="rId9"/>
   </p:notesMasterIdLst>
   <p:sldIdLst>
     <p:sldId id="256" r:id="rId3"/>
     <p:sldId id="257" r:id="rId4"/>
     <p:sldId id="258" r:id="rId5"/>
-    <p:sldId id="268" r:id="rId18"/>
-    <p:sldId id="267" r:id="rId8"/>
-    <p:sldId id="265" r:id="rId10"/>
-    <p:sldId id="266" r:id="rId12"/>
+    <p:sldId id="267" r:id="rId6"/>
+    <p:sldId id="265" r:id="rId7"/>
+    <p:sldId id="266" r:id="rId8"/>
   </p:sldIdLst>
   <p:sldSz cx="9144000" cy="5143500" type="screen16x9"/>
   <p:notesSz cx="6858000" cy="9144000"/>
@@ -837,64 +836,6 @@
 </p:notes>
 </file>
 
-<file path=ppt/notesSlides/notesSlide10.xml><?xml version="1.0" encoding="utf-8"?>
-<p:notes xmlns:a="http://schemas.openxmlformats.org/drawingml/2006/main" xmlns:p="http://schemas.openxmlformats.org/presentationml/2006/main" xmlns:r="http://schemas.openxmlformats.org/officeDocument/2006/relationships">
-  <p:cSld>
-    <p:spTree>
-      <p:nvGrpSpPr>
-        <p:cNvPr id="1" name=""/>
-        <p:cNvGrpSpPr/>
-        <p:nvPr/>
-      </p:nvGrpSpPr>
-      <p:grpSpPr>
-        <a:xfrm>
-          <a:off x="0" y="0"/>
-          <a:ext cx="0" cy="0"/>
-          <a:chOff x="0" y="0"/>
-          <a:chExt cx="0" cy="0"/>
-        </a:xfrm>
-      </p:grpSpPr>
-      <p:sp>
-        <p:nvSpPr>
-          <p:cNvPr id="2" name="Slide Image Placeholder 1"/>
-          <p:cNvSpPr>
-            <a:spLocks noGrp="1"/>
-          </p:cNvSpPr>
-          <p:nvPr>
-            <p:ph type="sldImg" idx="2"/>
-          </p:nvPr>
-        </p:nvSpPr>
-        <p:spPr/>
-      </p:sp>
-      <p:sp>
-        <p:nvSpPr>
-          <p:cNvPr id="3" name="Notes Placeholder 2"/>
-          <p:cNvSpPr>
-            <a:spLocks noGrp="1"/>
-          </p:cNvSpPr>
-          <p:nvPr>
-            <p:ph type="body" idx="1"/>
-          </p:nvPr>
-        </p:nvSpPr>
-        <p:spPr/>
-        <p:txBody>
-          <a:bodyPr/>
-          <a:lstStyle/>
-          <a:p>
-            <a:r>
-              <a:t>Our track is anchor closure. A major employer announces it is leaving in 90 days, and nobody has applied for help yet. The harm spreads in two waves: first the lunch counters, dry cleaners and shops that rely on the anchor's workers, then backward to their suppliers, like the wholesale grocer, who never served the anchor at all. Relief programs rank applicants by distress, so they miss both waves until it is too late. Solving this helps the city's economic-development officers act inside the 90-day window, reaches small businesses while they are still healthy, and lets grants be weighed against neighborhood need.</a:t>
-            </a:r>
-          </a:p>
-        </p:txBody>
-      </p:sp>
-    </p:spTree>
-  </p:cSld>
-  <p:clrMapOvr>
-    <a:masterClrMapping/>
-  </p:clrMapOvr>
-</p:notes>
-</file>
-
 <file path=ppt/notesSlides/notesSlide2.xml><?xml version="1.0" encoding="utf-8"?>
 <p:notes xmlns:a="http://schemas.openxmlformats.org/drawingml/2006/main" xmlns:r="http://schemas.openxmlformats.org/officeDocument/2006/relationships" xmlns:p="http://schemas.openxmlformats.org/presentationml/2006/main" showMasterSp="0" showMasterPhAnim="0">
   <p:cSld>
@@ -924,7 +865,7 @@
         </p:nvSpPr>
         <p:spPr>
           <a:xfrm>
-            <a:off x="381300" y="685800"/>
+            <a:off x="381000" y="685800"/>
             <a:ext cx="6096000" cy="3429000"/>
           </a:xfrm>
           <a:custGeom>
@@ -1103,7 +1044,7 @@
 </p:notes>
 </file>
 
-<file path=ppt/notesSlides/notesSlide6.xml><?xml version="1.0" encoding="utf-8"?>
+<file path=ppt/notesSlides/notesSlide4.xml><?xml version="1.0" encoding="utf-8"?>
 <p:notes xmlns:a="http://schemas.openxmlformats.org/drawingml/2006/main" xmlns:r="http://schemas.openxmlformats.org/officeDocument/2006/relationships" xmlns:p="http://schemas.openxmlformats.org/presentationml/2006/main">
   <p:cSld>
     <p:spTree>
@@ -1161,7 +1102,7 @@
 </p:notes>
 </file>
 
-<file path=ppt/notesSlides/notesSlide9.xml><?xml version="1.0" encoding="utf-8"?>
+<file path=ppt/notesSlides/notesSlide5.xml><?xml version="1.0" encoding="utf-8"?>
 <p:notes xmlns:a="http://schemas.openxmlformats.org/drawingml/2006/main" xmlns:r="http://schemas.openxmlformats.org/officeDocument/2006/relationships" xmlns:p="http://schemas.openxmlformats.org/presentationml/2006/main">
   <p:cSld>
     <p:spTree>
@@ -11414,3640 +11355,6 @@
 </p:sld>
 </file>
 
-<file path=ppt/slides/slide10.xml><?xml version="1.0" encoding="utf-8"?>
-<p:sld xmlns:a="http://schemas.openxmlformats.org/drawingml/2006/main" xmlns:r="http://schemas.openxmlformats.org/officeDocument/2006/relationships" xmlns:p="http://schemas.openxmlformats.org/presentationml/2006/main">
-  <p:cSld>
-    <p:spTree>
-      <p:nvGrpSpPr>
-        <p:cNvPr id="1" name=""/>
-        <p:cNvGrpSpPr/>
-        <p:nvPr/>
-      </p:nvGrpSpPr>
-      <p:grpSpPr>
-        <a:xfrm>
-          <a:off x="0" y="0"/>
-          <a:ext cx="0" cy="0"/>
-          <a:chOff x="0" y="0"/>
-          <a:chExt cx="0" cy="0"/>
-        </a:xfrm>
-      </p:grpSpPr>
-      <p:sp>
-        <p:nvSpPr>
-          <p:cNvPr id="2" name="Title"/>
-          <p:cNvSpPr txBox="1"/>
-          <p:nvPr/>
-        </p:nvSpPr>
-        <p:spPr>
-          <a:xfrm>
-            <a:off x="342900" y="260605"/>
-            <a:ext cx="8435340" cy="392415"/>
-          </a:xfrm>
-          <a:prstGeom prst="rect">
-            <a:avLst/>
-          </a:prstGeom>
-          <a:noFill/>
-        </p:spPr>
-        <p:txBody>
-          <a:bodyPr wrap="square" lIns="0" tIns="0" rIns="0" bIns="0" anchor="t">
-            <a:spAutoFit/>
-          </a:bodyPr>
-          <a:lstStyle/>
-          <a:p>
-            <a:pPr>
-              <a:spcAft>
-                <a:spcPts val="225"/>
-              </a:spcAft>
-            </a:pPr>
-            <a:r>
-              <a:rPr sz="2550" b="1" dirty="0">
-                <a:solidFill>
-                  <a:srgbClr val="12343B"/>
-                </a:solidFill>
-                <a:latin typeface="Calibri"/>
-              </a:rPr>
-              <a:t>How our grant decision agents work together</a:t>
-            </a:r>
-          </a:p>
-        </p:txBody>
-      </p:sp>
-      <p:sp>
-        <p:nvSpPr>
-          <p:cNvPr id="3" name="Subtitle"/>
-          <p:cNvSpPr txBox="1"/>
-          <p:nvPr/>
-        </p:nvSpPr>
-        <p:spPr>
-          <a:xfrm>
-            <a:off x="342900" y="685801"/>
-            <a:ext cx="8435340" cy="161583"/>
-          </a:xfrm>
-          <a:prstGeom prst="rect">
-            <a:avLst/>
-          </a:prstGeom>
-          <a:noFill/>
-        </p:spPr>
-        <p:txBody>
-          <a:bodyPr wrap="square" lIns="0" tIns="0" rIns="0" bIns="0" anchor="t">
-            <a:spAutoFit/>
-          </a:bodyPr>
-          <a:lstStyle/>
-          <a:p>
-            <a:pPr>
-              <a:spcAft>
-                <a:spcPts val="225"/>
-              </a:spcAft>
-            </a:pPr>
-            <a:r>
-              <a:rPr sz="1050">
-                <a:solidFill>
-                  <a:srgbClr val="4A5A5D"/>
-                </a:solidFill>
-                <a:latin typeface="Calibri"/>
-              </a:rPr>
-              <a:t>Anchor-closure track · Central Market, San Francisco · four ADK agents in one chain, data through MCP, everything on Google Cloud</a:t>
-            </a:r>
-          </a:p>
-        </p:txBody>
-      </p:sp>
-      <p:sp>
-        <p:nvSpPr>
-          <p:cNvPr id="4" name="User card"/>
-          <p:cNvSpPr/>
-          <p:nvPr/>
-        </p:nvSpPr>
-        <p:spPr>
-          <a:xfrm>
-            <a:off x="342900" y="1062990"/>
-            <a:ext cx="1577340" cy="672084"/>
-          </a:xfrm>
-          <a:prstGeom prst="roundRect">
-            <a:avLst>
-              <a:gd name="adj" fmla="val 12000"/>
-            </a:avLst>
-          </a:prstGeom>
-          <a:solidFill>
-            <a:srgbClr val="E3EFED"/>
-          </a:solidFill>
-          <a:ln>
-            <a:noFill/>
-          </a:ln>
-          <a:effectLst/>
-        </p:spPr>
-        <p:style>
-          <a:lnRef idx="1">
-            <a:schemeClr val="accent1"/>
-          </a:lnRef>
-          <a:fillRef idx="3">
-            <a:schemeClr val="accent1"/>
-          </a:fillRef>
-          <a:effectRef idx="2">
-            <a:schemeClr val="accent1"/>
-          </a:effectRef>
-          <a:fontRef idx="minor">
-            <a:schemeClr val="lt1"/>
-          </a:fontRef>
-        </p:style>
-        <p:txBody>
-          <a:bodyPr rtlCol="0" anchor="ctr"/>
-          <a:lstStyle/>
-          <a:p>
-            <a:pPr algn="ctr"/>
-            <a:endParaRPr sz="1050"/>
-          </a:p>
-        </p:txBody>
-      </p:sp>
-      <p:sp>
-        <p:nvSpPr>
-          <p:cNvPr id="5" name="TextBox 4"/>
-          <p:cNvSpPr txBox="1"/>
-          <p:nvPr/>
-        </p:nvSpPr>
-        <p:spPr>
-          <a:xfrm>
-            <a:off x="466344" y="1124712"/>
-            <a:ext cx="1330452" cy="568104"/>
-          </a:xfrm>
-          <a:prstGeom prst="rect">
-            <a:avLst/>
-          </a:prstGeom>
-          <a:noFill/>
-        </p:spPr>
-        <p:txBody>
-          <a:bodyPr wrap="square" lIns="0" tIns="0" rIns="0" bIns="0" anchor="t">
-            <a:spAutoFit/>
-          </a:bodyPr>
-          <a:lstStyle/>
-          <a:p>
-            <a:pPr>
-              <a:spcAft>
-                <a:spcPts val="225"/>
-              </a:spcAft>
-            </a:pPr>
-            <a:r>
-              <a:rPr sz="1050" b="1">
-                <a:solidFill>
-                  <a:srgbClr val="12343B"/>
-                </a:solidFill>
-                <a:latin typeface="Calibri"/>
-              </a:rPr>
-              <a:t>Grant officer</a:t>
-            </a:r>
-          </a:p>
-          <a:p>
-            <a:pPr>
-              <a:spcAft>
-                <a:spcPts val="225"/>
-              </a:spcAft>
-            </a:pPr>
-            <a:r>
-              <a:rPr sz="825">
-                <a:solidFill>
-                  <a:srgbClr val="4A5A5D"/>
-                </a:solidFill>
-                <a:latin typeface="Calibri"/>
-              </a:rPr>
-              <a:t>Picks the closing employer, the budget and the grant-effect assumption</a:t>
-            </a:r>
-          </a:p>
-        </p:txBody>
-      </p:sp>
-      <p:cxnSp>
-        <p:nvCxnSpPr>
-          <p:cNvPr id="6" name="Connector 5"/>
-          <p:cNvCxnSpPr/>
-          <p:nvPr/>
-        </p:nvCxnSpPr>
-        <p:spPr>
-          <a:xfrm>
-            <a:off x="1131570" y="1735074"/>
-            <a:ext cx="0" cy="219456"/>
-          </a:xfrm>
-          <a:prstGeom prst="line">
-            <a:avLst/>
-          </a:prstGeom>
-          <a:ln w="22225">
-            <a:solidFill>
-              <a:srgbClr val="C27C00"/>
-            </a:solidFill>
-            <a:tailEnd type="triangle" w="med" len="med"/>
-          </a:ln>
-        </p:spPr>
-        <p:style>
-          <a:lnRef idx="2">
-            <a:schemeClr val="accent1"/>
-          </a:lnRef>
-          <a:fillRef idx="0">
-            <a:schemeClr val="accent1"/>
-          </a:fillRef>
-          <a:effectRef idx="1">
-            <a:schemeClr val="accent1"/>
-          </a:effectRef>
-          <a:fontRef idx="minor">
-            <a:schemeClr val="tx1"/>
-          </a:fontRef>
-        </p:style>
-      </p:cxnSp>
-      <p:sp>
-        <p:nvSpPr>
-          <p:cNvPr id="7" name="Front end card"/>
-          <p:cNvSpPr/>
-          <p:nvPr/>
-        </p:nvSpPr>
-        <p:spPr>
-          <a:xfrm>
-            <a:off x="342900" y="1954530"/>
-            <a:ext cx="1577340" cy="1337310"/>
-          </a:xfrm>
-          <a:prstGeom prst="roundRect">
-            <a:avLst>
-              <a:gd name="adj" fmla="val 6153"/>
-            </a:avLst>
-          </a:prstGeom>
-          <a:solidFill>
-            <a:srgbClr val="FFFFFF"/>
-          </a:solidFill>
-          <a:ln w="19050">
-            <a:solidFill>
-              <a:srgbClr val="C27C00"/>
-            </a:solidFill>
-          </a:ln>
-          <a:effectLst/>
-        </p:spPr>
-        <p:style>
-          <a:lnRef idx="1">
-            <a:schemeClr val="accent1"/>
-          </a:lnRef>
-          <a:fillRef idx="3">
-            <a:schemeClr val="accent1"/>
-          </a:fillRef>
-          <a:effectRef idx="2">
-            <a:schemeClr val="accent1"/>
-          </a:effectRef>
-          <a:fontRef idx="minor">
-            <a:schemeClr val="lt1"/>
-          </a:fontRef>
-        </p:style>
-        <p:txBody>
-          <a:bodyPr rtlCol="0" anchor="ctr"/>
-          <a:lstStyle/>
-          <a:p>
-            <a:pPr algn="ctr"/>
-            <a:endParaRPr sz="1050"/>
-          </a:p>
-        </p:txBody>
-      </p:sp>
-      <p:sp>
-        <p:nvSpPr>
-          <p:cNvPr id="8" name="TextBox 7"/>
-          <p:cNvSpPr txBox="1"/>
-          <p:nvPr/>
-        </p:nvSpPr>
-        <p:spPr>
-          <a:xfrm>
-            <a:off x="466344" y="2023110"/>
-            <a:ext cx="1330452" cy="1000274"/>
-          </a:xfrm>
-          <a:prstGeom prst="rect">
-            <a:avLst/>
-          </a:prstGeom>
-          <a:noFill/>
-        </p:spPr>
-        <p:txBody>
-          <a:bodyPr wrap="square" lIns="0" tIns="0" rIns="0" bIns="0" anchor="t">
-            <a:spAutoFit/>
-          </a:bodyPr>
-          <a:lstStyle/>
-          <a:p>
-            <a:pPr>
-              <a:spcAft>
-                <a:spcPts val="225"/>
-              </a:spcAft>
-            </a:pPr>
-            <a:r>
-              <a:rPr sz="1050" b="1">
-                <a:solidFill>
-                  <a:srgbClr val="12343B"/>
-                </a:solidFill>
-                <a:latin typeface="Calibri"/>
-              </a:rPr>
-              <a:t>Interactive map</a:t>
-            </a:r>
-          </a:p>
-          <a:p>
-            <a:pPr>
-              <a:spcAft>
-                <a:spcPts val="225"/>
-              </a:spcAft>
-            </a:pPr>
-            <a:r>
-              <a:rPr sz="825" b="1">
-                <a:solidFill>
-                  <a:srgbClr val="C27C00"/>
-                </a:solidFill>
-                <a:latin typeface="Calibri"/>
-              </a:rPr>
-              <a:t>Cloud Run · Google Maps JS API</a:t>
-            </a:r>
-          </a:p>
-          <a:p>
-            <a:pPr>
-              <a:spcAft>
-                <a:spcPts val="225"/>
-              </a:spcAft>
-            </a:pPr>
-            <a:r>
-              <a:rPr sz="825">
-                <a:solidFill>
-                  <a:srgbClr val="4A5A5D"/>
-                </a:solidFill>
-                <a:latin typeface="Calibri"/>
-              </a:rPr>
-              <a:t>Hover a business: amount, justification, impact</a:t>
-            </a:r>
-          </a:p>
-          <a:p>
-            <a:pPr>
-              <a:spcAft>
-                <a:spcPts val="225"/>
-              </a:spcAft>
-            </a:pPr>
-            <a:r>
-              <a:rPr sz="825">
-                <a:solidFill>
-                  <a:srgbClr val="4A5A5D"/>
-                </a:solidFill>
-                <a:latin typeface="Calibri"/>
-              </a:rPr>
-              <a:t>The cascade is drawn on the map, anchor to supplier</a:t>
-            </a:r>
-          </a:p>
-        </p:txBody>
-      </p:sp>
-      <p:cxnSp>
-        <p:nvCxnSpPr>
-          <p:cNvPr id="9" name="Connector 8"/>
-          <p:cNvCxnSpPr/>
-          <p:nvPr/>
-        </p:nvCxnSpPr>
-        <p:spPr>
-          <a:xfrm>
-            <a:off x="1920240" y="2297430"/>
-            <a:ext cx="651510" cy="0"/>
-          </a:xfrm>
-          <a:prstGeom prst="line">
-            <a:avLst/>
-          </a:prstGeom>
-          <a:ln w="22225">
-            <a:solidFill>
-              <a:srgbClr val="C27C00"/>
-            </a:solidFill>
-            <a:tailEnd type="triangle" w="med" len="med"/>
-          </a:ln>
-        </p:spPr>
-        <p:style>
-          <a:lnRef idx="2">
-            <a:schemeClr val="accent1"/>
-          </a:lnRef>
-          <a:fillRef idx="0">
-            <a:schemeClr val="accent1"/>
-          </a:fillRef>
-          <a:effectRef idx="1">
-            <a:schemeClr val="accent1"/>
-          </a:effectRef>
-          <a:fontRef idx="minor">
-            <a:schemeClr val="tx1"/>
-          </a:fontRef>
-        </p:style>
-      </p:cxnSp>
-      <p:sp>
-        <p:nvSpPr>
-          <p:cNvPr id="10" name="TextBox 9"/>
-          <p:cNvSpPr txBox="1"/>
-          <p:nvPr/>
-        </p:nvSpPr>
-        <p:spPr>
-          <a:xfrm>
-            <a:off x="1947672" y="2057401"/>
-            <a:ext cx="596646" cy="103875"/>
-          </a:xfrm>
-          <a:prstGeom prst="rect">
-            <a:avLst/>
-          </a:prstGeom>
-          <a:noFill/>
-        </p:spPr>
-        <p:txBody>
-          <a:bodyPr wrap="square" lIns="0" tIns="0" rIns="0" bIns="0" anchor="t">
-            <a:spAutoFit/>
-          </a:bodyPr>
-          <a:lstStyle/>
-          <a:p>
-            <a:pPr algn="ctr">
-              <a:spcAft>
-                <a:spcPts val="225"/>
-              </a:spcAft>
-            </a:pPr>
-            <a:r>
-              <a:rPr sz="675" b="1">
-                <a:solidFill>
-                  <a:srgbClr val="C27C00"/>
-                </a:solidFill>
-                <a:latin typeface="Calibri"/>
-              </a:rPr>
-              <a:t>POST /scenario</a:t>
-            </a:r>
-          </a:p>
-        </p:txBody>
-      </p:sp>
-      <p:cxnSp>
-        <p:nvCxnSpPr>
-          <p:cNvPr id="11" name="Connector 10"/>
-          <p:cNvCxnSpPr/>
-          <p:nvPr/>
-        </p:nvCxnSpPr>
-        <p:spPr>
-          <a:xfrm flipH="1">
-            <a:off x="1920240" y="2914650"/>
-            <a:ext cx="651510" cy="0"/>
-          </a:xfrm>
-          <a:prstGeom prst="line">
-            <a:avLst/>
-          </a:prstGeom>
-          <a:ln w="22225">
-            <a:solidFill>
-              <a:srgbClr val="C27C00"/>
-            </a:solidFill>
-            <a:tailEnd type="triangle" w="med" len="med"/>
-          </a:ln>
-        </p:spPr>
-        <p:style>
-          <a:lnRef idx="2">
-            <a:schemeClr val="accent1"/>
-          </a:lnRef>
-          <a:fillRef idx="0">
-            <a:schemeClr val="accent1"/>
-          </a:fillRef>
-          <a:effectRef idx="1">
-            <a:schemeClr val="accent1"/>
-          </a:effectRef>
-          <a:fontRef idx="minor">
-            <a:schemeClr val="tx1"/>
-          </a:fontRef>
-        </p:style>
-      </p:cxnSp>
-      <p:sp>
-        <p:nvSpPr>
-          <p:cNvPr id="12" name="TextBox 11"/>
-          <p:cNvSpPr txBox="1"/>
-          <p:nvPr/>
-        </p:nvSpPr>
-        <p:spPr>
-          <a:xfrm>
-            <a:off x="1947672" y="2955798"/>
-            <a:ext cx="596646" cy="103875"/>
-          </a:xfrm>
-          <a:prstGeom prst="rect">
-            <a:avLst/>
-          </a:prstGeom>
-          <a:noFill/>
-        </p:spPr>
-        <p:txBody>
-          <a:bodyPr wrap="square" lIns="0" tIns="0" rIns="0" bIns="0" anchor="t">
-            <a:spAutoFit/>
-          </a:bodyPr>
-          <a:lstStyle/>
-          <a:p>
-            <a:pPr algn="ctr">
-              <a:spcAft>
-                <a:spcPts val="225"/>
-              </a:spcAft>
-            </a:pPr>
-            <a:r>
-              <a:rPr sz="675" b="1">
-                <a:solidFill>
-                  <a:srgbClr val="C27C00"/>
-                </a:solidFill>
-                <a:latin typeface="Calibri"/>
-              </a:rPr>
-              <a:t>decisions.json</a:t>
-            </a:r>
-          </a:p>
-        </p:txBody>
-      </p:sp>
-      <p:sp>
-        <p:nvSpPr>
-          <p:cNvPr id="13" name="ADK root agent"/>
-          <p:cNvSpPr/>
-          <p:nvPr/>
-        </p:nvSpPr>
-        <p:spPr>
-          <a:xfrm>
-            <a:off x="2571750" y="1028700"/>
-            <a:ext cx="6227064" cy="2023110"/>
-          </a:xfrm>
-          <a:prstGeom prst="roundRect">
-            <a:avLst>
-              <a:gd name="adj" fmla="val 4067"/>
-            </a:avLst>
-          </a:prstGeom>
-          <a:solidFill>
-            <a:srgbClr val="E3EFED"/>
-          </a:solidFill>
-          <a:ln w="12700">
-            <a:solidFill>
-              <a:srgbClr val="B8D4D0"/>
-            </a:solidFill>
-          </a:ln>
-          <a:effectLst/>
-        </p:spPr>
-        <p:style>
-          <a:lnRef idx="1">
-            <a:schemeClr val="accent1"/>
-          </a:lnRef>
-          <a:fillRef idx="3">
-            <a:schemeClr val="accent1"/>
-          </a:fillRef>
-          <a:effectRef idx="2">
-            <a:schemeClr val="accent1"/>
-          </a:effectRef>
-          <a:fontRef idx="minor">
-            <a:schemeClr val="lt1"/>
-          </a:fontRef>
-        </p:style>
-        <p:txBody>
-          <a:bodyPr rtlCol="0" anchor="ctr"/>
-          <a:lstStyle/>
-          <a:p>
-            <a:pPr algn="ctr"/>
-            <a:endParaRPr sz="1050"/>
-          </a:p>
-        </p:txBody>
-      </p:sp>
-      <p:sp>
-        <p:nvSpPr>
-          <p:cNvPr id="14" name="TextBox 13"/>
-          <p:cNvSpPr txBox="1"/>
-          <p:nvPr/>
-        </p:nvSpPr>
-        <p:spPr>
-          <a:xfrm>
-            <a:off x="2708910" y="1097281"/>
-            <a:ext cx="5952744" cy="161583"/>
-          </a:xfrm>
-          <a:prstGeom prst="rect">
-            <a:avLst/>
-          </a:prstGeom>
-          <a:noFill/>
-        </p:spPr>
-        <p:txBody>
-          <a:bodyPr wrap="square" lIns="0" tIns="0" rIns="0" bIns="0" anchor="t">
-            <a:spAutoFit/>
-          </a:bodyPr>
-          <a:lstStyle/>
-          <a:p>
-            <a:pPr>
-              <a:spcAft>
-                <a:spcPts val="225"/>
-              </a:spcAft>
-            </a:pPr>
-            <a:r>
-              <a:rPr sz="1050" b="1">
-                <a:solidFill>
-                  <a:srgbClr val="12343B"/>
-                </a:solidFill>
-                <a:latin typeface="Calibri"/>
-              </a:rPr>
-              <a:t>ADK root agent </a:t>
-            </a:r>
-            <a:r>
-              <a:rPr sz="1050">
-                <a:solidFill>
-                  <a:srgbClr val="1F6F6B"/>
-                </a:solidFill>
-                <a:latin typeface="Calibri"/>
-              </a:rPr>
-              <a:t>· SequentialAgent · Gemini · deployed on Agent Runtime</a:t>
-            </a:r>
-          </a:p>
-        </p:txBody>
-      </p:sp>
-      <p:sp>
-        <p:nvSpPr>
-          <p:cNvPr id="15" name="Agent 1"/>
-          <p:cNvSpPr/>
-          <p:nvPr/>
-        </p:nvSpPr>
-        <p:spPr>
-          <a:xfrm>
-            <a:off x="2708910" y="1405889"/>
-            <a:ext cx="1323594" cy="1165860"/>
-          </a:xfrm>
-          <a:prstGeom prst="roundRect">
-            <a:avLst>
-              <a:gd name="adj" fmla="val 7058"/>
-            </a:avLst>
-          </a:prstGeom>
-          <a:solidFill>
-            <a:srgbClr val="FFFFFF"/>
-          </a:solidFill>
-          <a:ln w="12700">
-            <a:solidFill>
-              <a:srgbClr val="B8D4D0"/>
-            </a:solidFill>
-          </a:ln>
-          <a:effectLst/>
-        </p:spPr>
-        <p:style>
-          <a:lnRef idx="1">
-            <a:schemeClr val="accent1"/>
-          </a:lnRef>
-          <a:fillRef idx="3">
-            <a:schemeClr val="accent1"/>
-          </a:fillRef>
-          <a:effectRef idx="2">
-            <a:schemeClr val="accent1"/>
-          </a:effectRef>
-          <a:fontRef idx="minor">
-            <a:schemeClr val="lt1"/>
-          </a:fontRef>
-        </p:style>
-        <p:txBody>
-          <a:bodyPr rtlCol="0" anchor="ctr"/>
-          <a:lstStyle/>
-          <a:p>
-            <a:pPr algn="ctr"/>
-            <a:endParaRPr sz="1050"/>
-          </a:p>
-        </p:txBody>
-      </p:sp>
-      <p:sp>
-        <p:nvSpPr>
-          <p:cNvPr id="16" name="Oval 15"/>
-          <p:cNvSpPr/>
-          <p:nvPr/>
-        </p:nvSpPr>
-        <p:spPr>
-          <a:xfrm>
-            <a:off x="2804922" y="1501902"/>
-            <a:ext cx="246888" cy="246888"/>
-          </a:xfrm>
-          <a:prstGeom prst="ellipse">
-            <a:avLst/>
-          </a:prstGeom>
-          <a:solidFill>
-            <a:srgbClr val="1F6F6B"/>
-          </a:solidFill>
-          <a:ln>
-            <a:noFill/>
-          </a:ln>
-          <a:effectLst/>
-        </p:spPr>
-        <p:style>
-          <a:lnRef idx="1">
-            <a:schemeClr val="accent1"/>
-          </a:lnRef>
-          <a:fillRef idx="3">
-            <a:schemeClr val="accent1"/>
-          </a:fillRef>
-          <a:effectRef idx="2">
-            <a:schemeClr val="accent1"/>
-          </a:effectRef>
-          <a:fontRef idx="minor">
-            <a:schemeClr val="lt1"/>
-          </a:fontRef>
-        </p:style>
-        <p:txBody>
-          <a:bodyPr lIns="0" tIns="0" rIns="0" bIns="0" rtlCol="0" anchor="ctr"/>
-          <a:lstStyle/>
-          <a:p>
-            <a:pPr algn="ctr"/>
-            <a:r>
-              <a:rPr sz="975" b="1">
-                <a:solidFill>
-                  <a:srgbClr val="FFFFFF"/>
-                </a:solidFill>
-                <a:latin typeface="Calibri"/>
-              </a:rPr>
-              <a:t>1</a:t>
-            </a:r>
-          </a:p>
-        </p:txBody>
-      </p:sp>
-      <p:sp>
-        <p:nvSpPr>
-          <p:cNvPr id="17" name="TextBox 16"/>
-          <p:cNvSpPr txBox="1"/>
-          <p:nvPr/>
-        </p:nvSpPr>
-        <p:spPr>
-          <a:xfrm>
-            <a:off x="2804922" y="1817370"/>
-            <a:ext cx="1131570" cy="150041"/>
-          </a:xfrm>
-          <a:prstGeom prst="rect">
-            <a:avLst/>
-          </a:prstGeom>
-          <a:noFill/>
-        </p:spPr>
-        <p:txBody>
-          <a:bodyPr wrap="square" lIns="0" tIns="0" rIns="0" bIns="0" anchor="t">
-            <a:spAutoFit/>
-          </a:bodyPr>
-          <a:lstStyle/>
-          <a:p>
-            <a:pPr>
-              <a:spcAft>
-                <a:spcPts val="225"/>
-              </a:spcAft>
-            </a:pPr>
-            <a:r>
-              <a:rPr sz="975" b="1">
-                <a:solidFill>
-                  <a:srgbClr val="12343B"/>
-                </a:solidFill>
-                <a:latin typeface="Calibri"/>
-              </a:rPr>
-              <a:t>Cascade Scout</a:t>
-            </a:r>
-          </a:p>
-        </p:txBody>
-      </p:sp>
-      <p:sp>
-        <p:nvSpPr>
-          <p:cNvPr id="18" name="TextBox 17"/>
-          <p:cNvSpPr txBox="1"/>
-          <p:nvPr/>
-        </p:nvSpPr>
-        <p:spPr>
-          <a:xfrm>
-            <a:off x="2804922" y="2036826"/>
-            <a:ext cx="1131570" cy="380873"/>
-          </a:xfrm>
-          <a:prstGeom prst="rect">
-            <a:avLst/>
-          </a:prstGeom>
-          <a:noFill/>
-        </p:spPr>
-        <p:txBody>
-          <a:bodyPr wrap="square" lIns="0" tIns="0" rIns="0" bIns="0" anchor="t">
-            <a:spAutoFit/>
-          </a:bodyPr>
-          <a:lstStyle/>
-          <a:p>
-            <a:pPr>
-              <a:spcAft>
-                <a:spcPts val="225"/>
-              </a:spcAft>
-            </a:pPr>
-            <a:r>
-              <a:rPr sz="825">
-                <a:solidFill>
-                  <a:srgbClr val="4A5A5D"/>
-                </a:solidFill>
-                <a:latin typeface="Calibri"/>
-              </a:rPr>
-              <a:t>Walks the graph: footfall forward, then supplies backward, 1 to 2 hops</a:t>
-            </a:r>
-          </a:p>
-        </p:txBody>
-      </p:sp>
-      <p:cxnSp>
-        <p:nvCxnSpPr>
-          <p:cNvPr id="19" name="Connector 18"/>
-          <p:cNvCxnSpPr/>
-          <p:nvPr/>
-        </p:nvCxnSpPr>
-        <p:spPr>
-          <a:xfrm>
-            <a:off x="4059936" y="1988820"/>
-            <a:ext cx="164592" cy="0"/>
-          </a:xfrm>
-          <a:prstGeom prst="line">
-            <a:avLst/>
-          </a:prstGeom>
-          <a:ln w="25400">
-            <a:solidFill>
-              <a:srgbClr val="1F6F6B"/>
-            </a:solidFill>
-            <a:tailEnd type="triangle" w="med" len="med"/>
-          </a:ln>
-        </p:spPr>
-        <p:style>
-          <a:lnRef idx="2">
-            <a:schemeClr val="accent1"/>
-          </a:lnRef>
-          <a:fillRef idx="0">
-            <a:schemeClr val="accent1"/>
-          </a:fillRef>
-          <a:effectRef idx="1">
-            <a:schemeClr val="accent1"/>
-          </a:effectRef>
-          <a:fontRef idx="minor">
-            <a:schemeClr val="tx1"/>
-          </a:fontRef>
-        </p:style>
-      </p:cxnSp>
-      <p:sp>
-        <p:nvSpPr>
-          <p:cNvPr id="20" name="Agent 2"/>
-          <p:cNvSpPr/>
-          <p:nvPr/>
-        </p:nvSpPr>
-        <p:spPr>
-          <a:xfrm>
-            <a:off x="4251960" y="1405889"/>
-            <a:ext cx="1323594" cy="1165860"/>
-          </a:xfrm>
-          <a:prstGeom prst="roundRect">
-            <a:avLst>
-              <a:gd name="adj" fmla="val 7058"/>
-            </a:avLst>
-          </a:prstGeom>
-          <a:solidFill>
-            <a:srgbClr val="FFFFFF"/>
-          </a:solidFill>
-          <a:ln w="12700">
-            <a:solidFill>
-              <a:srgbClr val="B8D4D0"/>
-            </a:solidFill>
-          </a:ln>
-          <a:effectLst/>
-        </p:spPr>
-        <p:style>
-          <a:lnRef idx="1">
-            <a:schemeClr val="accent1"/>
-          </a:lnRef>
-          <a:fillRef idx="3">
-            <a:schemeClr val="accent1"/>
-          </a:fillRef>
-          <a:effectRef idx="2">
-            <a:schemeClr val="accent1"/>
-          </a:effectRef>
-          <a:fontRef idx="minor">
-            <a:schemeClr val="lt1"/>
-          </a:fontRef>
-        </p:style>
-        <p:txBody>
-          <a:bodyPr rtlCol="0" anchor="ctr"/>
-          <a:lstStyle/>
-          <a:p>
-            <a:pPr algn="ctr"/>
-            <a:endParaRPr sz="1050"/>
-          </a:p>
-        </p:txBody>
-      </p:sp>
-      <p:sp>
-        <p:nvSpPr>
-          <p:cNvPr id="21" name="Oval 20"/>
-          <p:cNvSpPr/>
-          <p:nvPr/>
-        </p:nvSpPr>
-        <p:spPr>
-          <a:xfrm>
-            <a:off x="4347972" y="1501902"/>
-            <a:ext cx="246888" cy="246888"/>
-          </a:xfrm>
-          <a:prstGeom prst="ellipse">
-            <a:avLst/>
-          </a:prstGeom>
-          <a:solidFill>
-            <a:srgbClr val="1F6F6B"/>
-          </a:solidFill>
-          <a:ln>
-            <a:noFill/>
-          </a:ln>
-          <a:effectLst/>
-        </p:spPr>
-        <p:style>
-          <a:lnRef idx="1">
-            <a:schemeClr val="accent1"/>
-          </a:lnRef>
-          <a:fillRef idx="3">
-            <a:schemeClr val="accent1"/>
-          </a:fillRef>
-          <a:effectRef idx="2">
-            <a:schemeClr val="accent1"/>
-          </a:effectRef>
-          <a:fontRef idx="minor">
-            <a:schemeClr val="lt1"/>
-          </a:fontRef>
-        </p:style>
-        <p:txBody>
-          <a:bodyPr lIns="0" tIns="0" rIns="0" bIns="0" rtlCol="0" anchor="ctr"/>
-          <a:lstStyle/>
-          <a:p>
-            <a:pPr algn="ctr"/>
-            <a:r>
-              <a:rPr sz="975" b="1">
-                <a:solidFill>
-                  <a:srgbClr val="FFFFFF"/>
-                </a:solidFill>
-                <a:latin typeface="Calibri"/>
-              </a:rPr>
-              <a:t>2</a:t>
-            </a:r>
-          </a:p>
-        </p:txBody>
-      </p:sp>
-      <p:sp>
-        <p:nvSpPr>
-          <p:cNvPr id="22" name="TextBox 21"/>
-          <p:cNvSpPr txBox="1"/>
-          <p:nvPr/>
-        </p:nvSpPr>
-        <p:spPr>
-          <a:xfrm>
-            <a:off x="4347972" y="1817370"/>
-            <a:ext cx="1131570" cy="150041"/>
-          </a:xfrm>
-          <a:prstGeom prst="rect">
-            <a:avLst/>
-          </a:prstGeom>
-          <a:noFill/>
-        </p:spPr>
-        <p:txBody>
-          <a:bodyPr wrap="square" lIns="0" tIns="0" rIns="0" bIns="0" anchor="t">
-            <a:spAutoFit/>
-          </a:bodyPr>
-          <a:lstStyle/>
-          <a:p>
-            <a:pPr>
-              <a:spcAft>
-                <a:spcPts val="225"/>
-              </a:spcAft>
-            </a:pPr>
-            <a:r>
-              <a:rPr sz="975" b="1">
-                <a:solidFill>
-                  <a:srgbClr val="12343B"/>
-                </a:solidFill>
-                <a:latin typeface="Calibri"/>
-              </a:rPr>
-              <a:t>Risk Assessor</a:t>
-            </a:r>
-          </a:p>
-        </p:txBody>
-      </p:sp>
-      <p:sp>
-        <p:nvSpPr>
-          <p:cNvPr id="23" name="TextBox 22"/>
-          <p:cNvSpPr txBox="1"/>
-          <p:nvPr/>
-        </p:nvSpPr>
-        <p:spPr>
-          <a:xfrm>
-            <a:off x="4347972" y="2036826"/>
-            <a:ext cx="1131570" cy="380873"/>
-          </a:xfrm>
-          <a:prstGeom prst="rect">
-            <a:avLst/>
-          </a:prstGeom>
-          <a:noFill/>
-        </p:spPr>
-        <p:txBody>
-          <a:bodyPr wrap="square" lIns="0" tIns="0" rIns="0" bIns="0" anchor="t">
-            <a:spAutoFit/>
-          </a:bodyPr>
-          <a:lstStyle/>
-          <a:p>
-            <a:pPr>
-              <a:spcAft>
-                <a:spcPts val="225"/>
-              </a:spcAft>
-            </a:pPr>
-            <a:r>
-              <a:rPr sz="825">
-                <a:solidFill>
-                  <a:srgbClr val="4A5A5D"/>
-                </a:solidFill>
-                <a:latin typeface="Calibri"/>
-              </a:rPr>
-              <a:t>Scores exposure, fragility and tract need for each business</a:t>
-            </a:r>
-          </a:p>
-        </p:txBody>
-      </p:sp>
-      <p:cxnSp>
-        <p:nvCxnSpPr>
-          <p:cNvPr id="24" name="Connector 23"/>
-          <p:cNvCxnSpPr/>
-          <p:nvPr/>
-        </p:nvCxnSpPr>
-        <p:spPr>
-          <a:xfrm>
-            <a:off x="5602986" y="1988820"/>
-            <a:ext cx="164592" cy="0"/>
-          </a:xfrm>
-          <a:prstGeom prst="line">
-            <a:avLst/>
-          </a:prstGeom>
-          <a:ln w="25400">
-            <a:solidFill>
-              <a:srgbClr val="1F6F6B"/>
-            </a:solidFill>
-            <a:tailEnd type="triangle" w="med" len="med"/>
-          </a:ln>
-        </p:spPr>
-        <p:style>
-          <a:lnRef idx="2">
-            <a:schemeClr val="accent1"/>
-          </a:lnRef>
-          <a:fillRef idx="0">
-            <a:schemeClr val="accent1"/>
-          </a:fillRef>
-          <a:effectRef idx="1">
-            <a:schemeClr val="accent1"/>
-          </a:effectRef>
-          <a:fontRef idx="minor">
-            <a:schemeClr val="tx1"/>
-          </a:fontRef>
-        </p:style>
-      </p:cxnSp>
-      <p:sp>
-        <p:nvSpPr>
-          <p:cNvPr id="25" name="Agent 3"/>
-          <p:cNvSpPr/>
-          <p:nvPr/>
-        </p:nvSpPr>
-        <p:spPr>
-          <a:xfrm>
-            <a:off x="5795009" y="1405889"/>
-            <a:ext cx="1323594" cy="1165860"/>
-          </a:xfrm>
-          <a:prstGeom prst="roundRect">
-            <a:avLst>
-              <a:gd name="adj" fmla="val 7058"/>
-            </a:avLst>
-          </a:prstGeom>
-          <a:solidFill>
-            <a:srgbClr val="FFFFFF"/>
-          </a:solidFill>
-          <a:ln w="12700">
-            <a:solidFill>
-              <a:srgbClr val="B8D4D0"/>
-            </a:solidFill>
-          </a:ln>
-          <a:effectLst/>
-        </p:spPr>
-        <p:style>
-          <a:lnRef idx="1">
-            <a:schemeClr val="accent1"/>
-          </a:lnRef>
-          <a:fillRef idx="3">
-            <a:schemeClr val="accent1"/>
-          </a:fillRef>
-          <a:effectRef idx="2">
-            <a:schemeClr val="accent1"/>
-          </a:effectRef>
-          <a:fontRef idx="minor">
-            <a:schemeClr val="lt1"/>
-          </a:fontRef>
-        </p:style>
-        <p:txBody>
-          <a:bodyPr rtlCol="0" anchor="ctr"/>
-          <a:lstStyle/>
-          <a:p>
-            <a:pPr algn="ctr"/>
-            <a:endParaRPr sz="1050"/>
-          </a:p>
-        </p:txBody>
-      </p:sp>
-      <p:sp>
-        <p:nvSpPr>
-          <p:cNvPr id="26" name="Oval 25"/>
-          <p:cNvSpPr/>
-          <p:nvPr/>
-        </p:nvSpPr>
-        <p:spPr>
-          <a:xfrm>
-            <a:off x="5891022" y="1501902"/>
-            <a:ext cx="246888" cy="246888"/>
-          </a:xfrm>
-          <a:prstGeom prst="ellipse">
-            <a:avLst/>
-          </a:prstGeom>
-          <a:solidFill>
-            <a:srgbClr val="C27C00"/>
-          </a:solidFill>
-          <a:ln>
-            <a:noFill/>
-          </a:ln>
-          <a:effectLst/>
-        </p:spPr>
-        <p:style>
-          <a:lnRef idx="1">
-            <a:schemeClr val="accent1"/>
-          </a:lnRef>
-          <a:fillRef idx="3">
-            <a:schemeClr val="accent1"/>
-          </a:fillRef>
-          <a:effectRef idx="2">
-            <a:schemeClr val="accent1"/>
-          </a:effectRef>
-          <a:fontRef idx="minor">
-            <a:schemeClr val="lt1"/>
-          </a:fontRef>
-        </p:style>
-        <p:txBody>
-          <a:bodyPr lIns="0" tIns="0" rIns="0" bIns="0" rtlCol="0" anchor="ctr"/>
-          <a:lstStyle/>
-          <a:p>
-            <a:pPr algn="ctr"/>
-            <a:r>
-              <a:rPr sz="975" b="1">
-                <a:solidFill>
-                  <a:srgbClr val="FFFFFF"/>
-                </a:solidFill>
-                <a:latin typeface="Calibri"/>
-              </a:rPr>
-              <a:t>3</a:t>
-            </a:r>
-          </a:p>
-        </p:txBody>
-      </p:sp>
-      <p:sp>
-        <p:nvSpPr>
-          <p:cNvPr id="27" name="TextBox 26"/>
-          <p:cNvSpPr txBox="1"/>
-          <p:nvPr/>
-        </p:nvSpPr>
-        <p:spPr>
-          <a:xfrm>
-            <a:off x="5891022" y="1817370"/>
-            <a:ext cx="1131570" cy="150041"/>
-          </a:xfrm>
-          <a:prstGeom prst="rect">
-            <a:avLst/>
-          </a:prstGeom>
-          <a:noFill/>
-        </p:spPr>
-        <p:txBody>
-          <a:bodyPr wrap="square" lIns="0" tIns="0" rIns="0" bIns="0" anchor="t">
-            <a:spAutoFit/>
-          </a:bodyPr>
-          <a:lstStyle/>
-          <a:p>
-            <a:pPr>
-              <a:spcAft>
-                <a:spcPts val="225"/>
-              </a:spcAft>
-            </a:pPr>
-            <a:r>
-              <a:rPr sz="975" b="1">
-                <a:solidFill>
-                  <a:srgbClr val="12343B"/>
-                </a:solidFill>
-                <a:latin typeface="Calibri"/>
-              </a:rPr>
-              <a:t>Grant Allocator</a:t>
-            </a:r>
-          </a:p>
-        </p:txBody>
-      </p:sp>
-      <p:sp>
-        <p:nvSpPr>
-          <p:cNvPr id="28" name="TextBox 27"/>
-          <p:cNvSpPr txBox="1"/>
-          <p:nvPr/>
-        </p:nvSpPr>
-        <p:spPr>
-          <a:xfrm>
-            <a:off x="5891022" y="2036826"/>
-            <a:ext cx="1131570" cy="380873"/>
-          </a:xfrm>
-          <a:prstGeom prst="rect">
-            <a:avLst/>
-          </a:prstGeom>
-          <a:noFill/>
-        </p:spPr>
-        <p:txBody>
-          <a:bodyPr wrap="square" lIns="0" tIns="0" rIns="0" bIns="0" anchor="t">
-            <a:spAutoFit/>
-          </a:bodyPr>
-          <a:lstStyle/>
-          <a:p>
-            <a:pPr>
-              <a:spcAft>
-                <a:spcPts val="225"/>
-              </a:spcAft>
-            </a:pPr>
-            <a:r>
-              <a:rPr sz="825">
-                <a:solidFill>
-                  <a:srgbClr val="4A5A5D"/>
-                </a:solidFill>
-                <a:latin typeface="Calibri"/>
-              </a:rPr>
-              <a:t>Splits the budget, names the runner-up, tests the assumption</a:t>
-            </a:r>
-          </a:p>
-        </p:txBody>
-      </p:sp>
-      <p:cxnSp>
-        <p:nvCxnSpPr>
-          <p:cNvPr id="29" name="Connector 28"/>
-          <p:cNvCxnSpPr/>
-          <p:nvPr/>
-        </p:nvCxnSpPr>
-        <p:spPr>
-          <a:xfrm>
-            <a:off x="7146036" y="1988820"/>
-            <a:ext cx="164593" cy="0"/>
-          </a:xfrm>
-          <a:prstGeom prst="line">
-            <a:avLst/>
-          </a:prstGeom>
-          <a:ln w="25400">
-            <a:solidFill>
-              <a:srgbClr val="1F6F6B"/>
-            </a:solidFill>
-            <a:tailEnd type="triangle" w="med" len="med"/>
-          </a:ln>
-        </p:spPr>
-        <p:style>
-          <a:lnRef idx="2">
-            <a:schemeClr val="accent1"/>
-          </a:lnRef>
-          <a:fillRef idx="0">
-            <a:schemeClr val="accent1"/>
-          </a:fillRef>
-          <a:effectRef idx="1">
-            <a:schemeClr val="accent1"/>
-          </a:effectRef>
-          <a:fontRef idx="minor">
-            <a:schemeClr val="tx1"/>
-          </a:fontRef>
-        </p:style>
-      </p:cxnSp>
-      <p:sp>
-        <p:nvSpPr>
-          <p:cNvPr id="30" name="Agent 4"/>
-          <p:cNvSpPr/>
-          <p:nvPr/>
-        </p:nvSpPr>
-        <p:spPr>
-          <a:xfrm>
-            <a:off x="7338060" y="1405889"/>
-            <a:ext cx="1323594" cy="1165860"/>
-          </a:xfrm>
-          <a:prstGeom prst="roundRect">
-            <a:avLst>
-              <a:gd name="adj" fmla="val 7058"/>
-            </a:avLst>
-          </a:prstGeom>
-          <a:solidFill>
-            <a:srgbClr val="FFFFFF"/>
-          </a:solidFill>
-          <a:ln w="12700">
-            <a:solidFill>
-              <a:srgbClr val="B8D4D0"/>
-            </a:solidFill>
-          </a:ln>
-          <a:effectLst/>
-        </p:spPr>
-        <p:style>
-          <a:lnRef idx="1">
-            <a:schemeClr val="accent1"/>
-          </a:lnRef>
-          <a:fillRef idx="3">
-            <a:schemeClr val="accent1"/>
-          </a:fillRef>
-          <a:effectRef idx="2">
-            <a:schemeClr val="accent1"/>
-          </a:effectRef>
-          <a:fontRef idx="minor">
-            <a:schemeClr val="lt1"/>
-          </a:fontRef>
-        </p:style>
-        <p:txBody>
-          <a:bodyPr rtlCol="0" anchor="ctr"/>
-          <a:lstStyle/>
-          <a:p>
-            <a:pPr algn="ctr"/>
-            <a:endParaRPr sz="1050"/>
-          </a:p>
-        </p:txBody>
-      </p:sp>
-      <p:sp>
-        <p:nvSpPr>
-          <p:cNvPr id="31" name="Oval 30"/>
-          <p:cNvSpPr/>
-          <p:nvPr/>
-        </p:nvSpPr>
-        <p:spPr>
-          <a:xfrm>
-            <a:off x="7434072" y="1501902"/>
-            <a:ext cx="246888" cy="246888"/>
-          </a:xfrm>
-          <a:prstGeom prst="ellipse">
-            <a:avLst/>
-          </a:prstGeom>
-          <a:solidFill>
-            <a:srgbClr val="1F6F6B"/>
-          </a:solidFill>
-          <a:ln>
-            <a:noFill/>
-          </a:ln>
-          <a:effectLst/>
-        </p:spPr>
-        <p:style>
-          <a:lnRef idx="1">
-            <a:schemeClr val="accent1"/>
-          </a:lnRef>
-          <a:fillRef idx="3">
-            <a:schemeClr val="accent1"/>
-          </a:fillRef>
-          <a:effectRef idx="2">
-            <a:schemeClr val="accent1"/>
-          </a:effectRef>
-          <a:fontRef idx="minor">
-            <a:schemeClr val="lt1"/>
-          </a:fontRef>
-        </p:style>
-        <p:txBody>
-          <a:bodyPr lIns="0" tIns="0" rIns="0" bIns="0" rtlCol="0" anchor="ctr"/>
-          <a:lstStyle/>
-          <a:p>
-            <a:pPr algn="ctr"/>
-            <a:r>
-              <a:rPr sz="975" b="1">
-                <a:solidFill>
-                  <a:srgbClr val="FFFFFF"/>
-                </a:solidFill>
-                <a:latin typeface="Calibri"/>
-              </a:rPr>
-              <a:t>4</a:t>
-            </a:r>
-          </a:p>
-        </p:txBody>
-      </p:sp>
-      <p:sp>
-        <p:nvSpPr>
-          <p:cNvPr id="32" name="TextBox 31"/>
-          <p:cNvSpPr txBox="1"/>
-          <p:nvPr/>
-        </p:nvSpPr>
-        <p:spPr>
-          <a:xfrm>
-            <a:off x="7434072" y="1817370"/>
-            <a:ext cx="1131570" cy="150041"/>
-          </a:xfrm>
-          <a:prstGeom prst="rect">
-            <a:avLst/>
-          </a:prstGeom>
-          <a:noFill/>
-        </p:spPr>
-        <p:txBody>
-          <a:bodyPr wrap="square" lIns="0" tIns="0" rIns="0" bIns="0" anchor="t">
-            <a:spAutoFit/>
-          </a:bodyPr>
-          <a:lstStyle/>
-          <a:p>
-            <a:pPr>
-              <a:spcAft>
-                <a:spcPts val="225"/>
-              </a:spcAft>
-            </a:pPr>
-            <a:r>
-              <a:rPr sz="975" b="1">
-                <a:solidFill>
-                  <a:srgbClr val="12343B"/>
-                </a:solidFill>
-                <a:latin typeface="Calibri"/>
-              </a:rPr>
-              <a:t>Memo Writer</a:t>
-            </a:r>
-          </a:p>
-        </p:txBody>
-      </p:sp>
-      <p:sp>
-        <p:nvSpPr>
-          <p:cNvPr id="33" name="TextBox 32"/>
-          <p:cNvSpPr txBox="1"/>
-          <p:nvPr/>
-        </p:nvSpPr>
-        <p:spPr>
-          <a:xfrm>
-            <a:off x="7434072" y="2036826"/>
-            <a:ext cx="1131570" cy="253916"/>
-          </a:xfrm>
-          <a:prstGeom prst="rect">
-            <a:avLst/>
-          </a:prstGeom>
-          <a:noFill/>
-        </p:spPr>
-        <p:txBody>
-          <a:bodyPr wrap="square" lIns="0" tIns="0" rIns="0" bIns="0" anchor="t">
-            <a:spAutoFit/>
-          </a:bodyPr>
-          <a:lstStyle/>
-          <a:p>
-            <a:pPr>
-              <a:spcAft>
-                <a:spcPts val="225"/>
-              </a:spcAft>
-            </a:pPr>
-            <a:r>
-              <a:rPr sz="825">
-                <a:solidFill>
-                  <a:srgbClr val="4A5A5D"/>
-                </a:solidFill>
-                <a:latin typeface="Calibri"/>
-              </a:rPr>
-              <a:t>Writes every justification and the grant memo</a:t>
-            </a:r>
-          </a:p>
-        </p:txBody>
-      </p:sp>
-      <p:sp>
-        <p:nvSpPr>
-          <p:cNvPr id="34" name="Session state"/>
-          <p:cNvSpPr/>
-          <p:nvPr/>
-        </p:nvSpPr>
-        <p:spPr>
-          <a:xfrm>
-            <a:off x="2708910" y="2647188"/>
-            <a:ext cx="5952744" cy="274320"/>
-          </a:xfrm>
-          <a:prstGeom prst="roundRect">
-            <a:avLst>
-              <a:gd name="adj" fmla="val 12000"/>
-            </a:avLst>
-          </a:prstGeom>
-          <a:solidFill>
-            <a:srgbClr val="FFFFFF"/>
-          </a:solidFill>
-          <a:ln w="12700">
-            <a:solidFill>
-              <a:srgbClr val="B8D4D0"/>
-            </a:solidFill>
-          </a:ln>
-          <a:effectLst/>
-        </p:spPr>
-        <p:style>
-          <a:lnRef idx="1">
-            <a:schemeClr val="accent1"/>
-          </a:lnRef>
-          <a:fillRef idx="3">
-            <a:schemeClr val="accent1"/>
-          </a:fillRef>
-          <a:effectRef idx="2">
-            <a:schemeClr val="accent1"/>
-          </a:effectRef>
-          <a:fontRef idx="minor">
-            <a:schemeClr val="lt1"/>
-          </a:fontRef>
-        </p:style>
-        <p:txBody>
-          <a:bodyPr rtlCol="0" anchor="ctr"/>
-          <a:lstStyle/>
-          <a:p>
-            <a:pPr algn="ctr"/>
-            <a:endParaRPr sz="1050"/>
-          </a:p>
-        </p:txBody>
-      </p:sp>
-      <p:sp>
-        <p:nvSpPr>
-          <p:cNvPr id="35" name="TextBox 34"/>
-          <p:cNvSpPr txBox="1"/>
-          <p:nvPr/>
-        </p:nvSpPr>
-        <p:spPr>
-          <a:xfrm>
-            <a:off x="2811780" y="2720870"/>
-            <a:ext cx="5747004" cy="126958"/>
-          </a:xfrm>
-          <a:prstGeom prst="rect">
-            <a:avLst/>
-          </a:prstGeom>
-          <a:noFill/>
-        </p:spPr>
-        <p:txBody>
-          <a:bodyPr wrap="square" lIns="0" tIns="0" rIns="0" bIns="0" anchor="ctr">
-            <a:spAutoFit/>
-          </a:bodyPr>
-          <a:lstStyle/>
-          <a:p>
-            <a:pPr>
-              <a:spcAft>
-                <a:spcPts val="225"/>
-              </a:spcAft>
-            </a:pPr>
-            <a:r>
-              <a:rPr sz="825" b="1">
-                <a:solidFill>
-                  <a:srgbClr val="1F6F6B"/>
-                </a:solidFill>
-                <a:latin typeface="Calibri"/>
-              </a:rPr>
-              <a:t>Shared session.state   </a:t>
-            </a:r>
-            <a:r>
-              <a:rPr sz="825">
-                <a:solidFill>
-                  <a:srgbClr val="12343B"/>
-                </a:solidFill>
-                <a:latin typeface="Calibri"/>
-              </a:rPr>
-              <a:t>cascade  →  risk  →  allocation  →  decisions</a:t>
-            </a:r>
-          </a:p>
-        </p:txBody>
-      </p:sp>
-      <p:sp>
-        <p:nvSpPr>
-          <p:cNvPr id="36" name="MCP Toolbox"/>
-          <p:cNvSpPr/>
-          <p:nvPr/>
-        </p:nvSpPr>
-        <p:spPr>
-          <a:xfrm>
-            <a:off x="2708911" y="3326130"/>
-            <a:ext cx="2866643" cy="720090"/>
-          </a:xfrm>
-          <a:prstGeom prst="roundRect">
-            <a:avLst>
-              <a:gd name="adj" fmla="val 11428"/>
-            </a:avLst>
-          </a:prstGeom>
-          <a:solidFill>
-            <a:srgbClr val="FFFFFF"/>
-          </a:solidFill>
-          <a:ln w="19050">
-            <a:solidFill>
-              <a:srgbClr val="1F6F6B"/>
-            </a:solidFill>
-          </a:ln>
-          <a:effectLst/>
-        </p:spPr>
-        <p:style>
-          <a:lnRef idx="1">
-            <a:schemeClr val="accent1"/>
-          </a:lnRef>
-          <a:fillRef idx="3">
-            <a:schemeClr val="accent1"/>
-          </a:fillRef>
-          <a:effectRef idx="2">
-            <a:schemeClr val="accent1"/>
-          </a:effectRef>
-          <a:fontRef idx="minor">
-            <a:schemeClr val="lt1"/>
-          </a:fontRef>
-        </p:style>
-        <p:txBody>
-          <a:bodyPr rtlCol="0" anchor="ctr"/>
-          <a:lstStyle/>
-          <a:p>
-            <a:pPr algn="ctr"/>
-            <a:endParaRPr sz="1050"/>
-          </a:p>
-        </p:txBody>
-      </p:sp>
-      <p:sp>
-        <p:nvSpPr>
-          <p:cNvPr id="37" name="TextBox 36"/>
-          <p:cNvSpPr txBox="1"/>
-          <p:nvPr/>
-        </p:nvSpPr>
-        <p:spPr>
-          <a:xfrm>
-            <a:off x="2832354" y="3394710"/>
-            <a:ext cx="2619756" cy="429605"/>
-          </a:xfrm>
-          <a:prstGeom prst="rect">
-            <a:avLst/>
-          </a:prstGeom>
-          <a:noFill/>
-        </p:spPr>
-        <p:txBody>
-          <a:bodyPr wrap="square" lIns="0" tIns="0" rIns="0" bIns="0" anchor="t">
-            <a:spAutoFit/>
-          </a:bodyPr>
-          <a:lstStyle/>
-          <a:p>
-            <a:pPr>
-              <a:spcAft>
-                <a:spcPts val="225"/>
-              </a:spcAft>
-            </a:pPr>
-            <a:r>
-              <a:rPr sz="975" b="1">
-                <a:solidFill>
-                  <a:srgbClr val="12343B"/>
-                </a:solidFill>
-                <a:latin typeface="Calibri"/>
-              </a:rPr>
-              <a:t>MCP Toolbox for Databases </a:t>
-            </a:r>
-            <a:r>
-              <a:rPr sz="825">
-                <a:solidFill>
-                  <a:srgbClr val="1F6F6B"/>
-                </a:solidFill>
-                <a:latin typeface="Calibri"/>
-              </a:rPr>
-              <a:t>· Cloud Run</a:t>
-            </a:r>
-          </a:p>
-          <a:p>
-            <a:pPr>
-              <a:spcAft>
-                <a:spcPts val="225"/>
-              </a:spcAft>
-            </a:pPr>
-            <a:r>
-              <a:rPr sz="825">
-                <a:solidFill>
-                  <a:srgbClr val="4A5A5D"/>
-                </a:solidFill>
-                <a:latin typeface="Calibri"/>
-              </a:rPr>
-              <a:t>anchor_cascade (GQL) · supply_cascade · business_profile · tract_profile · loan_history</a:t>
-            </a:r>
-          </a:p>
-        </p:txBody>
-      </p:sp>
-      <p:sp>
-        <p:nvSpPr>
-          <p:cNvPr id="38" name="Python tools"/>
-          <p:cNvSpPr/>
-          <p:nvPr/>
-        </p:nvSpPr>
-        <p:spPr>
-          <a:xfrm>
-            <a:off x="5795010" y="3326130"/>
-            <a:ext cx="2866643" cy="720090"/>
-          </a:xfrm>
-          <a:prstGeom prst="roundRect">
-            <a:avLst>
-              <a:gd name="adj" fmla="val 11428"/>
-            </a:avLst>
-          </a:prstGeom>
-          <a:solidFill>
-            <a:srgbClr val="FFFFFF"/>
-          </a:solidFill>
-          <a:ln w="19050">
-            <a:solidFill>
-              <a:srgbClr val="C27C00"/>
-            </a:solidFill>
-          </a:ln>
-          <a:effectLst/>
-        </p:spPr>
-        <p:style>
-          <a:lnRef idx="1">
-            <a:schemeClr val="accent1"/>
-          </a:lnRef>
-          <a:fillRef idx="3">
-            <a:schemeClr val="accent1"/>
-          </a:fillRef>
-          <a:effectRef idx="2">
-            <a:schemeClr val="accent1"/>
-          </a:effectRef>
-          <a:fontRef idx="minor">
-            <a:schemeClr val="lt1"/>
-          </a:fontRef>
-        </p:style>
-        <p:txBody>
-          <a:bodyPr rtlCol="0" anchor="ctr"/>
-          <a:lstStyle/>
-          <a:p>
-            <a:pPr algn="ctr"/>
-            <a:endParaRPr sz="1050"/>
-          </a:p>
-        </p:txBody>
-      </p:sp>
-      <p:sp>
-        <p:nvSpPr>
-          <p:cNvPr id="39" name="TextBox 38"/>
-          <p:cNvSpPr txBox="1"/>
-          <p:nvPr/>
-        </p:nvSpPr>
-        <p:spPr>
-          <a:xfrm>
-            <a:off x="5918453" y="3394710"/>
-            <a:ext cx="2619756" cy="429605"/>
-          </a:xfrm>
-          <a:prstGeom prst="rect">
-            <a:avLst/>
-          </a:prstGeom>
-          <a:noFill/>
-        </p:spPr>
-        <p:txBody>
-          <a:bodyPr wrap="square" lIns="0" tIns="0" rIns="0" bIns="0" anchor="t">
-            <a:spAutoFit/>
-          </a:bodyPr>
-          <a:lstStyle/>
-          <a:p>
-            <a:pPr>
-              <a:spcAft>
-                <a:spcPts val="225"/>
-              </a:spcAft>
-            </a:pPr>
-            <a:r>
-              <a:rPr sz="975" b="1">
-                <a:solidFill>
-                  <a:srgbClr val="12343B"/>
-                </a:solidFill>
-                <a:latin typeface="Calibri"/>
-              </a:rPr>
-              <a:t>Custom Python tools </a:t>
-            </a:r>
-            <a:r>
-              <a:rPr sz="825">
-                <a:solidFill>
-                  <a:srgbClr val="C27C00"/>
-                </a:solidFill>
-                <a:latin typeface="Calibri"/>
-              </a:rPr>
-              <a:t>· ADK FunctionTool</a:t>
-            </a:r>
-          </a:p>
-          <a:p>
-            <a:pPr>
-              <a:spcAft>
-                <a:spcPts val="225"/>
-              </a:spcAft>
-            </a:pPr>
-            <a:r>
-              <a:rPr sz="825">
-                <a:solidFill>
-                  <a:srgbClr val="4A5A5D"/>
-                </a:solidFill>
-                <a:latin typeface="Calibri"/>
-              </a:rPr>
-              <a:t>score_exposure · fragility · allocate_budget · sensitivity · equity_audit · build_memo</a:t>
-            </a:r>
-          </a:p>
-        </p:txBody>
-      </p:sp>
-      <p:cxnSp>
-        <p:nvCxnSpPr>
-          <p:cNvPr id="40" name="Connector 39"/>
-          <p:cNvCxnSpPr/>
-          <p:nvPr/>
-        </p:nvCxnSpPr>
-        <p:spPr>
-          <a:xfrm>
-            <a:off x="3370707" y="3051810"/>
-            <a:ext cx="0" cy="274320"/>
-          </a:xfrm>
-          <a:prstGeom prst="line">
-            <a:avLst/>
-          </a:prstGeom>
-          <a:ln w="22225">
-            <a:solidFill>
-              <a:srgbClr val="1F6F6B"/>
-            </a:solidFill>
-            <a:prstDash val="dash"/>
-            <a:tailEnd type="triangle" w="med" len="med"/>
-          </a:ln>
-        </p:spPr>
-        <p:style>
-          <a:lnRef idx="2">
-            <a:schemeClr val="accent1"/>
-          </a:lnRef>
-          <a:fillRef idx="0">
-            <a:schemeClr val="accent1"/>
-          </a:fillRef>
-          <a:effectRef idx="1">
-            <a:schemeClr val="accent1"/>
-          </a:effectRef>
-          <a:fontRef idx="minor">
-            <a:schemeClr val="tx1"/>
-          </a:fontRef>
-        </p:style>
-      </p:cxnSp>
-      <p:cxnSp>
-        <p:nvCxnSpPr>
-          <p:cNvPr id="41" name="Connector 40"/>
-          <p:cNvCxnSpPr/>
-          <p:nvPr/>
-        </p:nvCxnSpPr>
-        <p:spPr>
-          <a:xfrm>
-            <a:off x="4913757" y="3051810"/>
-            <a:ext cx="0" cy="274320"/>
-          </a:xfrm>
-          <a:prstGeom prst="line">
-            <a:avLst/>
-          </a:prstGeom>
-          <a:ln w="22225">
-            <a:solidFill>
-              <a:srgbClr val="1F6F6B"/>
-            </a:solidFill>
-            <a:prstDash val="dash"/>
-            <a:tailEnd type="triangle" w="med" len="med"/>
-          </a:ln>
-        </p:spPr>
-        <p:style>
-          <a:lnRef idx="2">
-            <a:schemeClr val="accent1"/>
-          </a:lnRef>
-          <a:fillRef idx="0">
-            <a:schemeClr val="accent1"/>
-          </a:fillRef>
-          <a:effectRef idx="1">
-            <a:schemeClr val="accent1"/>
-          </a:effectRef>
-          <a:fontRef idx="minor">
-            <a:schemeClr val="tx1"/>
-          </a:fontRef>
-        </p:style>
-      </p:cxnSp>
-      <p:cxnSp>
-        <p:nvCxnSpPr>
-          <p:cNvPr id="42" name="Connector 41"/>
-          <p:cNvCxnSpPr/>
-          <p:nvPr/>
-        </p:nvCxnSpPr>
-        <p:spPr>
-          <a:xfrm>
-            <a:off x="6456807" y="3051810"/>
-            <a:ext cx="0" cy="274320"/>
-          </a:xfrm>
-          <a:prstGeom prst="line">
-            <a:avLst/>
-          </a:prstGeom>
-          <a:ln w="22225">
-            <a:solidFill>
-              <a:srgbClr val="C27C00"/>
-            </a:solidFill>
-            <a:prstDash val="sysDot"/>
-            <a:tailEnd type="triangle" w="med" len="med"/>
-          </a:ln>
-        </p:spPr>
-        <p:style>
-          <a:lnRef idx="2">
-            <a:schemeClr val="accent1"/>
-          </a:lnRef>
-          <a:fillRef idx="0">
-            <a:schemeClr val="accent1"/>
-          </a:fillRef>
-          <a:effectRef idx="1">
-            <a:schemeClr val="accent1"/>
-          </a:effectRef>
-          <a:fontRef idx="minor">
-            <a:schemeClr val="tx1"/>
-          </a:fontRef>
-        </p:style>
-      </p:cxnSp>
-      <p:cxnSp>
-        <p:nvCxnSpPr>
-          <p:cNvPr id="43" name="Connector 42"/>
-          <p:cNvCxnSpPr/>
-          <p:nvPr/>
-        </p:nvCxnSpPr>
-        <p:spPr>
-          <a:xfrm>
-            <a:off x="7999857" y="3051810"/>
-            <a:ext cx="0" cy="274320"/>
-          </a:xfrm>
-          <a:prstGeom prst="line">
-            <a:avLst/>
-          </a:prstGeom>
-          <a:ln w="22225">
-            <a:solidFill>
-              <a:srgbClr val="C27C00"/>
-            </a:solidFill>
-            <a:prstDash val="sysDot"/>
-            <a:tailEnd type="triangle" w="med" len="med"/>
-          </a:ln>
-        </p:spPr>
-        <p:style>
-          <a:lnRef idx="2">
-            <a:schemeClr val="accent1"/>
-          </a:lnRef>
-          <a:fillRef idx="0">
-            <a:schemeClr val="accent1"/>
-          </a:fillRef>
-          <a:effectRef idx="1">
-            <a:schemeClr val="accent1"/>
-          </a:effectRef>
-          <a:fontRef idx="minor">
-            <a:schemeClr val="tx1"/>
-          </a:fontRef>
-        </p:style>
-      </p:cxnSp>
-      <p:sp>
-        <p:nvSpPr>
-          <p:cNvPr id="44" name="BigQuery"/>
-          <p:cNvSpPr/>
-          <p:nvPr/>
-        </p:nvSpPr>
-        <p:spPr>
-          <a:xfrm>
-            <a:off x="2708910" y="4286250"/>
-            <a:ext cx="5952744" cy="534924"/>
-          </a:xfrm>
-          <a:prstGeom prst="roundRect">
-            <a:avLst>
-              <a:gd name="adj" fmla="val 12000"/>
-            </a:avLst>
-          </a:prstGeom>
-          <a:solidFill>
-            <a:srgbClr val="12343B"/>
-          </a:solidFill>
-          <a:ln>
-            <a:noFill/>
-          </a:ln>
-          <a:effectLst/>
-        </p:spPr>
-        <p:style>
-          <a:lnRef idx="1">
-            <a:schemeClr val="accent1"/>
-          </a:lnRef>
-          <a:fillRef idx="3">
-            <a:schemeClr val="accent1"/>
-          </a:fillRef>
-          <a:effectRef idx="2">
-            <a:schemeClr val="accent1"/>
-          </a:effectRef>
-          <a:fontRef idx="minor">
-            <a:schemeClr val="lt1"/>
-          </a:fontRef>
-        </p:style>
-        <p:txBody>
-          <a:bodyPr rtlCol="0" anchor="ctr"/>
-          <a:lstStyle/>
-          <a:p>
-            <a:pPr algn="ctr"/>
-            <a:endParaRPr sz="1050"/>
-          </a:p>
-        </p:txBody>
-      </p:sp>
-      <p:sp>
-        <p:nvSpPr>
-          <p:cNvPr id="45" name="TextBox 44"/>
-          <p:cNvSpPr txBox="1"/>
-          <p:nvPr/>
-        </p:nvSpPr>
-        <p:spPr>
-          <a:xfrm>
-            <a:off x="2846071" y="4416105"/>
-            <a:ext cx="5678423" cy="302647"/>
-          </a:xfrm>
-          <a:prstGeom prst="rect">
-            <a:avLst/>
-          </a:prstGeom>
-          <a:noFill/>
-        </p:spPr>
-        <p:txBody>
-          <a:bodyPr wrap="square" lIns="0" tIns="0" rIns="0" bIns="0" anchor="ctr">
-            <a:spAutoFit/>
-          </a:bodyPr>
-          <a:lstStyle/>
-          <a:p>
-            <a:pPr>
-              <a:spcAft>
-                <a:spcPts val="225"/>
-              </a:spcAft>
-            </a:pPr>
-            <a:r>
-              <a:rPr sz="975" b="1">
-                <a:solidFill>
-                  <a:srgbClr val="FFFFFF"/>
-                </a:solidFill>
-                <a:latin typeface="Calibri"/>
-              </a:rPr>
-              <a:t>BigQuery </a:t>
-            </a:r>
-            <a:r>
-              <a:rPr sz="825">
-                <a:solidFill>
-                  <a:srgbClr val="B8D4D0"/>
-                </a:solidFill>
-                <a:latin typeface="Calibri"/>
-              </a:rPr>
-              <a:t>· a4i_econ · property graph LocalEconomy, queried with GQL · Enterprise reservation</a:t>
-            </a:r>
-          </a:p>
-          <a:p>
-            <a:pPr>
-              <a:spcAft>
-                <a:spcPts val="225"/>
-              </a:spcAft>
-            </a:pPr>
-            <a:r>
-              <a:rPr sz="825">
-                <a:solidFill>
-                  <a:srgbClr val="FFFFFF"/>
-                </a:solidFill>
-                <a:latin typeface="Calibri"/>
-              </a:rPr>
-              <a:t>businesses · employer_blocks · supplies · draws_footfall_from · borrowed_from · tract_demographics</a:t>
-            </a:r>
-          </a:p>
-        </p:txBody>
-      </p:sp>
-      <p:cxnSp>
-        <p:nvCxnSpPr>
-          <p:cNvPr id="46" name="Connector 45"/>
-          <p:cNvCxnSpPr/>
-          <p:nvPr/>
-        </p:nvCxnSpPr>
-        <p:spPr>
-          <a:xfrm>
-            <a:off x="4142232" y="4046220"/>
-            <a:ext cx="0" cy="240031"/>
-          </a:xfrm>
-          <a:prstGeom prst="line">
-            <a:avLst/>
-          </a:prstGeom>
-          <a:ln w="22225">
-            <a:solidFill>
-              <a:srgbClr val="1F6F6B"/>
-            </a:solidFill>
-            <a:prstDash val="dash"/>
-            <a:tailEnd type="triangle" w="med" len="med"/>
-          </a:ln>
-        </p:spPr>
-        <p:style>
-          <a:lnRef idx="2">
-            <a:schemeClr val="accent1"/>
-          </a:lnRef>
-          <a:fillRef idx="0">
-            <a:schemeClr val="accent1"/>
-          </a:fillRef>
-          <a:effectRef idx="1">
-            <a:schemeClr val="accent1"/>
-          </a:effectRef>
-          <a:fontRef idx="minor">
-            <a:schemeClr val="tx1"/>
-          </a:fontRef>
-        </p:style>
-      </p:cxnSp>
-      <p:sp>
-        <p:nvSpPr>
-          <p:cNvPr id="47" name="Legend"/>
-          <p:cNvSpPr/>
-          <p:nvPr/>
-        </p:nvSpPr>
-        <p:spPr>
-          <a:xfrm>
-            <a:off x="342900" y="3566160"/>
-            <a:ext cx="1577340" cy="1255014"/>
-          </a:xfrm>
-          <a:prstGeom prst="roundRect">
-            <a:avLst>
-              <a:gd name="adj" fmla="val 6557"/>
-            </a:avLst>
-          </a:prstGeom>
-          <a:solidFill>
-            <a:srgbClr val="FFFFFF"/>
-          </a:solidFill>
-          <a:ln w="12700">
-            <a:solidFill>
-              <a:srgbClr val="B8D4D0"/>
-            </a:solidFill>
-          </a:ln>
-          <a:effectLst/>
-        </p:spPr>
-        <p:style>
-          <a:lnRef idx="1">
-            <a:schemeClr val="accent1"/>
-          </a:lnRef>
-          <a:fillRef idx="3">
-            <a:schemeClr val="accent1"/>
-          </a:fillRef>
-          <a:effectRef idx="2">
-            <a:schemeClr val="accent1"/>
-          </a:effectRef>
-          <a:fontRef idx="minor">
-            <a:schemeClr val="lt1"/>
-          </a:fontRef>
-        </p:style>
-        <p:txBody>
-          <a:bodyPr rtlCol="0" anchor="ctr"/>
-          <a:lstStyle/>
-          <a:p>
-            <a:pPr algn="ctr"/>
-            <a:endParaRPr sz="1050"/>
-          </a:p>
-        </p:txBody>
-      </p:sp>
-      <p:sp>
-        <p:nvSpPr>
-          <p:cNvPr id="48" name="TextBox 47"/>
-          <p:cNvSpPr txBox="1"/>
-          <p:nvPr/>
-        </p:nvSpPr>
-        <p:spPr>
-          <a:xfrm>
-            <a:off x="466344" y="3634740"/>
-            <a:ext cx="1330452" cy="150041"/>
-          </a:xfrm>
-          <a:prstGeom prst="rect">
-            <a:avLst/>
-          </a:prstGeom>
-          <a:noFill/>
-        </p:spPr>
-        <p:txBody>
-          <a:bodyPr wrap="square" lIns="0" tIns="0" rIns="0" bIns="0" anchor="t">
-            <a:spAutoFit/>
-          </a:bodyPr>
-          <a:lstStyle/>
-          <a:p>
-            <a:pPr>
-              <a:spcAft>
-                <a:spcPts val="225"/>
-              </a:spcAft>
-            </a:pPr>
-            <a:r>
-              <a:rPr sz="975" b="1">
-                <a:solidFill>
-                  <a:srgbClr val="12343B"/>
-                </a:solidFill>
-                <a:latin typeface="Calibri"/>
-              </a:rPr>
-              <a:t>How they talk</a:t>
-            </a:r>
-          </a:p>
-        </p:txBody>
-      </p:sp>
-      <p:cxnSp>
-        <p:nvCxnSpPr>
-          <p:cNvPr id="49" name="Connector 48"/>
-          <p:cNvCxnSpPr/>
-          <p:nvPr/>
-        </p:nvCxnSpPr>
-        <p:spPr>
-          <a:xfrm>
-            <a:off x="466344" y="3963924"/>
-            <a:ext cx="342900" cy="0"/>
-          </a:xfrm>
-          <a:prstGeom prst="line">
-            <a:avLst/>
-          </a:prstGeom>
-          <a:ln w="22225">
-            <a:solidFill>
-              <a:srgbClr val="C27C00"/>
-            </a:solidFill>
-            <a:tailEnd type="triangle" w="med" len="med"/>
-          </a:ln>
-        </p:spPr>
-        <p:style>
-          <a:lnRef idx="2">
-            <a:schemeClr val="accent1"/>
-          </a:lnRef>
-          <a:fillRef idx="0">
-            <a:schemeClr val="accent1"/>
-          </a:fillRef>
-          <a:effectRef idx="1">
-            <a:schemeClr val="accent1"/>
-          </a:effectRef>
-          <a:fontRef idx="minor">
-            <a:schemeClr val="tx1"/>
-          </a:fontRef>
-        </p:style>
-      </p:cxnSp>
-      <p:sp>
-        <p:nvSpPr>
-          <p:cNvPr id="50" name="TextBox 49"/>
-          <p:cNvSpPr txBox="1"/>
-          <p:nvPr/>
-        </p:nvSpPr>
-        <p:spPr>
-          <a:xfrm>
-            <a:off x="891541" y="3907304"/>
-            <a:ext cx="925829" cy="126958"/>
-          </a:xfrm>
-          <a:prstGeom prst="rect">
-            <a:avLst/>
-          </a:prstGeom>
-          <a:noFill/>
-        </p:spPr>
-        <p:txBody>
-          <a:bodyPr wrap="square" lIns="0" tIns="0" rIns="0" bIns="0" anchor="ctr">
-            <a:spAutoFit/>
-          </a:bodyPr>
-          <a:lstStyle/>
-          <a:p>
-            <a:pPr>
-              <a:spcAft>
-                <a:spcPts val="225"/>
-              </a:spcAft>
-            </a:pPr>
-            <a:r>
-              <a:rPr sz="825">
-                <a:solidFill>
-                  <a:srgbClr val="4A5A5D"/>
-                </a:solidFill>
-                <a:latin typeface="Calibri"/>
-              </a:rPr>
-              <a:t>HTTPS request</a:t>
-            </a:r>
-          </a:p>
-        </p:txBody>
-      </p:sp>
-      <p:cxnSp>
-        <p:nvCxnSpPr>
-          <p:cNvPr id="51" name="Connector 50"/>
-          <p:cNvCxnSpPr/>
-          <p:nvPr/>
-        </p:nvCxnSpPr>
-        <p:spPr>
-          <a:xfrm>
-            <a:off x="466344" y="4169664"/>
-            <a:ext cx="342900" cy="0"/>
-          </a:xfrm>
-          <a:prstGeom prst="line">
-            <a:avLst/>
-          </a:prstGeom>
-          <a:ln w="22225">
-            <a:solidFill>
-              <a:srgbClr val="1F6F6B"/>
-            </a:solidFill>
-            <a:tailEnd type="triangle" w="med" len="med"/>
-          </a:ln>
-        </p:spPr>
-        <p:style>
-          <a:lnRef idx="2">
-            <a:schemeClr val="accent1"/>
-          </a:lnRef>
-          <a:fillRef idx="0">
-            <a:schemeClr val="accent1"/>
-          </a:fillRef>
-          <a:effectRef idx="1">
-            <a:schemeClr val="accent1"/>
-          </a:effectRef>
-          <a:fontRef idx="minor">
-            <a:schemeClr val="tx1"/>
-          </a:fontRef>
-        </p:style>
-      </p:cxnSp>
-      <p:sp>
-        <p:nvSpPr>
-          <p:cNvPr id="52" name="TextBox 51"/>
-          <p:cNvSpPr txBox="1"/>
-          <p:nvPr/>
-        </p:nvSpPr>
-        <p:spPr>
-          <a:xfrm>
-            <a:off x="891541" y="4113044"/>
-            <a:ext cx="925829" cy="126958"/>
-          </a:xfrm>
-          <a:prstGeom prst="rect">
-            <a:avLst/>
-          </a:prstGeom>
-          <a:noFill/>
-        </p:spPr>
-        <p:txBody>
-          <a:bodyPr wrap="square" lIns="0" tIns="0" rIns="0" bIns="0" anchor="ctr">
-            <a:spAutoFit/>
-          </a:bodyPr>
-          <a:lstStyle/>
-          <a:p>
-            <a:pPr>
-              <a:spcAft>
-                <a:spcPts val="225"/>
-              </a:spcAft>
-            </a:pPr>
-            <a:r>
-              <a:rPr sz="825">
-                <a:solidFill>
-                  <a:srgbClr val="4A5A5D"/>
-                </a:solidFill>
-                <a:latin typeface="Calibri"/>
-              </a:rPr>
-              <a:t>ADK state handoff</a:t>
-            </a:r>
-          </a:p>
-        </p:txBody>
-      </p:sp>
-      <p:cxnSp>
-        <p:nvCxnSpPr>
-          <p:cNvPr id="53" name="Connector 52"/>
-          <p:cNvCxnSpPr/>
-          <p:nvPr/>
-        </p:nvCxnSpPr>
-        <p:spPr>
-          <a:xfrm>
-            <a:off x="466344" y="4375404"/>
-            <a:ext cx="342900" cy="0"/>
-          </a:xfrm>
-          <a:prstGeom prst="line">
-            <a:avLst/>
-          </a:prstGeom>
-          <a:ln w="22225">
-            <a:solidFill>
-              <a:srgbClr val="1F6F6B"/>
-            </a:solidFill>
-            <a:prstDash val="dash"/>
-            <a:tailEnd type="triangle" w="med" len="med"/>
-          </a:ln>
-        </p:spPr>
-        <p:style>
-          <a:lnRef idx="2">
-            <a:schemeClr val="accent1"/>
-          </a:lnRef>
-          <a:fillRef idx="0">
-            <a:schemeClr val="accent1"/>
-          </a:fillRef>
-          <a:effectRef idx="1">
-            <a:schemeClr val="accent1"/>
-          </a:effectRef>
-          <a:fontRef idx="minor">
-            <a:schemeClr val="tx1"/>
-          </a:fontRef>
-        </p:style>
-      </p:cxnSp>
-      <p:sp>
-        <p:nvSpPr>
-          <p:cNvPr id="54" name="TextBox 53"/>
-          <p:cNvSpPr txBox="1"/>
-          <p:nvPr/>
-        </p:nvSpPr>
-        <p:spPr>
-          <a:xfrm>
-            <a:off x="891541" y="4318784"/>
-            <a:ext cx="925829" cy="126958"/>
-          </a:xfrm>
-          <a:prstGeom prst="rect">
-            <a:avLst/>
-          </a:prstGeom>
-          <a:noFill/>
-        </p:spPr>
-        <p:txBody>
-          <a:bodyPr wrap="square" lIns="0" tIns="0" rIns="0" bIns="0" anchor="ctr">
-            <a:spAutoFit/>
-          </a:bodyPr>
-          <a:lstStyle/>
-          <a:p>
-            <a:pPr>
-              <a:spcAft>
-                <a:spcPts val="225"/>
-              </a:spcAft>
-            </a:pPr>
-            <a:r>
-              <a:rPr sz="825">
-                <a:solidFill>
-                  <a:srgbClr val="4A5A5D"/>
-                </a:solidFill>
-                <a:latin typeface="Calibri"/>
-              </a:rPr>
-              <a:t>MCP tool call</a:t>
-            </a:r>
-          </a:p>
-        </p:txBody>
-      </p:sp>
-      <p:cxnSp>
-        <p:nvCxnSpPr>
-          <p:cNvPr id="55" name="Connector 54"/>
-          <p:cNvCxnSpPr/>
-          <p:nvPr/>
-        </p:nvCxnSpPr>
-        <p:spPr>
-          <a:xfrm>
-            <a:off x="466344" y="4581144"/>
-            <a:ext cx="342900" cy="0"/>
-          </a:xfrm>
-          <a:prstGeom prst="line">
-            <a:avLst/>
-          </a:prstGeom>
-          <a:ln w="22225">
-            <a:solidFill>
-              <a:srgbClr val="C27C00"/>
-            </a:solidFill>
-            <a:prstDash val="sysDot"/>
-            <a:tailEnd type="triangle" w="med" len="med"/>
-          </a:ln>
-        </p:spPr>
-        <p:style>
-          <a:lnRef idx="2">
-            <a:schemeClr val="accent1"/>
-          </a:lnRef>
-          <a:fillRef idx="0">
-            <a:schemeClr val="accent1"/>
-          </a:fillRef>
-          <a:effectRef idx="1">
-            <a:schemeClr val="accent1"/>
-          </a:effectRef>
-          <a:fontRef idx="minor">
-            <a:schemeClr val="tx1"/>
-          </a:fontRef>
-        </p:style>
-      </p:cxnSp>
-      <p:sp>
-        <p:nvSpPr>
-          <p:cNvPr id="56" name="TextBox 55"/>
-          <p:cNvSpPr txBox="1"/>
-          <p:nvPr/>
-        </p:nvSpPr>
-        <p:spPr>
-          <a:xfrm>
-            <a:off x="891541" y="4524524"/>
-            <a:ext cx="925829" cy="126958"/>
-          </a:xfrm>
-          <a:prstGeom prst="rect">
-            <a:avLst/>
-          </a:prstGeom>
-          <a:noFill/>
-        </p:spPr>
-        <p:txBody>
-          <a:bodyPr wrap="square" lIns="0" tIns="0" rIns="0" bIns="0" anchor="ctr">
-            <a:spAutoFit/>
-          </a:bodyPr>
-          <a:lstStyle/>
-          <a:p>
-            <a:pPr>
-              <a:spcAft>
-                <a:spcPts val="225"/>
-              </a:spcAft>
-            </a:pPr>
-            <a:r>
-              <a:rPr sz="825">
-                <a:solidFill>
-                  <a:srgbClr val="4A5A5D"/>
-                </a:solidFill>
-                <a:latin typeface="Calibri"/>
-              </a:rPr>
-              <a:t>Python function call</a:t>
-            </a:r>
-          </a:p>
-        </p:txBody>
-      </p:sp>
-    </p:spTree>
-  </p:cSld>
-  <p:clrMapOvr>
-    <a:masterClrMapping/>
-  </p:clrMapOvr>
-</p:sld>
-</file>
-
-<file path=ppt/slides/slide11.xml><?xml version="1.0" encoding="utf-8"?>
-<p:sld xmlns:a="http://schemas.openxmlformats.org/drawingml/2006/main" xmlns:p="http://schemas.openxmlformats.org/presentationml/2006/main" xmlns:r="http://schemas.openxmlformats.org/officeDocument/2006/relationships">
-  <p:cSld>
-    <p:spTree>
-      <p:nvGrpSpPr>
-        <p:cNvPr id="1" name=""/>
-        <p:cNvGrpSpPr/>
-        <p:nvPr/>
-      </p:nvGrpSpPr>
-      <p:grpSpPr/>
-      <p:sp>
-        <p:nvSpPr>
-          <p:cNvPr id="2" name="Title"/>
-          <p:cNvSpPr txBox="1"/>
-          <p:nvPr/>
-        </p:nvSpPr>
-        <p:spPr>
-          <a:xfrm>
-            <a:off x="347472" y="237744"/>
-            <a:ext cx="8430768" cy="393192"/>
-          </a:xfrm>
-          <a:prstGeom prst="rect">
-            <a:avLst/>
-          </a:prstGeom>
-          <a:noFill/>
-        </p:spPr>
-        <p:txBody>
-          <a:bodyPr wrap="square" anchor="t" lIns="0" rIns="0" tIns="0" bIns="0">
-            <a:spAutoFit/>
-          </a:bodyPr>
-          <a:lstStyle/>
-          <a:p>
-            <a:r>
-              <a:rPr sz="2550" b="1">
-                <a:solidFill>
-                  <a:srgbClr val="FFFFFF"/>
-                </a:solidFill>
-                <a:latin typeface="Calibri"/>
-              </a:rPr>
-              <a:t>One closure, two waves of damage, and no applicants yet</a:t>
-            </a:r>
-          </a:p>
-        </p:txBody>
-      </p:sp>
-      <p:sp>
-        <p:nvSpPr>
-          <p:cNvPr id="3" name="Subtitle"/>
-          <p:cNvSpPr txBox="1"/>
-          <p:nvPr/>
-        </p:nvSpPr>
-        <p:spPr>
-          <a:xfrm>
-            <a:off x="347472" y="685800"/>
-            <a:ext cx="8430768" cy="164592"/>
-          </a:xfrm>
-          <a:prstGeom prst="rect">
-            <a:avLst/>
-          </a:prstGeom>
-          <a:noFill/>
-        </p:spPr>
-        <p:txBody>
-          <a:bodyPr wrap="square" anchor="t" lIns="0" rIns="0" tIns="0" bIns="0">
-            <a:spAutoFit/>
-          </a:bodyPr>
-          <a:lstStyle/>
-          <a:p>
-            <a:r>
-              <a:rPr sz="1050" b="0">
-                <a:solidFill>
-                  <a:srgbClr val="B8C4C6"/>
-                </a:solidFill>
-                <a:latin typeface="Calibri"/>
-              </a:rPr>
-              <a:t>Anchor-closure track · Central Market, San Francisco · a major employer announces it leaves in 90 days, and no one has asked for help yet</a:t>
-            </a:r>
-          </a:p>
-        </p:txBody>
-      </p:sp>
-      <p:sp>
-        <p:nvSpPr>
-          <p:cNvPr id="4" name="Cascade panel"/>
-          <p:cNvSpPr/>
-          <p:nvPr/>
-        </p:nvSpPr>
-        <p:spPr>
-          <a:xfrm>
-            <a:off x="347472" y="1060704"/>
-            <a:ext cx="4846320" cy="3127248"/>
-          </a:xfrm>
-          <a:prstGeom prst="roundRect">
-            <a:avLst>
-              <a:gd name="adj" fmla="val 4000"/>
-            </a:avLst>
-          </a:prstGeom>
-          <a:solidFill>
-            <a:srgbClr val="E3EFED"/>
-          </a:solidFill>
-          <a:ln>
-            <a:noFill/>
-          </a:ln>
-          <a:effectLst/>
-        </p:spPr>
-        <p:style>
-          <a:lnRef idx="1">
-            <a:schemeClr val="accent1"/>
-          </a:lnRef>
-          <a:fillRef idx="3">
-            <a:schemeClr val="accent1"/>
-          </a:fillRef>
-          <a:effectRef idx="2">
-            <a:schemeClr val="accent1"/>
-          </a:effectRef>
-          <a:fontRef idx="minor">
-            <a:schemeClr val="lt1"/>
-          </a:fontRef>
-        </p:style>
-        <p:txBody>
-          <a:bodyPr rtlCol="0" anchor="ctr"/>
-          <a:lstStyle/>
-          <a:p>
-            <a:pPr algn="ctr"/>
-          </a:p>
-        </p:txBody>
-      </p:sp>
-      <p:sp>
-        <p:nvSpPr>
-          <p:cNvPr id="5" name="Cascade heading"/>
-          <p:cNvSpPr txBox="1"/>
-          <p:nvPr/>
-        </p:nvSpPr>
-        <p:spPr>
-          <a:xfrm>
-            <a:off x="512064" y="1152144"/>
-            <a:ext cx="4572000" cy="201168"/>
-          </a:xfrm>
-          <a:prstGeom prst="rect">
-            <a:avLst/>
-          </a:prstGeom>
-          <a:noFill/>
-        </p:spPr>
-        <p:txBody>
-          <a:bodyPr wrap="square" anchor="t" lIns="0" rIns="0" tIns="0" bIns="0">
-            <a:spAutoFit/>
-          </a:bodyPr>
-          <a:lstStyle/>
-          <a:p>
-            <a:r>
-              <a:rPr sz="1125" b="1">
-                <a:solidFill>
-                  <a:srgbClr val="12343B"/>
-                </a:solidFill>
-                <a:latin typeface="Calibri"/>
-              </a:rPr>
-              <a:t>How one closure spreads</a:t>
-            </a:r>
-          </a:p>
-        </p:txBody>
-      </p:sp>
-      <p:sp>
-        <p:nvSpPr>
-          <p:cNvPr id="6" name="Wave 0"/>
-          <p:cNvSpPr/>
-          <p:nvPr/>
-        </p:nvSpPr>
-        <p:spPr>
-          <a:xfrm>
-            <a:off x="512064" y="1481328"/>
-            <a:ext cx="1261872" cy="1481328"/>
-          </a:xfrm>
-          <a:prstGeom prst="roundRect">
-            <a:avLst>
-              <a:gd name="adj" fmla="val 8000"/>
-            </a:avLst>
-          </a:prstGeom>
-          <a:solidFill>
-            <a:srgbClr val="12343B"/>
-          </a:solidFill>
-          <a:ln>
-            <a:noFill/>
-          </a:ln>
-          <a:effectLst/>
-        </p:spPr>
-        <p:style>
-          <a:lnRef idx="1">
-            <a:schemeClr val="accent1"/>
-          </a:lnRef>
-          <a:fillRef idx="3">
-            <a:schemeClr val="accent1"/>
-          </a:fillRef>
-          <a:effectRef idx="2">
-            <a:schemeClr val="accent1"/>
-          </a:effectRef>
-          <a:fontRef idx="minor">
-            <a:schemeClr val="lt1"/>
-          </a:fontRef>
-        </p:style>
-        <p:txBody>
-          <a:bodyPr rtlCol="0" anchor="ctr"/>
-          <a:lstStyle/>
-          <a:p>
-            <a:pPr algn="ctr"/>
-          </a:p>
-        </p:txBody>
-      </p:sp>
-      <p:sp>
-        <p:nvSpPr>
-          <p:cNvPr id="7" name="Wave 0 text"/>
-          <p:cNvSpPr txBox="1"/>
-          <p:nvPr/>
-        </p:nvSpPr>
-        <p:spPr>
-          <a:xfrm>
-            <a:off x="603504" y="1591056"/>
-            <a:ext cx="1078992" cy="1261872"/>
-          </a:xfrm>
-          <a:prstGeom prst="rect">
-            <a:avLst/>
-          </a:prstGeom>
-          <a:noFill/>
-        </p:spPr>
-        <p:txBody>
-          <a:bodyPr wrap="square" anchor="t" lIns="0" rIns="0" tIns="0" bIns="0">
-            <a:spAutoFit/>
-          </a:bodyPr>
-          <a:lstStyle/>
-          <a:p>
-            <a:r>
-              <a:rPr sz="1050" b="1">
-                <a:solidFill>
-                  <a:srgbClr val="FFFFFF"/>
-                </a:solidFill>
-                <a:latin typeface="Calibri"/>
-              </a:rPr>
-              <a:t>Anchor employer</a:t>
-            </a:r>
-          </a:p>
-          <a:p>
-            <a:pPr>
-              <a:spcBef>
-                <a:spcPts val="200"/>
-              </a:spcBef>
-            </a:pPr>
-            <a:r>
-              <a:rPr sz="900" b="0">
-                <a:solidFill>
-                  <a:srgbClr val="B8C4C6"/>
-                </a:solidFill>
-                <a:latin typeface="Calibri"/>
-              </a:rPr>
-              <a:t>Office block closing in 90 days. Its workers stop coming.</a:t>
-            </a:r>
-          </a:p>
-        </p:txBody>
-      </p:sp>
-      <p:sp>
-        <p:nvSpPr>
-          <p:cNvPr id="8" name="Wave 0 route"/>
-          <p:cNvSpPr txBox="1"/>
-          <p:nvPr/>
-        </p:nvSpPr>
-        <p:spPr>
-          <a:xfrm>
-            <a:off x="603504" y="2651760"/>
-            <a:ext cx="1078992" cy="219456"/>
-          </a:xfrm>
-          <a:prstGeom prst="rect">
-            <a:avLst/>
-          </a:prstGeom>
-          <a:noFill/>
-        </p:spPr>
-        <p:txBody>
-          <a:bodyPr wrap="square" anchor="b" lIns="0" rIns="0" tIns="0" bIns="0">
-            <a:spAutoFit/>
-          </a:bodyPr>
-          <a:lstStyle/>
-          <a:p>
-            <a:r>
-              <a:rPr sz="825" b="1">
-                <a:solidFill>
-                  <a:srgbClr val="B8D4D0"/>
-                </a:solidFill>
-                <a:latin typeface="Calibri"/>
-              </a:rPr>
-              <a:t>Graph seed: employer_blocks</a:t>
-            </a:r>
-          </a:p>
-        </p:txBody>
-      </p:sp>
-      <p:sp>
-        <p:nvSpPr>
-          <p:cNvPr id="9" name="Wave 1"/>
-          <p:cNvSpPr/>
-          <p:nvPr/>
-        </p:nvSpPr>
-        <p:spPr>
-          <a:xfrm>
-            <a:off x="2048256" y="1481328"/>
-            <a:ext cx="1261872" cy="1481328"/>
-          </a:xfrm>
-          <a:prstGeom prst="roundRect">
-            <a:avLst>
-              <a:gd name="adj" fmla="val 8000"/>
-            </a:avLst>
-          </a:prstGeom>
-          <a:solidFill>
-            <a:srgbClr val="FFFFFF"/>
-          </a:solidFill>
-          <a:ln w="19050">
-            <a:solidFill>
-              <a:srgbClr val="1F6F6B"/>
-            </a:solidFill>
-          </a:ln>
-          <a:effectLst/>
-        </p:spPr>
-        <p:style>
-          <a:lnRef idx="1">
-            <a:schemeClr val="accent1"/>
-          </a:lnRef>
-          <a:fillRef idx="3">
-            <a:schemeClr val="accent1"/>
-          </a:fillRef>
-          <a:effectRef idx="2">
-            <a:schemeClr val="accent1"/>
-          </a:effectRef>
-          <a:fontRef idx="minor">
-            <a:schemeClr val="lt1"/>
-          </a:fontRef>
-        </p:style>
-        <p:txBody>
-          <a:bodyPr rtlCol="0" anchor="ctr"/>
-          <a:lstStyle/>
-          <a:p>
-            <a:pPr algn="ctr"/>
-          </a:p>
-        </p:txBody>
-      </p:sp>
-      <p:sp>
-        <p:nvSpPr>
-          <p:cNvPr id="10" name="Wave 1 text"/>
-          <p:cNvSpPr txBox="1"/>
-          <p:nvPr/>
-        </p:nvSpPr>
-        <p:spPr>
-          <a:xfrm>
-            <a:off x="2139696" y="1591056"/>
-            <a:ext cx="1078992" cy="1261872"/>
-          </a:xfrm>
-          <a:prstGeom prst="rect">
-            <a:avLst/>
-          </a:prstGeom>
-          <a:noFill/>
-        </p:spPr>
-        <p:txBody>
-          <a:bodyPr wrap="square" anchor="t" lIns="0" rIns="0" tIns="0" bIns="0">
-            <a:spAutoFit/>
-          </a:bodyPr>
-          <a:lstStyle/>
-          <a:p>
-            <a:r>
-              <a:rPr sz="1050" b="1">
-                <a:solidFill>
-                  <a:srgbClr val="12343B"/>
-                </a:solidFill>
-                <a:latin typeface="Calibri"/>
-              </a:rPr>
-              <a:t>First wave</a:t>
-            </a:r>
-          </a:p>
-          <a:p>
-            <a:pPr>
-              <a:spcBef>
-                <a:spcPts val="200"/>
-              </a:spcBef>
-            </a:pPr>
-            <a:r>
-              <a:rPr sz="900" b="0">
-                <a:solidFill>
-                  <a:srgbClr val="4A5A5D"/>
-                </a:solidFill>
-                <a:latin typeface="Calibri"/>
-              </a:rPr>
-              <a:t>Lunch counters, dry cleaners and shops that rely on those workers lose weekday trade.</a:t>
-            </a:r>
-          </a:p>
-        </p:txBody>
-      </p:sp>
-      <p:sp>
-        <p:nvSpPr>
-          <p:cNvPr id="11" name="Wave 1 route"/>
-          <p:cNvSpPr txBox="1"/>
-          <p:nvPr/>
-        </p:nvSpPr>
-        <p:spPr>
-          <a:xfrm>
-            <a:off x="2139696" y="2651760"/>
-            <a:ext cx="1078992" cy="219456"/>
-          </a:xfrm>
-          <a:prstGeom prst="rect">
-            <a:avLst/>
-          </a:prstGeom>
-          <a:noFill/>
-        </p:spPr>
-        <p:txBody>
-          <a:bodyPr wrap="square" anchor="b" lIns="0" rIns="0" tIns="0" bIns="0">
-            <a:spAutoFit/>
-          </a:bodyPr>
-          <a:lstStyle/>
-          <a:p>
-            <a:r>
-              <a:rPr sz="825" b="1">
-                <a:solidFill>
-                  <a:srgbClr val="1F6F6B"/>
-                </a:solidFill>
-                <a:latin typeface="Calibri"/>
-              </a:rPr>
-              <a:t>Forward along DrawsFootfall</a:t>
-            </a:r>
-          </a:p>
-        </p:txBody>
-      </p:sp>
-      <p:sp>
-        <p:nvSpPr>
-          <p:cNvPr id="12" name="Wave 2"/>
-          <p:cNvSpPr/>
-          <p:nvPr/>
-        </p:nvSpPr>
-        <p:spPr>
-          <a:xfrm>
-            <a:off x="3584448" y="1481328"/>
-            <a:ext cx="1261872" cy="1481328"/>
-          </a:xfrm>
-          <a:prstGeom prst="roundRect">
-            <a:avLst>
-              <a:gd name="adj" fmla="val 8000"/>
-            </a:avLst>
-          </a:prstGeom>
-          <a:solidFill>
-            <a:srgbClr val="FFFFFF"/>
-          </a:solidFill>
-          <a:ln w="19050">
-            <a:solidFill>
-              <a:srgbClr val="C27C00"/>
-            </a:solidFill>
-          </a:ln>
-          <a:effectLst/>
-        </p:spPr>
-        <p:style>
-          <a:lnRef idx="1">
-            <a:schemeClr val="accent1"/>
-          </a:lnRef>
-          <a:fillRef idx="3">
-            <a:schemeClr val="accent1"/>
-          </a:fillRef>
-          <a:effectRef idx="2">
-            <a:schemeClr val="accent1"/>
-          </a:effectRef>
-          <a:fontRef idx="minor">
-            <a:schemeClr val="lt1"/>
-          </a:fontRef>
-        </p:style>
-        <p:txBody>
-          <a:bodyPr rtlCol="0" anchor="ctr"/>
-          <a:lstStyle/>
-          <a:p>
-            <a:pPr algn="ctr"/>
-          </a:p>
-        </p:txBody>
-      </p:sp>
-      <p:sp>
-        <p:nvSpPr>
-          <p:cNvPr id="13" name="Wave 2 text"/>
-          <p:cNvSpPr txBox="1"/>
-          <p:nvPr/>
-        </p:nvSpPr>
-        <p:spPr>
-          <a:xfrm>
-            <a:off x="3675887" y="1591056"/>
-            <a:ext cx="1078992" cy="1261872"/>
-          </a:xfrm>
-          <a:prstGeom prst="rect">
-            <a:avLst/>
-          </a:prstGeom>
-          <a:noFill/>
-        </p:spPr>
-        <p:txBody>
-          <a:bodyPr wrap="square" anchor="t" lIns="0" rIns="0" tIns="0" bIns="0">
-            <a:spAutoFit/>
-          </a:bodyPr>
-          <a:lstStyle/>
-          <a:p>
-            <a:r>
-              <a:rPr sz="1050" b="1">
-                <a:solidFill>
-                  <a:srgbClr val="12343B"/>
-                </a:solidFill>
-                <a:latin typeface="Calibri"/>
-              </a:rPr>
-              <a:t>Second wave</a:t>
-            </a:r>
-          </a:p>
-          <a:p>
-            <a:pPr>
-              <a:spcBef>
-                <a:spcPts val="200"/>
-              </a:spcBef>
-            </a:pPr>
-            <a:r>
-              <a:rPr sz="900" b="0">
-                <a:solidFill>
-                  <a:srgbClr val="4A5A5D"/>
-                </a:solidFill>
-                <a:latin typeface="Calibri"/>
-              </a:rPr>
-              <a:t>Their suppliers, like the wholesale grocer, lose buyers, though they are nowhere near the anchor.</a:t>
-            </a:r>
-          </a:p>
-        </p:txBody>
-      </p:sp>
-      <p:sp>
-        <p:nvSpPr>
-          <p:cNvPr id="14" name="Wave 2 route"/>
-          <p:cNvSpPr txBox="1"/>
-          <p:nvPr/>
-        </p:nvSpPr>
-        <p:spPr>
-          <a:xfrm>
-            <a:off x="3675887" y="2651760"/>
-            <a:ext cx="1078992" cy="219456"/>
-          </a:xfrm>
-          <a:prstGeom prst="rect">
-            <a:avLst/>
-          </a:prstGeom>
-          <a:noFill/>
-        </p:spPr>
-        <p:txBody>
-          <a:bodyPr wrap="square" anchor="b" lIns="0" rIns="0" tIns="0" bIns="0">
-            <a:spAutoFit/>
-          </a:bodyPr>
-          <a:lstStyle/>
-          <a:p>
-            <a:r>
-              <a:rPr sz="825" b="1">
-                <a:solidFill>
-                  <a:srgbClr val="C27C00"/>
-                </a:solidFill>
-                <a:latin typeface="Calibri"/>
-              </a:rPr>
-              <a:t>Backward along Supplies</a:t>
-            </a:r>
-          </a:p>
-        </p:txBody>
-      </p:sp>
-      <p:cxnSp>
-        <p:nvCxnSpPr>
-          <p:cNvPr id="15" name="Footfall arrow"/>
-          <p:cNvCxnSpPr/>
-          <p:nvPr/>
-        </p:nvCxnSpPr>
-        <p:spPr>
-          <a:xfrm>
-            <a:off x="1801368" y="2221992"/>
-            <a:ext cx="219456" cy="0"/>
-          </a:xfrm>
-          <a:prstGeom prst="line">
-            <a:avLst/>
-          </a:prstGeom>
-          <a:ln w="25400">
-            <a:solidFill>
-              <a:srgbClr val="1F6F6B"/>
-            </a:solidFill>
-            <a:tailEnd type="triangle"/>
-          </a:ln>
-        </p:spPr>
-        <p:style>
-          <a:lnRef idx="2">
-            <a:schemeClr val="accent1"/>
-          </a:lnRef>
-          <a:fillRef idx="0">
-            <a:schemeClr val="accent1"/>
-          </a:fillRef>
-          <a:effectRef idx="1">
-            <a:schemeClr val="accent1"/>
-          </a:effectRef>
-          <a:fontRef idx="minor">
-            <a:schemeClr val="tx1"/>
-          </a:fontRef>
-        </p:style>
-      </p:cxnSp>
-      <p:cxnSp>
-        <p:nvCxnSpPr>
-          <p:cNvPr id="16" name="Supply arrow"/>
-          <p:cNvCxnSpPr/>
-          <p:nvPr/>
-        </p:nvCxnSpPr>
-        <p:spPr>
-          <a:xfrm flipH="1">
-            <a:off x="3337559" y="2221992"/>
-            <a:ext cx="219457" cy="0"/>
-          </a:xfrm>
-          <a:prstGeom prst="line">
-            <a:avLst/>
-          </a:prstGeom>
-          <a:ln w="25400">
-            <a:solidFill>
-              <a:srgbClr val="C27C00"/>
-            </a:solidFill>
-            <a:tailEnd type="triangle"/>
-          </a:ln>
-        </p:spPr>
-        <p:style>
-          <a:lnRef idx="2">
-            <a:schemeClr val="accent1"/>
-          </a:lnRef>
-          <a:fillRef idx="0">
-            <a:schemeClr val="accent1"/>
-          </a:fillRef>
-          <a:effectRef idx="1">
-            <a:schemeClr val="accent1"/>
-          </a:effectRef>
-          <a:fontRef idx="minor">
-            <a:schemeClr val="tx1"/>
-          </a:fontRef>
-        </p:style>
-      </p:cxnSp>
-      <p:sp>
-        <p:nvSpPr>
-          <p:cNvPr id="17" name="Arrow key"/>
-          <p:cNvSpPr txBox="1"/>
-          <p:nvPr/>
-        </p:nvSpPr>
-        <p:spPr>
-          <a:xfrm>
-            <a:off x="512064" y="3072384"/>
-            <a:ext cx="4517136" cy="182880"/>
-          </a:xfrm>
-          <a:prstGeom prst="rect">
-            <a:avLst/>
-          </a:prstGeom>
-          <a:noFill/>
-        </p:spPr>
-        <p:txBody>
-          <a:bodyPr wrap="square" anchor="t" lIns="0" rIns="0" tIns="0" bIns="0">
-            <a:spAutoFit/>
-          </a:bodyPr>
-          <a:lstStyle/>
-          <a:p>
-            <a:r>
-              <a:rPr sz="825" b="0">
-                <a:solidFill>
-                  <a:srgbClr val="4A5A5D"/>
-                </a:solidFill>
-                <a:latin typeface="Calibri"/>
-              </a:rPr>
-              <a:t>Teal: footfall the anchor sends.  Amber: supply links the harm travels back along.</a:t>
-            </a:r>
-          </a:p>
-        </p:txBody>
-      </p:sp>
-      <p:sp>
-        <p:nvSpPr>
-          <p:cNvPr id="18" name="Gap callout"/>
-          <p:cNvSpPr/>
-          <p:nvPr/>
-        </p:nvSpPr>
-        <p:spPr>
-          <a:xfrm>
-            <a:off x="512064" y="3346704"/>
-            <a:ext cx="4517136" cy="713232"/>
-          </a:xfrm>
-          <a:prstGeom prst="roundRect">
-            <a:avLst>
-              <a:gd name="adj" fmla="val 8000"/>
-            </a:avLst>
-          </a:prstGeom>
-          <a:solidFill>
-            <a:srgbClr val="FFFFFF"/>
-          </a:solidFill>
-          <a:ln>
-            <a:noFill/>
-          </a:ln>
-          <a:effectLst/>
-        </p:spPr>
-        <p:style>
-          <a:lnRef idx="1">
-            <a:schemeClr val="accent1"/>
-          </a:lnRef>
-          <a:fillRef idx="3">
-            <a:schemeClr val="accent1"/>
-          </a:fillRef>
-          <a:effectRef idx="2">
-            <a:schemeClr val="accent1"/>
-          </a:effectRef>
-          <a:fontRef idx="minor">
-            <a:schemeClr val="lt1"/>
-          </a:fontRef>
-        </p:style>
-        <p:txBody>
-          <a:bodyPr rtlCol="0" anchor="ctr"/>
-          <a:lstStyle/>
-          <a:p>
-            <a:pPr algn="ctr"/>
-          </a:p>
-        </p:txBody>
-      </p:sp>
-      <p:sp>
-        <p:nvSpPr>
-          <p:cNvPr id="19" name="Gap callout text"/>
-          <p:cNvSpPr txBox="1"/>
-          <p:nvPr/>
-        </p:nvSpPr>
-        <p:spPr>
-          <a:xfrm>
-            <a:off x="640080" y="3401568"/>
-            <a:ext cx="4261104" cy="603504"/>
-          </a:xfrm>
-          <a:prstGeom prst="rect">
-            <a:avLst/>
-          </a:prstGeom>
-          <a:noFill/>
-        </p:spPr>
-        <p:txBody>
-          <a:bodyPr wrap="square" anchor="ctr" lIns="0" rIns="0" tIns="0" bIns="0">
-            <a:spAutoFit/>
-          </a:bodyPr>
-          <a:lstStyle/>
-          <a:p>
-            <a:r>
-              <a:rPr sz="1050" b="1">
-                <a:solidFill>
-                  <a:srgbClr val="12343B"/>
-                </a:solidFill>
-                <a:latin typeface="Calibri"/>
-              </a:rPr>
-              <a:t>The gap today</a:t>
-            </a:r>
-          </a:p>
-          <a:p>
-            <a:pPr>
-              <a:spcBef>
-                <a:spcPts val="200"/>
-              </a:spcBef>
-            </a:pPr>
-            <a:r>
-              <a:rPr sz="900" b="0">
-                <a:solidFill>
-                  <a:srgbClr val="4A5A5D"/>
-                </a:solidFill>
-                <a:latin typeface="Calibri"/>
-              </a:rPr>
-              <a:t>Relief programs rank the businesses that apply by how distressed they are. In this case nobody has applied, and the second wave never will, because it does not know the closure reaches it.</a:t>
-            </a:r>
-          </a:p>
-        </p:txBody>
-      </p:sp>
-      <p:sp>
-        <p:nvSpPr>
-          <p:cNvPr id="20" name="Benefits heading"/>
-          <p:cNvSpPr txBox="1"/>
-          <p:nvPr/>
-        </p:nvSpPr>
-        <p:spPr>
-          <a:xfrm>
-            <a:off x="5413248" y="1097280"/>
-            <a:ext cx="3383280" cy="201168"/>
-          </a:xfrm>
-          <a:prstGeom prst="rect">
-            <a:avLst/>
-          </a:prstGeom>
-          <a:noFill/>
-        </p:spPr>
-        <p:txBody>
-          <a:bodyPr wrap="square" anchor="t" lIns="0" rIns="0" tIns="0" bIns="0">
-            <a:spAutoFit/>
-          </a:bodyPr>
-          <a:lstStyle/>
-          <a:p>
-            <a:r>
-              <a:rPr sz="1125" b="1">
-                <a:solidFill>
-                  <a:srgbClr val="FFFFFF"/>
-                </a:solidFill>
-                <a:latin typeface="Calibri"/>
-              </a:rPr>
-              <a:t>Who benefits</a:t>
-            </a:r>
-          </a:p>
-        </p:txBody>
-      </p:sp>
-      <p:sp>
-        <p:nvSpPr>
-          <p:cNvPr id="21" name="Benefit 1"/>
-          <p:cNvSpPr/>
-          <p:nvPr/>
-        </p:nvSpPr>
-        <p:spPr>
-          <a:xfrm>
-            <a:off x="5413248" y="1371600"/>
-            <a:ext cx="3383280" cy="859536"/>
-          </a:xfrm>
-          <a:prstGeom prst="roundRect">
-            <a:avLst>
-              <a:gd name="adj" fmla="val 8000"/>
-            </a:avLst>
-          </a:prstGeom>
-          <a:solidFill>
-            <a:srgbClr val="E3EFED"/>
-          </a:solidFill>
-          <a:ln>
-            <a:noFill/>
-          </a:ln>
-          <a:effectLst/>
-        </p:spPr>
-        <p:style>
-          <a:lnRef idx="1">
-            <a:schemeClr val="accent1"/>
-          </a:lnRef>
-          <a:fillRef idx="3">
-            <a:schemeClr val="accent1"/>
-          </a:fillRef>
-          <a:effectRef idx="2">
-            <a:schemeClr val="accent1"/>
-          </a:effectRef>
-          <a:fontRef idx="minor">
-            <a:schemeClr val="lt1"/>
-          </a:fontRef>
-        </p:style>
-        <p:txBody>
-          <a:bodyPr rtlCol="0" anchor="ctr"/>
-          <a:lstStyle/>
-          <a:p>
-            <a:pPr algn="ctr"/>
-          </a:p>
-        </p:txBody>
-      </p:sp>
-      <p:sp>
-        <p:nvSpPr>
-          <p:cNvPr id="22" name="Benefit 1 text"/>
-          <p:cNvSpPr txBox="1"/>
-          <p:nvPr/>
-        </p:nvSpPr>
-        <p:spPr>
-          <a:xfrm>
-            <a:off x="5522976" y="1444752"/>
-            <a:ext cx="3182112" cy="713232"/>
-          </a:xfrm>
-          <a:prstGeom prst="rect">
-            <a:avLst/>
-          </a:prstGeom>
-          <a:noFill/>
-        </p:spPr>
-        <p:txBody>
-          <a:bodyPr wrap="square" anchor="ctr" lIns="0" rIns="0" tIns="0" bIns="0">
-            <a:spAutoFit/>
-          </a:bodyPr>
-          <a:lstStyle/>
-          <a:p>
-            <a:r>
-              <a:rPr sz="1050" b="1">
-                <a:solidFill>
-                  <a:srgbClr val="1F6F6B"/>
-                </a:solidFill>
-                <a:latin typeface="Calibri"/>
-              </a:rPr>
-              <a:t>City economic-development officers</a:t>
-            </a:r>
-          </a:p>
-          <a:p>
-            <a:pPr>
-              <a:spcBef>
-                <a:spcPts val="200"/>
-              </a:spcBef>
-            </a:pPr>
-            <a:r>
-              <a:rPr sz="900" b="0">
-                <a:solidFill>
-                  <a:srgbClr val="4A5A5D"/>
-                </a:solidFill>
-                <a:latin typeface="Calibri"/>
-              </a:rPr>
-              <a:t>See the whole cascade and act within the 90 days, not after the closures.</a:t>
-            </a:r>
-          </a:p>
-        </p:txBody>
-      </p:sp>
-      <p:sp>
-        <p:nvSpPr>
-          <p:cNvPr id="23" name="Benefit 2"/>
-          <p:cNvSpPr/>
-          <p:nvPr/>
-        </p:nvSpPr>
-        <p:spPr>
-          <a:xfrm>
-            <a:off x="5413248" y="2322576"/>
-            <a:ext cx="3383280" cy="859536"/>
-          </a:xfrm>
-          <a:prstGeom prst="roundRect">
-            <a:avLst>
-              <a:gd name="adj" fmla="val 8000"/>
-            </a:avLst>
-          </a:prstGeom>
-          <a:solidFill>
-            <a:srgbClr val="E3EFED"/>
-          </a:solidFill>
-          <a:ln>
-            <a:noFill/>
-          </a:ln>
-          <a:effectLst/>
-        </p:spPr>
-        <p:style>
-          <a:lnRef idx="1">
-            <a:schemeClr val="accent1"/>
-          </a:lnRef>
-          <a:fillRef idx="3">
-            <a:schemeClr val="accent1"/>
-          </a:fillRef>
-          <a:effectRef idx="2">
-            <a:schemeClr val="accent1"/>
-          </a:effectRef>
-          <a:fontRef idx="minor">
-            <a:schemeClr val="lt1"/>
-          </a:fontRef>
-        </p:style>
-        <p:txBody>
-          <a:bodyPr rtlCol="0" anchor="ctr"/>
-          <a:lstStyle/>
-          <a:p>
-            <a:pPr algn="ctr"/>
-          </a:p>
-        </p:txBody>
-      </p:sp>
-      <p:sp>
-        <p:nvSpPr>
-          <p:cNvPr id="24" name="Benefit 2 text"/>
-          <p:cNvSpPr txBox="1"/>
-          <p:nvPr/>
-        </p:nvSpPr>
-        <p:spPr>
-          <a:xfrm>
-            <a:off x="5522976" y="2395728"/>
-            <a:ext cx="3182112" cy="713232"/>
-          </a:xfrm>
-          <a:prstGeom prst="rect">
-            <a:avLst/>
-          </a:prstGeom>
-          <a:noFill/>
-        </p:spPr>
-        <p:txBody>
-          <a:bodyPr wrap="square" anchor="ctr" lIns="0" rIns="0" tIns="0" bIns="0">
-            <a:spAutoFit/>
-          </a:bodyPr>
-          <a:lstStyle/>
-          <a:p>
-            <a:r>
-              <a:rPr sz="1050" b="1">
-                <a:solidFill>
-                  <a:srgbClr val="1F6F6B"/>
-                </a:solidFill>
-                <a:latin typeface="Calibri"/>
-              </a:rPr>
-              <a:t>Exposed small businesses</a:t>
-            </a:r>
-          </a:p>
-          <a:p>
-            <a:pPr>
-              <a:spcBef>
-                <a:spcPts val="200"/>
-              </a:spcBef>
-            </a:pPr>
-            <a:r>
-              <a:rPr sz="900" b="0">
-                <a:solidFill>
-                  <a:srgbClr val="4A5A5D"/>
-                </a:solidFill>
-                <a:latin typeface="Calibri"/>
-              </a:rPr>
-              <a:t>Reached while still healthy, including suppliers that never served the anchor.</a:t>
-            </a:r>
-          </a:p>
-        </p:txBody>
-      </p:sp>
-      <p:sp>
-        <p:nvSpPr>
-          <p:cNvPr id="25" name="Benefit 3"/>
-          <p:cNvSpPr/>
-          <p:nvPr/>
-        </p:nvSpPr>
-        <p:spPr>
-          <a:xfrm>
-            <a:off x="5413248" y="3273552"/>
-            <a:ext cx="3383280" cy="859536"/>
-          </a:xfrm>
-          <a:prstGeom prst="roundRect">
-            <a:avLst>
-              <a:gd name="adj" fmla="val 8000"/>
-            </a:avLst>
-          </a:prstGeom>
-          <a:solidFill>
-            <a:srgbClr val="E3EFED"/>
-          </a:solidFill>
-          <a:ln>
-            <a:noFill/>
-          </a:ln>
-          <a:effectLst/>
-        </p:spPr>
-        <p:style>
-          <a:lnRef idx="1">
-            <a:schemeClr val="accent1"/>
-          </a:lnRef>
-          <a:fillRef idx="3">
-            <a:schemeClr val="accent1"/>
-          </a:fillRef>
-          <a:effectRef idx="2">
-            <a:schemeClr val="accent1"/>
-          </a:effectRef>
-          <a:fontRef idx="minor">
-            <a:schemeClr val="lt1"/>
-          </a:fontRef>
-        </p:style>
-        <p:txBody>
-          <a:bodyPr rtlCol="0" anchor="ctr"/>
-          <a:lstStyle/>
-          <a:p>
-            <a:pPr algn="ctr"/>
-          </a:p>
-        </p:txBody>
-      </p:sp>
-      <p:sp>
-        <p:nvSpPr>
-          <p:cNvPr id="26" name="Benefit 3 text"/>
-          <p:cNvSpPr txBox="1"/>
-          <p:nvPr/>
-        </p:nvSpPr>
-        <p:spPr>
-          <a:xfrm>
-            <a:off x="5522976" y="3346704"/>
-            <a:ext cx="3182112" cy="713232"/>
-          </a:xfrm>
-          <a:prstGeom prst="rect">
-            <a:avLst/>
-          </a:prstGeom>
-          <a:noFill/>
-        </p:spPr>
-        <p:txBody>
-          <a:bodyPr wrap="square" anchor="ctr" lIns="0" rIns="0" tIns="0" bIns="0">
-            <a:spAutoFit/>
-          </a:bodyPr>
-          <a:lstStyle/>
-          <a:p>
-            <a:r>
-              <a:rPr sz="1050" b="1">
-                <a:solidFill>
-                  <a:srgbClr val="1F6F6B"/>
-                </a:solidFill>
-                <a:latin typeface="Calibri"/>
-              </a:rPr>
-              <a:t>The neighborhoods around them</a:t>
-            </a:r>
-          </a:p>
-          <a:p>
-            <a:pPr>
-              <a:spcBef>
-                <a:spcPts val="200"/>
-              </a:spcBef>
-            </a:pPr>
-            <a:r>
-              <a:rPr sz="900" b="0">
-                <a:solidFill>
-                  <a:srgbClr val="4A5A5D"/>
-                </a:solidFill>
-                <a:latin typeface="Calibri"/>
-              </a:rPr>
-              <a:t>Grants weighed against census poverty, vehicle-access and public-assistance rates.</a:t>
-            </a:r>
-          </a:p>
-        </p:txBody>
-      </p:sp>
-      <p:sp>
-        <p:nvSpPr>
-          <p:cNvPr id="27" name="Why it matters"/>
-          <p:cNvSpPr/>
-          <p:nvPr/>
-        </p:nvSpPr>
-        <p:spPr>
-          <a:xfrm>
-            <a:off x="347472" y="4334256"/>
-            <a:ext cx="8458200" cy="530352"/>
-          </a:xfrm>
-          <a:prstGeom prst="roundRect">
-            <a:avLst>
-              <a:gd name="adj" fmla="val 10000"/>
-            </a:avLst>
-          </a:prstGeom>
-          <a:solidFill>
-            <a:srgbClr val="1F6F6B"/>
-          </a:solidFill>
-          <a:ln>
-            <a:noFill/>
-          </a:ln>
-          <a:effectLst/>
-        </p:spPr>
-        <p:style>
-          <a:lnRef idx="1">
-            <a:schemeClr val="accent1"/>
-          </a:lnRef>
-          <a:fillRef idx="3">
-            <a:schemeClr val="accent1"/>
-          </a:fillRef>
-          <a:effectRef idx="2">
-            <a:schemeClr val="accent1"/>
-          </a:effectRef>
-          <a:fontRef idx="minor">
-            <a:schemeClr val="lt1"/>
-          </a:fontRef>
-        </p:style>
-        <p:txBody>
-          <a:bodyPr rtlCol="0" anchor="ctr"/>
-          <a:lstStyle/>
-          <a:p>
-            <a:pPr algn="ctr"/>
-          </a:p>
-        </p:txBody>
-      </p:sp>
-      <p:sp>
-        <p:nvSpPr>
-          <p:cNvPr id="28" name="Banner text"/>
-          <p:cNvSpPr txBox="1"/>
-          <p:nvPr/>
-        </p:nvSpPr>
-        <p:spPr>
-          <a:xfrm>
-            <a:off x="512064" y="4389120"/>
-            <a:ext cx="8129016" cy="420624"/>
-          </a:xfrm>
-          <a:prstGeom prst="rect">
-            <a:avLst/>
-          </a:prstGeom>
-          <a:noFill/>
-        </p:spPr>
-        <p:txBody>
-          <a:bodyPr wrap="square" anchor="ctr" lIns="0" rIns="0" tIns="0" bIns="0">
-            <a:spAutoFit/>
-          </a:bodyPr>
-          <a:lstStyle/>
-          <a:p>
-            <a:r>
-              <a:rPr sz="1050" b="1">
-                <a:solidFill>
-                  <a:srgbClr val="B8D4D0"/>
-                </a:solidFill>
-                <a:latin typeface="Calibri"/>
-              </a:rPr>
-              <a:t>Why it matters: </a:t>
-            </a:r>
-            <a:r>
-              <a:rPr sz="1050" b="0">
-                <a:solidFill>
-                  <a:srgbClr val="FFFFFF"/>
-                </a:solidFill>
-                <a:latin typeface="Calibri"/>
-              </a:rPr>
-              <a:t>a commercial corridor is a network, not a list. One closure becomes many, and relief that waits for applications arrives after the businesses are gone.</a:t>
-            </a:r>
-          </a:p>
-        </p:txBody>
-      </p:sp>
-    </p:spTree>
-  </p:cSld>
-  <p:clrMapOvr>
-    <a:masterClrMapping/>
-  </p:clrMapOvr>
-</p:sld>
-</file>
-
 <file path=ppt/slides/slide2.xml><?xml version="1.0" encoding="utf-8"?>
 <p:sld xmlns:a="http://schemas.openxmlformats.org/drawingml/2006/main" xmlns:r="http://schemas.openxmlformats.org/officeDocument/2006/relationships" xmlns:p="http://schemas.openxmlformats.org/presentationml/2006/main">
   <p:cSld>
@@ -15081,7 +11388,7 @@
         </p:nvSpPr>
         <p:spPr>
           <a:xfrm>
-            <a:off x="5790775" y="2586700"/>
+            <a:off x="5774733" y="2523032"/>
             <a:ext cx="3080700" cy="613800"/>
           </a:xfrm>
           <a:prstGeom prst="rect">
@@ -15111,7 +11418,7 @@
               <a:buNone/>
             </a:pPr>
             <a:r>
-              <a:rPr lang="en" sz="2400">
+              <a:rPr lang="en" sz="2400" dirty="0">
                 <a:solidFill>
                   <a:schemeClr val="lt1"/>
                 </a:solidFill>
@@ -15120,9 +11427,9 @@
                 <a:cs typeface="Google Sans Flex Medium"/>
                 <a:sym typeface="Google Sans Flex Medium"/>
               </a:rPr>
-              <a:t>Team name here</a:t>
+              <a:t>ATL-13 Pro Max </a:t>
             </a:r>
-            <a:endParaRPr sz="2400">
+            <a:endParaRPr sz="2400" dirty="0">
               <a:solidFill>
                 <a:schemeClr val="lt1"/>
               </a:solidFill>
@@ -15198,11 +11505,17 @@
         <p:nvGraphicFramePr>
           <p:cNvPr id="125" name="Google Shape;125;p29"/>
           <p:cNvGraphicFramePr/>
-          <p:nvPr/>
+          <p:nvPr>
+            <p:extLst>
+              <p:ext uri="{D42A27DB-BD31-4B8C-83A1-F6EECF244321}">
+                <p14:modId xmlns:p14="http://schemas.microsoft.com/office/powerpoint/2010/main" val="2489115301"/>
+              </p:ext>
+            </p:extLst>
+          </p:nvPr>
         </p:nvGraphicFramePr>
         <p:xfrm>
           <a:off x="577750" y="1357275"/>
-          <a:ext cx="8117675" cy="3569355"/>
+          <a:ext cx="8117675" cy="3691275"/>
         </p:xfrm>
         <a:graphic>
           <a:graphicData uri="http://schemas.openxmlformats.org/drawingml/2006/table">
@@ -15804,14 +12117,14 @@
                         <a:buNone/>
                       </a:pPr>
                       <a:r>
-                        <a:rPr lang="en">
+                        <a:rPr lang="en" sz="800" dirty="0">
                           <a:solidFill>
                             <a:schemeClr val="lt1"/>
                           </a:solidFill>
                         </a:rPr>
                         <a:t>Amogh U</a:t>
                       </a:r>
-                      <a:endParaRPr>
+                      <a:endParaRPr sz="800" dirty="0">
                         <a:solidFill>
                           <a:schemeClr val="lt1"/>
                         </a:solidFill>
@@ -15871,7 +12184,19 @@
                         </a:spcAft>
                         <a:buNone/>
                       </a:pPr>
-                      <a:endParaRPr/>
+                      <a:r>
+                        <a:rPr lang="en-US" sz="800" dirty="0" err="1">
+                          <a:solidFill>
+                            <a:schemeClr val="bg1"/>
+                          </a:solidFill>
+                        </a:rPr>
+                        <a:t>Amogh.Upadhyay@cox.com</a:t>
+                      </a:r>
+                      <a:endParaRPr sz="800" dirty="0">
+                        <a:solidFill>
+                          <a:schemeClr val="bg1"/>
+                        </a:solidFill>
+                      </a:endParaRPr>
                     </a:p>
                   </a:txBody>
                   <a:tcPr marL="91425" marR="91425" marT="91425" marB="91425">
@@ -15927,7 +12252,19 @@
                         </a:spcAft>
                         <a:buNone/>
                       </a:pPr>
-                      <a:endParaRPr/>
+                      <a:r>
+                        <a:rPr lang="en-US" sz="800" dirty="0">
+                          <a:solidFill>
+                            <a:schemeClr val="bg1"/>
+                          </a:solidFill>
+                        </a:rPr>
+                        <a:t>678-644-2677</a:t>
+                      </a:r>
+                      <a:endParaRPr sz="800" dirty="0">
+                        <a:solidFill>
+                          <a:schemeClr val="bg1"/>
+                        </a:solidFill>
+                      </a:endParaRPr>
                     </a:p>
                   </a:txBody>
                   <a:tcPr marL="91425" marR="91425" marT="91425" marB="91425">
@@ -15983,9 +12320,17 @@
                         </a:spcAft>
                         <a:buNone/>
                       </a:pPr>
-                      <a:endParaRPr>
+                      <a:r>
+                        <a:rPr lang="en-US" sz="800" dirty="0">
+                          <a:solidFill>
+                            <a:schemeClr val="bg1"/>
+                          </a:solidFill>
+                        </a:rPr>
+                        <a:t>yes</a:t>
+                      </a:r>
+                      <a:endParaRPr sz="800" dirty="0">
                         <a:solidFill>
-                          <a:schemeClr val="lt1"/>
+                          <a:schemeClr val="bg1"/>
                         </a:solidFill>
                       </a:endParaRPr>
                     </a:p>
@@ -16043,9 +12388,17 @@
                         </a:spcAft>
                         <a:buNone/>
                       </a:pPr>
-                      <a:endParaRPr i="1">
+                      <a:r>
+                        <a:rPr lang="en-US" sz="800" i="1" dirty="0">
+                          <a:solidFill>
+                            <a:schemeClr val="bg1"/>
+                          </a:solidFill>
+                        </a:rPr>
+                        <a:t>Yes</a:t>
+                      </a:r>
+                      <a:endParaRPr sz="800" i="1" dirty="0">
                         <a:solidFill>
-                          <a:schemeClr val="lt1"/>
+                          <a:schemeClr val="bg1"/>
                         </a:solidFill>
                       </a:endParaRPr>
                     </a:p>
@@ -16103,7 +12456,19 @@
                         </a:spcAft>
                         <a:buNone/>
                       </a:pPr>
-                      <a:endParaRPr/>
+                      <a:r>
+                        <a:rPr lang="en-US" sz="800" dirty="0" err="1">
+                          <a:solidFill>
+                            <a:schemeClr val="bg1"/>
+                          </a:solidFill>
+                        </a:rPr>
+                        <a:t>murali@pisharat@cox.com</a:t>
+                      </a:r>
+                      <a:endParaRPr sz="800" dirty="0">
+                        <a:solidFill>
+                          <a:schemeClr val="bg1"/>
+                        </a:solidFill>
+                      </a:endParaRPr>
                     </a:p>
                   </a:txBody>
                   <a:tcPr marL="91425" marR="91425" marT="91425" marB="91425">
@@ -16167,14 +12532,14 @@
                         <a:buNone/>
                       </a:pPr>
                       <a:r>
-                        <a:rPr lang="en">
+                        <a:rPr lang="en" sz="800" dirty="0">
                           <a:solidFill>
                             <a:schemeClr val="lt1"/>
                           </a:solidFill>
                         </a:rPr>
                         <a:t>Nabil B</a:t>
                       </a:r>
-                      <a:endParaRPr>
+                      <a:endParaRPr sz="800" dirty="0">
                         <a:solidFill>
                           <a:schemeClr val="lt1"/>
                         </a:solidFill>
@@ -16234,7 +12599,19 @@
                         </a:spcAft>
                         <a:buNone/>
                       </a:pPr>
-                      <a:endParaRPr/>
+                      <a:r>
+                        <a:rPr lang="en-US" sz="800" dirty="0" err="1">
+                          <a:solidFill>
+                            <a:schemeClr val="bg1"/>
+                          </a:solidFill>
+                        </a:rPr>
+                        <a:t>Nabil.bendannoun@randstadusa.com</a:t>
+                      </a:r>
+                      <a:endParaRPr sz="800" dirty="0">
+                        <a:solidFill>
+                          <a:schemeClr val="bg1"/>
+                        </a:solidFill>
+                      </a:endParaRPr>
                     </a:p>
                   </a:txBody>
                   <a:tcPr marL="91425" marR="91425" marT="91425" marB="91425">
@@ -16290,7 +12667,19 @@
                         </a:spcAft>
                         <a:buNone/>
                       </a:pPr>
-                      <a:endParaRPr/>
+                      <a:r>
+                        <a:rPr lang="en-US" sz="800" dirty="0">
+                          <a:solidFill>
+                            <a:schemeClr val="bg1"/>
+                          </a:solidFill>
+                        </a:rPr>
+                        <a:t>678-696-9940</a:t>
+                      </a:r>
+                      <a:endParaRPr sz="800" dirty="0">
+                        <a:solidFill>
+                          <a:schemeClr val="bg1"/>
+                        </a:solidFill>
+                      </a:endParaRPr>
                     </a:p>
                   </a:txBody>
                   <a:tcPr marL="91425" marR="91425" marT="91425" marB="91425">
@@ -16346,9 +12735,17 @@
                         </a:spcAft>
                         <a:buNone/>
                       </a:pPr>
-                      <a:endParaRPr>
+                      <a:r>
+                        <a:rPr lang="en-US" sz="800" dirty="0">
+                          <a:solidFill>
+                            <a:schemeClr val="bg1"/>
+                          </a:solidFill>
+                        </a:rPr>
+                        <a:t>yes</a:t>
+                      </a:r>
+                      <a:endParaRPr sz="800" dirty="0">
                         <a:solidFill>
-                          <a:schemeClr val="lt1"/>
+                          <a:schemeClr val="bg1"/>
                         </a:solidFill>
                       </a:endParaRPr>
                     </a:p>
@@ -16406,9 +12803,9 @@
                         </a:spcAft>
                         <a:buNone/>
                       </a:pPr>
-                      <a:endParaRPr>
+                      <a:endParaRPr sz="800" dirty="0">
                         <a:solidFill>
-                          <a:schemeClr val="lt1"/>
+                          <a:schemeClr val="bg1"/>
                         </a:solidFill>
                       </a:endParaRPr>
                     </a:p>
@@ -16466,7 +12863,11 @@
                         </a:spcAft>
                         <a:buNone/>
                       </a:pPr>
-                      <a:endParaRPr/>
+                      <a:endParaRPr sz="800">
+                        <a:solidFill>
+                          <a:schemeClr val="bg1"/>
+                        </a:solidFill>
+                      </a:endParaRPr>
                     </a:p>
                   </a:txBody>
                   <a:tcPr marL="91425" marR="91425" marT="91425" marB="91425">
@@ -16530,14 +12931,14 @@
                         <a:buNone/>
                       </a:pPr>
                       <a:r>
-                        <a:rPr lang="en">
+                        <a:rPr lang="en" sz="800" dirty="0">
                           <a:solidFill>
                             <a:schemeClr val="lt1"/>
                           </a:solidFill>
                         </a:rPr>
-                        <a:t>Mastan </a:t>
+                        <a:t>Mastan  S</a:t>
                       </a:r>
-                      <a:endParaRPr>
+                      <a:endParaRPr sz="800" dirty="0">
                         <a:solidFill>
                           <a:schemeClr val="lt1"/>
                         </a:solidFill>
@@ -16597,7 +12998,19 @@
                         </a:spcAft>
                         <a:buNone/>
                       </a:pPr>
-                      <a:endParaRPr/>
+                      <a:r>
+                        <a:rPr lang="en-US" sz="800" dirty="0" err="1">
+                          <a:solidFill>
+                            <a:schemeClr val="bg1"/>
+                          </a:solidFill>
+                        </a:rPr>
+                        <a:t>Mastan_Sheik@homedepot.com</a:t>
+                      </a:r>
+                      <a:endParaRPr sz="800" dirty="0">
+                        <a:solidFill>
+                          <a:schemeClr val="bg1"/>
+                        </a:solidFill>
+                      </a:endParaRPr>
                     </a:p>
                   </a:txBody>
                   <a:tcPr marL="91425" marR="91425" marT="91425" marB="91425">
@@ -16653,7 +13066,19 @@
                         </a:spcAft>
                         <a:buNone/>
                       </a:pPr>
-                      <a:endParaRPr/>
+                      <a:r>
+                        <a:rPr lang="en-US" sz="800" dirty="0">
+                          <a:solidFill>
+                            <a:schemeClr val="bg1"/>
+                          </a:solidFill>
+                        </a:rPr>
+                        <a:t>404-820-5556</a:t>
+                      </a:r>
+                      <a:endParaRPr sz="800" dirty="0">
+                        <a:solidFill>
+                          <a:schemeClr val="bg1"/>
+                        </a:solidFill>
+                      </a:endParaRPr>
                     </a:p>
                   </a:txBody>
                   <a:tcPr marL="91425" marR="91425" marT="91425" marB="91425">
@@ -16709,9 +13134,9 @@
                         </a:spcAft>
                         <a:buNone/>
                       </a:pPr>
-                      <a:endParaRPr>
+                      <a:endParaRPr sz="800" dirty="0">
                         <a:solidFill>
-                          <a:schemeClr val="lt1"/>
+                          <a:schemeClr val="bg1"/>
                         </a:solidFill>
                       </a:endParaRPr>
                     </a:p>
@@ -16769,9 +13194,9 @@
                         </a:spcAft>
                         <a:buNone/>
                       </a:pPr>
-                      <a:endParaRPr>
+                      <a:endParaRPr sz="800">
                         <a:solidFill>
-                          <a:schemeClr val="lt1"/>
+                          <a:schemeClr val="bg1"/>
                         </a:solidFill>
                       </a:endParaRPr>
                     </a:p>
@@ -16829,7 +13254,11 @@
                         </a:spcAft>
                         <a:buNone/>
                       </a:pPr>
-                      <a:endParaRPr/>
+                      <a:endParaRPr sz="800">
+                        <a:solidFill>
+                          <a:schemeClr val="bg1"/>
+                        </a:solidFill>
+                      </a:endParaRPr>
                     </a:p>
                   </a:txBody>
                   <a:tcPr marL="91425" marR="91425" marT="91425" marB="91425">
@@ -16893,14 +13322,14 @@
                         <a:buNone/>
                       </a:pPr>
                       <a:r>
-                        <a:rPr lang="en">
+                        <a:rPr lang="en" sz="800">
                           <a:solidFill>
                             <a:schemeClr val="lt1"/>
                           </a:solidFill>
                         </a:rPr>
                         <a:t>Julio G</a:t>
                       </a:r>
-                      <a:endParaRPr>
+                      <a:endParaRPr sz="800">
                         <a:solidFill>
                           <a:schemeClr val="lt1"/>
                         </a:solidFill>
@@ -16960,7 +13389,19 @@
                         </a:spcAft>
                         <a:buNone/>
                       </a:pPr>
-                      <a:endParaRPr/>
+                      <a:r>
+                        <a:rPr lang="en-US" sz="800" dirty="0" err="1">
+                          <a:solidFill>
+                            <a:schemeClr val="bg1"/>
+                          </a:solidFill>
+                        </a:rPr>
+                        <a:t>Julio.Garciagil@Equifax.com</a:t>
+                      </a:r>
+                      <a:endParaRPr sz="800" dirty="0">
+                        <a:solidFill>
+                          <a:schemeClr val="bg1"/>
+                        </a:solidFill>
+                      </a:endParaRPr>
                     </a:p>
                   </a:txBody>
                   <a:tcPr marL="91425" marR="91425" marT="91425" marB="91425">
@@ -17016,7 +13457,19 @@
                         </a:spcAft>
                         <a:buNone/>
                       </a:pPr>
-                      <a:endParaRPr/>
+                      <a:r>
+                        <a:rPr lang="en-US" sz="800" dirty="0">
+                          <a:solidFill>
+                            <a:schemeClr val="bg1"/>
+                          </a:solidFill>
+                        </a:rPr>
+                        <a:t>786-447-0835</a:t>
+                      </a:r>
+                      <a:endParaRPr sz="800" dirty="0">
+                        <a:solidFill>
+                          <a:schemeClr val="bg1"/>
+                        </a:solidFill>
+                      </a:endParaRPr>
                     </a:p>
                   </a:txBody>
                   <a:tcPr marL="91425" marR="91425" marT="91425" marB="91425">
@@ -17072,9 +13525,17 @@
                         </a:spcAft>
                         <a:buNone/>
                       </a:pPr>
-                      <a:endParaRPr>
+                      <a:r>
+                        <a:rPr lang="en-US" sz="800" dirty="0">
+                          <a:solidFill>
+                            <a:schemeClr val="bg1"/>
+                          </a:solidFill>
+                        </a:rPr>
+                        <a:t>yes</a:t>
+                      </a:r>
+                      <a:endParaRPr sz="800" dirty="0">
                         <a:solidFill>
-                          <a:schemeClr val="lt1"/>
+                          <a:schemeClr val="bg1"/>
                         </a:solidFill>
                       </a:endParaRPr>
                     </a:p>
@@ -17132,9 +13593,9 @@
                         </a:spcAft>
                         <a:buNone/>
                       </a:pPr>
-                      <a:endParaRPr>
+                      <a:endParaRPr sz="800" dirty="0">
                         <a:solidFill>
-                          <a:schemeClr val="lt1"/>
+                          <a:schemeClr val="bg1"/>
                         </a:solidFill>
                       </a:endParaRPr>
                     </a:p>
@@ -17192,7 +13653,11 @@
                         </a:spcAft>
                         <a:buNone/>
                       </a:pPr>
-                      <a:endParaRPr/>
+                      <a:endParaRPr sz="800" dirty="0">
+                        <a:solidFill>
+                          <a:schemeClr val="bg1"/>
+                        </a:solidFill>
+                      </a:endParaRPr>
                     </a:p>
                   </a:txBody>
                   <a:tcPr marL="91425" marR="91425" marT="91425" marB="91425">
@@ -17423,7 +13888,7 @@
                         </a:spcAft>
                         <a:buNone/>
                       </a:pPr>
-                      <a:endParaRPr>
+                      <a:endParaRPr dirty="0">
                         <a:solidFill>
                           <a:schemeClr val="lt1"/>
                         </a:solidFill>
@@ -17483,7 +13948,7 @@
                         </a:spcAft>
                         <a:buNone/>
                       </a:pPr>
-                      <a:endParaRPr>
+                      <a:endParaRPr dirty="0">
                         <a:solidFill>
                           <a:schemeClr val="lt1"/>
                         </a:solidFill>
@@ -17543,7 +14008,7 @@
                         </a:spcAft>
                         <a:buNone/>
                       </a:pPr>
-                      <a:endParaRPr/>
+                      <a:endParaRPr dirty="0"/>
                     </a:p>
                   </a:txBody>
                   <a:tcPr marL="91425" marR="91425" marT="91425" marB="91425">
@@ -17834,7 +14299,7 @@
                         </a:spcAft>
                         <a:buNone/>
                       </a:pPr>
-                      <a:endParaRPr>
+                      <a:endParaRPr dirty="0">
                         <a:solidFill>
                           <a:schemeClr val="lt1"/>
                         </a:solidFill>
@@ -17894,7 +14359,7 @@
                         </a:spcAft>
                         <a:buNone/>
                       </a:pPr>
-                      <a:endParaRPr/>
+                      <a:endParaRPr dirty="0"/>
                     </a:p>
                   </a:txBody>
                   <a:tcPr marL="91425" marR="91425" marT="91425" marB="91425">
@@ -18185,7 +14650,7 @@
                         </a:spcAft>
                         <a:buNone/>
                       </a:pPr>
-                      <a:endParaRPr>
+                      <a:endParaRPr dirty="0">
                         <a:solidFill>
                           <a:schemeClr val="lt1"/>
                         </a:solidFill>
@@ -18245,7 +14710,7 @@
                         </a:spcAft>
                         <a:buNone/>
                       </a:pPr>
-                      <a:endParaRPr/>
+                      <a:endParaRPr dirty="0"/>
                     </a:p>
                   </a:txBody>
                   <a:tcPr marL="91425" marR="91425" marT="91425" marB="91425">
@@ -18596,7 +15061,7 @@
                         </a:spcAft>
                         <a:buNone/>
                       </a:pPr>
-                      <a:endParaRPr/>
+                      <a:endParaRPr dirty="0"/>
                     </a:p>
                   </a:txBody>
                   <a:tcPr marL="91425" marR="91425" marT="91425" marB="91425">
@@ -18927,7 +15392,7 @@
 </p:sld>
 </file>
 
-<file path=ppt/slides/slide6.xml><?xml version="1.0" encoding="utf-8"?>
+<file path=ppt/slides/slide4.xml><?xml version="1.0" encoding="utf-8"?>
 <p:sld xmlns:a="http://schemas.openxmlformats.org/drawingml/2006/main" xmlns:r="http://schemas.openxmlformats.org/officeDocument/2006/relationships" xmlns:p="http://schemas.openxmlformats.org/presentationml/2006/main">
   <p:cSld>
     <p:spTree>
@@ -18976,7 +15441,7 @@
             </a:pPr>
             <a:fld id="{00000000-1234-1234-1234-123412341234}" type="slidenum">
               <a:rPr lang="en" smtClean="0"/>
-              <a:t>6</a:t>
+              <a:t>4</a:t>
             </a:fld>
             <a:endParaRPr lang="en"/>
           </a:p>
@@ -20274,7 +16739,7 @@
 </p:sld>
 </file>
 
-<file path=ppt/slides/slide8.xml><?xml version="1.0" encoding="utf-8"?>
+<file path=ppt/slides/slide5.xml><?xml version="1.0" encoding="utf-8"?>
 <p:sld xmlns:a="http://schemas.openxmlformats.org/drawingml/2006/main" xmlns:r="http://schemas.openxmlformats.org/officeDocument/2006/relationships" xmlns:p="http://schemas.openxmlformats.org/presentationml/2006/main">
   <p:cSld>
     <p:spTree>
@@ -20316,7 +16781,7 @@
             <a:r>
               <a:rPr sz="2550" b="1">
                 <a:solidFill>
-                  <a:srgbClr val="12343B"/>
+                  <a:srgbClr val="FFFFFF"/>
                 </a:solidFill>
                 <a:latin typeface="Calibri"/>
               </a:rPr>
@@ -20350,7 +16815,7 @@
             <a:r>
               <a:rPr sz="975">
                 <a:solidFill>
-                  <a:srgbClr val="4A5A5D"/>
+                  <a:srgbClr val="B8C4C6"/>
                 </a:solidFill>
                 <a:latin typeface="Calibri"/>
               </a:rPr>
@@ -21067,7 +17532,7 @@
                           </a:solidFill>
                           <a:latin typeface="Calibri"/>
                         </a:rPr>
-                        <a:t>Edge</a:t>
+                        <a:t>Lookup</a:t>
                       </a:r>
                     </a:p>
                   </a:txBody>
@@ -21581,7 +18046,7 @@
                 </a:solidFill>
                 <a:latin typeface="Calibri"/>
               </a:rPr>
-              <a:t>Footfall from finance, professional, health, education jobs</a:t>
+              <a:t>Footfall: all of a block's jobs, split evenly over retail, food, personal-service and arts shops</a:t>
             </a:r>
           </a:p>
         </p:txBody>
@@ -21944,6 +18409,2467 @@
                 <a:latin typeface="Calibri"/>
               </a:rPr>
               <a:t>businesses, loans, job counts, demographics and industry purchase rates are measured. Which business buys from which, and which shops a block's workers use, is our model. Limits: footfall location is tract-level and cascades count businesses, not jobs.</a:t>
+            </a:r>
+          </a:p>
+        </p:txBody>
+      </p:sp>
+    </p:spTree>
+  </p:cSld>
+  <p:clrMapOvr>
+    <a:masterClrMapping/>
+  </p:clrMapOvr>
+</p:sld>
+</file>
+
+<file path=ppt/slides/slide6.xml><?xml version="1.0" encoding="utf-8"?>
+<p:sld xmlns:a="http://schemas.openxmlformats.org/drawingml/2006/main" xmlns:r="http://schemas.openxmlformats.org/officeDocument/2006/relationships" xmlns:p="http://schemas.openxmlformats.org/presentationml/2006/main">
+  <p:cSld>
+    <p:spTree>
+      <p:nvGrpSpPr>
+        <p:cNvPr id="1" name=""/>
+        <p:cNvGrpSpPr/>
+        <p:nvPr/>
+      </p:nvGrpSpPr>
+      <p:grpSpPr>
+        <a:xfrm>
+          <a:off x="0" y="0"/>
+          <a:ext cx="0" cy="0"/>
+          <a:chOff x="0" y="0"/>
+          <a:chExt cx="0" cy="0"/>
+        </a:xfrm>
+      </p:grpSpPr>
+      <p:sp>
+        <p:nvSpPr>
+          <p:cNvPr id="2" name="Title"/>
+          <p:cNvSpPr txBox="1"/>
+          <p:nvPr/>
+        </p:nvSpPr>
+        <p:spPr>
+          <a:xfrm>
+            <a:off x="342900" y="260605"/>
+            <a:ext cx="8435340" cy="392415"/>
+          </a:xfrm>
+          <a:prstGeom prst="rect">
+            <a:avLst/>
+          </a:prstGeom>
+          <a:noFill/>
+        </p:spPr>
+        <p:txBody>
+          <a:bodyPr wrap="square" lIns="0" tIns="0" rIns="0" bIns="0" anchor="t">
+            <a:spAutoFit/>
+          </a:bodyPr>
+          <a:lstStyle/>
+          <a:p>
+            <a:pPr>
+              <a:spcAft>
+                <a:spcPts val="225"/>
+              </a:spcAft>
+            </a:pPr>
+            <a:r>
+              <a:rPr sz="2550" b="1" dirty="0">
+                <a:solidFill>
+                  <a:srgbClr val="FFFFFF"/>
+                </a:solidFill>
+                <a:latin typeface="Calibri"/>
+              </a:rPr>
+              <a:t>How our grant decision agents work together</a:t>
+            </a:r>
+          </a:p>
+        </p:txBody>
+      </p:sp>
+      <p:sp>
+        <p:nvSpPr>
+          <p:cNvPr id="3" name="Subtitle"/>
+          <p:cNvSpPr txBox="1"/>
+          <p:nvPr/>
+        </p:nvSpPr>
+        <p:spPr>
+          <a:xfrm>
+            <a:off x="342900" y="685801"/>
+            <a:ext cx="8435340" cy="161583"/>
+          </a:xfrm>
+          <a:prstGeom prst="rect">
+            <a:avLst/>
+          </a:prstGeom>
+          <a:noFill/>
+        </p:spPr>
+        <p:txBody>
+          <a:bodyPr wrap="square" lIns="0" tIns="0" rIns="0" bIns="0" anchor="t">
+            <a:spAutoFit/>
+          </a:bodyPr>
+          <a:lstStyle/>
+          <a:p>
+            <a:pPr>
+              <a:spcAft>
+                <a:spcPts val="225"/>
+              </a:spcAft>
+            </a:pPr>
+            <a:r>
+              <a:rPr sz="1050">
+                <a:solidFill>
+                  <a:srgbClr val="B8C4C6"/>
+                </a:solidFill>
+                <a:latin typeface="Calibri"/>
+              </a:rPr>
+              <a:t>Anchor-closure track · Central Market, San Francisco · four ADK agents in one chain, data through MCP, everything on Google Cloud</a:t>
+            </a:r>
+          </a:p>
+        </p:txBody>
+      </p:sp>
+      <p:sp>
+        <p:nvSpPr>
+          <p:cNvPr id="4" name="User card"/>
+          <p:cNvSpPr/>
+          <p:nvPr/>
+        </p:nvSpPr>
+        <p:spPr>
+          <a:xfrm>
+            <a:off x="342900" y="1062990"/>
+            <a:ext cx="1577340" cy="672084"/>
+          </a:xfrm>
+          <a:prstGeom prst="roundRect">
+            <a:avLst>
+              <a:gd name="adj" fmla="val 12000"/>
+            </a:avLst>
+          </a:prstGeom>
+          <a:solidFill>
+            <a:srgbClr val="E3EFED"/>
+          </a:solidFill>
+          <a:ln>
+            <a:noFill/>
+          </a:ln>
+          <a:effectLst/>
+        </p:spPr>
+        <p:style>
+          <a:lnRef idx="1">
+            <a:schemeClr val="accent1"/>
+          </a:lnRef>
+          <a:fillRef idx="3">
+            <a:schemeClr val="accent1"/>
+          </a:fillRef>
+          <a:effectRef idx="2">
+            <a:schemeClr val="accent1"/>
+          </a:effectRef>
+          <a:fontRef idx="minor">
+            <a:schemeClr val="lt1"/>
+          </a:fontRef>
+        </p:style>
+        <p:txBody>
+          <a:bodyPr rtlCol="0" anchor="ctr"/>
+          <a:lstStyle/>
+          <a:p>
+            <a:pPr algn="ctr"/>
+            <a:endParaRPr sz="1050"/>
+          </a:p>
+        </p:txBody>
+      </p:sp>
+      <p:sp>
+        <p:nvSpPr>
+          <p:cNvPr id="5" name="TextBox 4"/>
+          <p:cNvSpPr txBox="1"/>
+          <p:nvPr/>
+        </p:nvSpPr>
+        <p:spPr>
+          <a:xfrm>
+            <a:off x="466344" y="1124712"/>
+            <a:ext cx="1330452" cy="568104"/>
+          </a:xfrm>
+          <a:prstGeom prst="rect">
+            <a:avLst/>
+          </a:prstGeom>
+          <a:noFill/>
+        </p:spPr>
+        <p:txBody>
+          <a:bodyPr wrap="square" lIns="0" tIns="0" rIns="0" bIns="0" anchor="t">
+            <a:spAutoFit/>
+          </a:bodyPr>
+          <a:lstStyle/>
+          <a:p>
+            <a:pPr>
+              <a:spcAft>
+                <a:spcPts val="225"/>
+              </a:spcAft>
+            </a:pPr>
+            <a:r>
+              <a:rPr sz="1050" b="1">
+                <a:solidFill>
+                  <a:srgbClr val="12343B"/>
+                </a:solidFill>
+                <a:latin typeface="Calibri"/>
+              </a:rPr>
+              <a:t>Grant officer</a:t>
+            </a:r>
+          </a:p>
+          <a:p>
+            <a:pPr>
+              <a:spcAft>
+                <a:spcPts val="225"/>
+              </a:spcAft>
+            </a:pPr>
+            <a:r>
+              <a:rPr sz="825">
+                <a:solidFill>
+                  <a:srgbClr val="4A5A5D"/>
+                </a:solidFill>
+                <a:latin typeface="Calibri"/>
+              </a:rPr>
+              <a:t>Picks the closing employer, the budget and the grant-effect assumption</a:t>
+            </a:r>
+          </a:p>
+        </p:txBody>
+      </p:sp>
+      <p:cxnSp>
+        <p:nvCxnSpPr>
+          <p:cNvPr id="6" name="Connector 5"/>
+          <p:cNvCxnSpPr/>
+          <p:nvPr/>
+        </p:nvCxnSpPr>
+        <p:spPr>
+          <a:xfrm>
+            <a:off x="1131570" y="1735074"/>
+            <a:ext cx="0" cy="219456"/>
+          </a:xfrm>
+          <a:prstGeom prst="line">
+            <a:avLst/>
+          </a:prstGeom>
+          <a:ln w="22225">
+            <a:solidFill>
+              <a:srgbClr val="C27C00"/>
+            </a:solidFill>
+            <a:tailEnd type="triangle" w="med" len="med"/>
+          </a:ln>
+        </p:spPr>
+        <p:style>
+          <a:lnRef idx="2">
+            <a:schemeClr val="accent1"/>
+          </a:lnRef>
+          <a:fillRef idx="0">
+            <a:schemeClr val="accent1"/>
+          </a:fillRef>
+          <a:effectRef idx="1">
+            <a:schemeClr val="accent1"/>
+          </a:effectRef>
+          <a:fontRef idx="minor">
+            <a:schemeClr val="tx1"/>
+          </a:fontRef>
+        </p:style>
+      </p:cxnSp>
+      <p:sp>
+        <p:nvSpPr>
+          <p:cNvPr id="7" name="Front end card"/>
+          <p:cNvSpPr/>
+          <p:nvPr/>
+        </p:nvSpPr>
+        <p:spPr>
+          <a:xfrm>
+            <a:off x="342900" y="1954530"/>
+            <a:ext cx="1577340" cy="1337310"/>
+          </a:xfrm>
+          <a:prstGeom prst="roundRect">
+            <a:avLst>
+              <a:gd name="adj" fmla="val 6153"/>
+            </a:avLst>
+          </a:prstGeom>
+          <a:solidFill>
+            <a:srgbClr val="FFFFFF"/>
+          </a:solidFill>
+          <a:ln w="19050">
+            <a:solidFill>
+              <a:srgbClr val="C27C00"/>
+            </a:solidFill>
+          </a:ln>
+          <a:effectLst/>
+        </p:spPr>
+        <p:style>
+          <a:lnRef idx="1">
+            <a:schemeClr val="accent1"/>
+          </a:lnRef>
+          <a:fillRef idx="3">
+            <a:schemeClr val="accent1"/>
+          </a:fillRef>
+          <a:effectRef idx="2">
+            <a:schemeClr val="accent1"/>
+          </a:effectRef>
+          <a:fontRef idx="minor">
+            <a:schemeClr val="lt1"/>
+          </a:fontRef>
+        </p:style>
+        <p:txBody>
+          <a:bodyPr rtlCol="0" anchor="ctr"/>
+          <a:lstStyle/>
+          <a:p>
+            <a:pPr algn="ctr"/>
+            <a:endParaRPr sz="1050"/>
+          </a:p>
+        </p:txBody>
+      </p:sp>
+      <p:sp>
+        <p:nvSpPr>
+          <p:cNvPr id="8" name="TextBox 7"/>
+          <p:cNvSpPr txBox="1"/>
+          <p:nvPr/>
+        </p:nvSpPr>
+        <p:spPr>
+          <a:xfrm>
+            <a:off x="466344" y="2023110"/>
+            <a:ext cx="1330452" cy="1000274"/>
+          </a:xfrm>
+          <a:prstGeom prst="rect">
+            <a:avLst/>
+          </a:prstGeom>
+          <a:noFill/>
+        </p:spPr>
+        <p:txBody>
+          <a:bodyPr wrap="square" lIns="0" tIns="0" rIns="0" bIns="0" anchor="t">
+            <a:spAutoFit/>
+          </a:bodyPr>
+          <a:lstStyle/>
+          <a:p>
+            <a:pPr>
+              <a:spcAft>
+                <a:spcPts val="225"/>
+              </a:spcAft>
+            </a:pPr>
+            <a:r>
+              <a:rPr sz="1050" b="1">
+                <a:solidFill>
+                  <a:srgbClr val="12343B"/>
+                </a:solidFill>
+                <a:latin typeface="Calibri"/>
+              </a:rPr>
+              <a:t>Interactive map</a:t>
+            </a:r>
+          </a:p>
+          <a:p>
+            <a:pPr>
+              <a:spcAft>
+                <a:spcPts val="225"/>
+              </a:spcAft>
+            </a:pPr>
+            <a:r>
+              <a:rPr sz="825" b="1">
+                <a:solidFill>
+                  <a:srgbClr val="C27C00"/>
+                </a:solidFill>
+                <a:latin typeface="Calibri"/>
+              </a:rPr>
+              <a:t>Cloud Run · Google Maps JS API</a:t>
+            </a:r>
+          </a:p>
+          <a:p>
+            <a:pPr>
+              <a:spcAft>
+                <a:spcPts val="225"/>
+              </a:spcAft>
+            </a:pPr>
+            <a:r>
+              <a:rPr sz="825">
+                <a:solidFill>
+                  <a:srgbClr val="4A5A5D"/>
+                </a:solidFill>
+                <a:latin typeface="Calibri"/>
+              </a:rPr>
+              <a:t>Hover a business: amount, justification, impact</a:t>
+            </a:r>
+          </a:p>
+          <a:p>
+            <a:pPr>
+              <a:spcAft>
+                <a:spcPts val="225"/>
+              </a:spcAft>
+            </a:pPr>
+            <a:r>
+              <a:rPr sz="825">
+                <a:solidFill>
+                  <a:srgbClr val="4A5A5D"/>
+                </a:solidFill>
+                <a:latin typeface="Calibri"/>
+              </a:rPr>
+              <a:t>The cascade is drawn on the map, anchor to supplier</a:t>
+            </a:r>
+          </a:p>
+        </p:txBody>
+      </p:sp>
+      <p:cxnSp>
+        <p:nvCxnSpPr>
+          <p:cNvPr id="9" name="Connector 8"/>
+          <p:cNvCxnSpPr/>
+          <p:nvPr/>
+        </p:nvCxnSpPr>
+        <p:spPr>
+          <a:xfrm>
+            <a:off x="1920240" y="2297430"/>
+            <a:ext cx="651510" cy="0"/>
+          </a:xfrm>
+          <a:prstGeom prst="line">
+            <a:avLst/>
+          </a:prstGeom>
+          <a:ln w="22225">
+            <a:solidFill>
+              <a:srgbClr val="C27C00"/>
+            </a:solidFill>
+            <a:tailEnd type="triangle" w="med" len="med"/>
+          </a:ln>
+        </p:spPr>
+        <p:style>
+          <a:lnRef idx="2">
+            <a:schemeClr val="accent1"/>
+          </a:lnRef>
+          <a:fillRef idx="0">
+            <a:schemeClr val="accent1"/>
+          </a:fillRef>
+          <a:effectRef idx="1">
+            <a:schemeClr val="accent1"/>
+          </a:effectRef>
+          <a:fontRef idx="minor">
+            <a:schemeClr val="tx1"/>
+          </a:fontRef>
+        </p:style>
+      </p:cxnSp>
+      <p:sp>
+        <p:nvSpPr>
+          <p:cNvPr id="10" name="TextBox 9"/>
+          <p:cNvSpPr txBox="1"/>
+          <p:nvPr/>
+        </p:nvSpPr>
+        <p:spPr>
+          <a:xfrm>
+            <a:off x="1947672" y="2057401"/>
+            <a:ext cx="596646" cy="103875"/>
+          </a:xfrm>
+          <a:prstGeom prst="rect">
+            <a:avLst/>
+          </a:prstGeom>
+          <a:noFill/>
+        </p:spPr>
+        <p:txBody>
+          <a:bodyPr wrap="square" lIns="0" tIns="0" rIns="0" bIns="0" anchor="t">
+            <a:spAutoFit/>
+          </a:bodyPr>
+          <a:lstStyle/>
+          <a:p>
+            <a:pPr algn="ctr">
+              <a:spcAft>
+                <a:spcPts val="225"/>
+              </a:spcAft>
+            </a:pPr>
+            <a:r>
+              <a:rPr sz="675" b="1">
+                <a:solidFill>
+                  <a:srgbClr val="C27C00"/>
+                </a:solidFill>
+                <a:latin typeface="Calibri"/>
+              </a:rPr>
+              <a:t>POST /scenario</a:t>
+            </a:r>
+          </a:p>
+        </p:txBody>
+      </p:sp>
+      <p:cxnSp>
+        <p:nvCxnSpPr>
+          <p:cNvPr id="11" name="Connector 10"/>
+          <p:cNvCxnSpPr/>
+          <p:nvPr/>
+        </p:nvCxnSpPr>
+        <p:spPr>
+          <a:xfrm flipH="1">
+            <a:off x="1920240" y="2914650"/>
+            <a:ext cx="651510" cy="0"/>
+          </a:xfrm>
+          <a:prstGeom prst="line">
+            <a:avLst/>
+          </a:prstGeom>
+          <a:ln w="22225">
+            <a:solidFill>
+              <a:srgbClr val="C27C00"/>
+            </a:solidFill>
+            <a:tailEnd type="triangle" w="med" len="med"/>
+          </a:ln>
+        </p:spPr>
+        <p:style>
+          <a:lnRef idx="2">
+            <a:schemeClr val="accent1"/>
+          </a:lnRef>
+          <a:fillRef idx="0">
+            <a:schemeClr val="accent1"/>
+          </a:fillRef>
+          <a:effectRef idx="1">
+            <a:schemeClr val="accent1"/>
+          </a:effectRef>
+          <a:fontRef idx="minor">
+            <a:schemeClr val="tx1"/>
+          </a:fontRef>
+        </p:style>
+      </p:cxnSp>
+      <p:sp>
+        <p:nvSpPr>
+          <p:cNvPr id="12" name="TextBox 11"/>
+          <p:cNvSpPr txBox="1"/>
+          <p:nvPr/>
+        </p:nvSpPr>
+        <p:spPr>
+          <a:xfrm>
+            <a:off x="1947672" y="2955798"/>
+            <a:ext cx="596646" cy="103875"/>
+          </a:xfrm>
+          <a:prstGeom prst="rect">
+            <a:avLst/>
+          </a:prstGeom>
+          <a:noFill/>
+        </p:spPr>
+        <p:txBody>
+          <a:bodyPr wrap="square" lIns="0" tIns="0" rIns="0" bIns="0" anchor="t">
+            <a:spAutoFit/>
+          </a:bodyPr>
+          <a:lstStyle/>
+          <a:p>
+            <a:pPr algn="ctr">
+              <a:spcAft>
+                <a:spcPts val="225"/>
+              </a:spcAft>
+            </a:pPr>
+            <a:r>
+              <a:rPr sz="675" b="1">
+                <a:solidFill>
+                  <a:srgbClr val="C27C00"/>
+                </a:solidFill>
+                <a:latin typeface="Calibri"/>
+              </a:rPr>
+              <a:t>decisions.json</a:t>
+            </a:r>
+          </a:p>
+        </p:txBody>
+      </p:sp>
+      <p:sp>
+        <p:nvSpPr>
+          <p:cNvPr id="13" name="ADK root agent"/>
+          <p:cNvSpPr/>
+          <p:nvPr/>
+        </p:nvSpPr>
+        <p:spPr>
+          <a:xfrm>
+            <a:off x="2571750" y="1028700"/>
+            <a:ext cx="6227064" cy="2023110"/>
+          </a:xfrm>
+          <a:prstGeom prst="roundRect">
+            <a:avLst>
+              <a:gd name="adj" fmla="val 4067"/>
+            </a:avLst>
+          </a:prstGeom>
+          <a:solidFill>
+            <a:srgbClr val="E3EFED"/>
+          </a:solidFill>
+          <a:ln w="12700">
+            <a:solidFill>
+              <a:srgbClr val="B8D4D0"/>
+            </a:solidFill>
+          </a:ln>
+          <a:effectLst/>
+        </p:spPr>
+        <p:style>
+          <a:lnRef idx="1">
+            <a:schemeClr val="accent1"/>
+          </a:lnRef>
+          <a:fillRef idx="3">
+            <a:schemeClr val="accent1"/>
+          </a:fillRef>
+          <a:effectRef idx="2">
+            <a:schemeClr val="accent1"/>
+          </a:effectRef>
+          <a:fontRef idx="minor">
+            <a:schemeClr val="lt1"/>
+          </a:fontRef>
+        </p:style>
+        <p:txBody>
+          <a:bodyPr rtlCol="0" anchor="ctr"/>
+          <a:lstStyle/>
+          <a:p>
+            <a:pPr algn="ctr"/>
+            <a:endParaRPr sz="1050"/>
+          </a:p>
+        </p:txBody>
+      </p:sp>
+      <p:sp>
+        <p:nvSpPr>
+          <p:cNvPr id="14" name="TextBox 13"/>
+          <p:cNvSpPr txBox="1"/>
+          <p:nvPr/>
+        </p:nvSpPr>
+        <p:spPr>
+          <a:xfrm>
+            <a:off x="2708910" y="1097281"/>
+            <a:ext cx="5952744" cy="161583"/>
+          </a:xfrm>
+          <a:prstGeom prst="rect">
+            <a:avLst/>
+          </a:prstGeom>
+          <a:noFill/>
+        </p:spPr>
+        <p:txBody>
+          <a:bodyPr wrap="square" lIns="0" tIns="0" rIns="0" bIns="0" anchor="t">
+            <a:spAutoFit/>
+          </a:bodyPr>
+          <a:lstStyle/>
+          <a:p>
+            <a:pPr>
+              <a:spcAft>
+                <a:spcPts val="225"/>
+              </a:spcAft>
+            </a:pPr>
+            <a:r>
+              <a:rPr sz="1050" b="1">
+                <a:solidFill>
+                  <a:srgbClr val="12343B"/>
+                </a:solidFill>
+                <a:latin typeface="Calibri"/>
+              </a:rPr>
+              <a:t>ADK root agent </a:t>
+            </a:r>
+            <a:r>
+              <a:rPr sz="1050">
+                <a:solidFill>
+                  <a:srgbClr val="1F6F6B"/>
+                </a:solidFill>
+                <a:latin typeface="Calibri"/>
+              </a:rPr>
+              <a:t>· SequentialAgent · Gemini · deployed on Agent Runtime</a:t>
+            </a:r>
+          </a:p>
+        </p:txBody>
+      </p:sp>
+      <p:sp>
+        <p:nvSpPr>
+          <p:cNvPr id="15" name="Agent 1"/>
+          <p:cNvSpPr/>
+          <p:nvPr/>
+        </p:nvSpPr>
+        <p:spPr>
+          <a:xfrm>
+            <a:off x="2708910" y="1405889"/>
+            <a:ext cx="1323594" cy="1165860"/>
+          </a:xfrm>
+          <a:prstGeom prst="roundRect">
+            <a:avLst>
+              <a:gd name="adj" fmla="val 7058"/>
+            </a:avLst>
+          </a:prstGeom>
+          <a:solidFill>
+            <a:srgbClr val="FFFFFF"/>
+          </a:solidFill>
+          <a:ln w="12700">
+            <a:solidFill>
+              <a:srgbClr val="B8D4D0"/>
+            </a:solidFill>
+          </a:ln>
+          <a:effectLst/>
+        </p:spPr>
+        <p:style>
+          <a:lnRef idx="1">
+            <a:schemeClr val="accent1"/>
+          </a:lnRef>
+          <a:fillRef idx="3">
+            <a:schemeClr val="accent1"/>
+          </a:fillRef>
+          <a:effectRef idx="2">
+            <a:schemeClr val="accent1"/>
+          </a:effectRef>
+          <a:fontRef idx="minor">
+            <a:schemeClr val="lt1"/>
+          </a:fontRef>
+        </p:style>
+        <p:txBody>
+          <a:bodyPr rtlCol="0" anchor="ctr"/>
+          <a:lstStyle/>
+          <a:p>
+            <a:pPr algn="ctr"/>
+            <a:endParaRPr sz="1050"/>
+          </a:p>
+        </p:txBody>
+      </p:sp>
+      <p:sp>
+        <p:nvSpPr>
+          <p:cNvPr id="16" name="Oval 15"/>
+          <p:cNvSpPr/>
+          <p:nvPr/>
+        </p:nvSpPr>
+        <p:spPr>
+          <a:xfrm>
+            <a:off x="2804922" y="1501902"/>
+            <a:ext cx="246888" cy="246888"/>
+          </a:xfrm>
+          <a:prstGeom prst="ellipse">
+            <a:avLst/>
+          </a:prstGeom>
+          <a:solidFill>
+            <a:srgbClr val="1F6F6B"/>
+          </a:solidFill>
+          <a:ln>
+            <a:noFill/>
+          </a:ln>
+          <a:effectLst/>
+        </p:spPr>
+        <p:style>
+          <a:lnRef idx="1">
+            <a:schemeClr val="accent1"/>
+          </a:lnRef>
+          <a:fillRef idx="3">
+            <a:schemeClr val="accent1"/>
+          </a:fillRef>
+          <a:effectRef idx="2">
+            <a:schemeClr val="accent1"/>
+          </a:effectRef>
+          <a:fontRef idx="minor">
+            <a:schemeClr val="lt1"/>
+          </a:fontRef>
+        </p:style>
+        <p:txBody>
+          <a:bodyPr lIns="0" tIns="0" rIns="0" bIns="0" rtlCol="0" anchor="ctr"/>
+          <a:lstStyle/>
+          <a:p>
+            <a:pPr algn="ctr"/>
+            <a:r>
+              <a:rPr sz="975" b="1">
+                <a:solidFill>
+                  <a:srgbClr val="FFFFFF"/>
+                </a:solidFill>
+                <a:latin typeface="Calibri"/>
+              </a:rPr>
+              <a:t>1</a:t>
+            </a:r>
+          </a:p>
+        </p:txBody>
+      </p:sp>
+      <p:sp>
+        <p:nvSpPr>
+          <p:cNvPr id="17" name="TextBox 16"/>
+          <p:cNvSpPr txBox="1"/>
+          <p:nvPr/>
+        </p:nvSpPr>
+        <p:spPr>
+          <a:xfrm>
+            <a:off x="2804922" y="1817370"/>
+            <a:ext cx="1131570" cy="150041"/>
+          </a:xfrm>
+          <a:prstGeom prst="rect">
+            <a:avLst/>
+          </a:prstGeom>
+          <a:noFill/>
+        </p:spPr>
+        <p:txBody>
+          <a:bodyPr wrap="square" lIns="0" tIns="0" rIns="0" bIns="0" anchor="t">
+            <a:spAutoFit/>
+          </a:bodyPr>
+          <a:lstStyle/>
+          <a:p>
+            <a:pPr>
+              <a:spcAft>
+                <a:spcPts val="225"/>
+              </a:spcAft>
+            </a:pPr>
+            <a:r>
+              <a:rPr sz="975" b="1">
+                <a:solidFill>
+                  <a:srgbClr val="12343B"/>
+                </a:solidFill>
+                <a:latin typeface="Calibri"/>
+              </a:rPr>
+              <a:t>Cascade Scout</a:t>
+            </a:r>
+          </a:p>
+        </p:txBody>
+      </p:sp>
+      <p:sp>
+        <p:nvSpPr>
+          <p:cNvPr id="18" name="TextBox 17"/>
+          <p:cNvSpPr txBox="1"/>
+          <p:nvPr/>
+        </p:nvSpPr>
+        <p:spPr>
+          <a:xfrm>
+            <a:off x="2804922" y="2036826"/>
+            <a:ext cx="1131570" cy="380873"/>
+          </a:xfrm>
+          <a:prstGeom prst="rect">
+            <a:avLst/>
+          </a:prstGeom>
+          <a:noFill/>
+        </p:spPr>
+        <p:txBody>
+          <a:bodyPr wrap="square" lIns="0" tIns="0" rIns="0" bIns="0" anchor="t">
+            <a:spAutoFit/>
+          </a:bodyPr>
+          <a:lstStyle/>
+          <a:p>
+            <a:pPr>
+              <a:spcAft>
+                <a:spcPts val="225"/>
+              </a:spcAft>
+            </a:pPr>
+            <a:r>
+              <a:rPr sz="825">
+                <a:solidFill>
+                  <a:srgbClr val="4A5A5D"/>
+                </a:solidFill>
+                <a:latin typeface="Calibri"/>
+              </a:rPr>
+              <a:t>Walks the graph: footfall forward, then supplies backward, 1 to 2 hops</a:t>
+            </a:r>
+          </a:p>
+        </p:txBody>
+      </p:sp>
+      <p:cxnSp>
+        <p:nvCxnSpPr>
+          <p:cNvPr id="19" name="Connector 18"/>
+          <p:cNvCxnSpPr/>
+          <p:nvPr/>
+        </p:nvCxnSpPr>
+        <p:spPr>
+          <a:xfrm>
+            <a:off x="4059936" y="1988820"/>
+            <a:ext cx="164592" cy="0"/>
+          </a:xfrm>
+          <a:prstGeom prst="line">
+            <a:avLst/>
+          </a:prstGeom>
+          <a:ln w="25400">
+            <a:solidFill>
+              <a:srgbClr val="1F6F6B"/>
+            </a:solidFill>
+            <a:tailEnd type="triangle" w="med" len="med"/>
+          </a:ln>
+        </p:spPr>
+        <p:style>
+          <a:lnRef idx="2">
+            <a:schemeClr val="accent1"/>
+          </a:lnRef>
+          <a:fillRef idx="0">
+            <a:schemeClr val="accent1"/>
+          </a:fillRef>
+          <a:effectRef idx="1">
+            <a:schemeClr val="accent1"/>
+          </a:effectRef>
+          <a:fontRef idx="minor">
+            <a:schemeClr val="tx1"/>
+          </a:fontRef>
+        </p:style>
+      </p:cxnSp>
+      <p:sp>
+        <p:nvSpPr>
+          <p:cNvPr id="20" name="Agent 2"/>
+          <p:cNvSpPr/>
+          <p:nvPr/>
+        </p:nvSpPr>
+        <p:spPr>
+          <a:xfrm>
+            <a:off x="4251960" y="1405889"/>
+            <a:ext cx="1323594" cy="1165860"/>
+          </a:xfrm>
+          <a:prstGeom prst="roundRect">
+            <a:avLst>
+              <a:gd name="adj" fmla="val 7058"/>
+            </a:avLst>
+          </a:prstGeom>
+          <a:solidFill>
+            <a:srgbClr val="FFFFFF"/>
+          </a:solidFill>
+          <a:ln w="12700">
+            <a:solidFill>
+              <a:srgbClr val="B8D4D0"/>
+            </a:solidFill>
+          </a:ln>
+          <a:effectLst/>
+        </p:spPr>
+        <p:style>
+          <a:lnRef idx="1">
+            <a:schemeClr val="accent1"/>
+          </a:lnRef>
+          <a:fillRef idx="3">
+            <a:schemeClr val="accent1"/>
+          </a:fillRef>
+          <a:effectRef idx="2">
+            <a:schemeClr val="accent1"/>
+          </a:effectRef>
+          <a:fontRef idx="minor">
+            <a:schemeClr val="lt1"/>
+          </a:fontRef>
+        </p:style>
+        <p:txBody>
+          <a:bodyPr rtlCol="0" anchor="ctr"/>
+          <a:lstStyle/>
+          <a:p>
+            <a:pPr algn="ctr"/>
+            <a:endParaRPr sz="1050"/>
+          </a:p>
+        </p:txBody>
+      </p:sp>
+      <p:sp>
+        <p:nvSpPr>
+          <p:cNvPr id="21" name="Oval 20"/>
+          <p:cNvSpPr/>
+          <p:nvPr/>
+        </p:nvSpPr>
+        <p:spPr>
+          <a:xfrm>
+            <a:off x="4347972" y="1501902"/>
+            <a:ext cx="246888" cy="246888"/>
+          </a:xfrm>
+          <a:prstGeom prst="ellipse">
+            <a:avLst/>
+          </a:prstGeom>
+          <a:solidFill>
+            <a:srgbClr val="1F6F6B"/>
+          </a:solidFill>
+          <a:ln>
+            <a:noFill/>
+          </a:ln>
+          <a:effectLst/>
+        </p:spPr>
+        <p:style>
+          <a:lnRef idx="1">
+            <a:schemeClr val="accent1"/>
+          </a:lnRef>
+          <a:fillRef idx="3">
+            <a:schemeClr val="accent1"/>
+          </a:fillRef>
+          <a:effectRef idx="2">
+            <a:schemeClr val="accent1"/>
+          </a:effectRef>
+          <a:fontRef idx="minor">
+            <a:schemeClr val="lt1"/>
+          </a:fontRef>
+        </p:style>
+        <p:txBody>
+          <a:bodyPr lIns="0" tIns="0" rIns="0" bIns="0" rtlCol="0" anchor="ctr"/>
+          <a:lstStyle/>
+          <a:p>
+            <a:pPr algn="ctr"/>
+            <a:r>
+              <a:rPr sz="975" b="1">
+                <a:solidFill>
+                  <a:srgbClr val="FFFFFF"/>
+                </a:solidFill>
+                <a:latin typeface="Calibri"/>
+              </a:rPr>
+              <a:t>2</a:t>
+            </a:r>
+          </a:p>
+        </p:txBody>
+      </p:sp>
+      <p:sp>
+        <p:nvSpPr>
+          <p:cNvPr id="22" name="TextBox 21"/>
+          <p:cNvSpPr txBox="1"/>
+          <p:nvPr/>
+        </p:nvSpPr>
+        <p:spPr>
+          <a:xfrm>
+            <a:off x="4347972" y="1817370"/>
+            <a:ext cx="1131570" cy="150041"/>
+          </a:xfrm>
+          <a:prstGeom prst="rect">
+            <a:avLst/>
+          </a:prstGeom>
+          <a:noFill/>
+        </p:spPr>
+        <p:txBody>
+          <a:bodyPr wrap="square" lIns="0" tIns="0" rIns="0" bIns="0" anchor="t">
+            <a:spAutoFit/>
+          </a:bodyPr>
+          <a:lstStyle/>
+          <a:p>
+            <a:pPr>
+              <a:spcAft>
+                <a:spcPts val="225"/>
+              </a:spcAft>
+            </a:pPr>
+            <a:r>
+              <a:rPr sz="975" b="1">
+                <a:solidFill>
+                  <a:srgbClr val="12343B"/>
+                </a:solidFill>
+                <a:latin typeface="Calibri"/>
+              </a:rPr>
+              <a:t>Risk Assessor</a:t>
+            </a:r>
+          </a:p>
+        </p:txBody>
+      </p:sp>
+      <p:sp>
+        <p:nvSpPr>
+          <p:cNvPr id="23" name="TextBox 22"/>
+          <p:cNvSpPr txBox="1"/>
+          <p:nvPr/>
+        </p:nvSpPr>
+        <p:spPr>
+          <a:xfrm>
+            <a:off x="4347972" y="2036826"/>
+            <a:ext cx="1131570" cy="380873"/>
+          </a:xfrm>
+          <a:prstGeom prst="rect">
+            <a:avLst/>
+          </a:prstGeom>
+          <a:noFill/>
+        </p:spPr>
+        <p:txBody>
+          <a:bodyPr wrap="square" lIns="0" tIns="0" rIns="0" bIns="0" anchor="t">
+            <a:spAutoFit/>
+          </a:bodyPr>
+          <a:lstStyle/>
+          <a:p>
+            <a:pPr>
+              <a:spcAft>
+                <a:spcPts val="225"/>
+              </a:spcAft>
+            </a:pPr>
+            <a:r>
+              <a:rPr sz="825">
+                <a:solidFill>
+                  <a:srgbClr val="4A5A5D"/>
+                </a:solidFill>
+                <a:latin typeface="Calibri"/>
+              </a:rPr>
+              <a:t>Scores exposure, fragility and tract need for each business</a:t>
+            </a:r>
+          </a:p>
+        </p:txBody>
+      </p:sp>
+      <p:cxnSp>
+        <p:nvCxnSpPr>
+          <p:cNvPr id="24" name="Connector 23"/>
+          <p:cNvCxnSpPr/>
+          <p:nvPr/>
+        </p:nvCxnSpPr>
+        <p:spPr>
+          <a:xfrm>
+            <a:off x="5602986" y="1988820"/>
+            <a:ext cx="164592" cy="0"/>
+          </a:xfrm>
+          <a:prstGeom prst="line">
+            <a:avLst/>
+          </a:prstGeom>
+          <a:ln w="25400">
+            <a:solidFill>
+              <a:srgbClr val="1F6F6B"/>
+            </a:solidFill>
+            <a:tailEnd type="triangle" w="med" len="med"/>
+          </a:ln>
+        </p:spPr>
+        <p:style>
+          <a:lnRef idx="2">
+            <a:schemeClr val="accent1"/>
+          </a:lnRef>
+          <a:fillRef idx="0">
+            <a:schemeClr val="accent1"/>
+          </a:fillRef>
+          <a:effectRef idx="1">
+            <a:schemeClr val="accent1"/>
+          </a:effectRef>
+          <a:fontRef idx="minor">
+            <a:schemeClr val="tx1"/>
+          </a:fontRef>
+        </p:style>
+      </p:cxnSp>
+      <p:sp>
+        <p:nvSpPr>
+          <p:cNvPr id="25" name="Agent 3"/>
+          <p:cNvSpPr/>
+          <p:nvPr/>
+        </p:nvSpPr>
+        <p:spPr>
+          <a:xfrm>
+            <a:off x="5795009" y="1405889"/>
+            <a:ext cx="1323594" cy="1165860"/>
+          </a:xfrm>
+          <a:prstGeom prst="roundRect">
+            <a:avLst>
+              <a:gd name="adj" fmla="val 7058"/>
+            </a:avLst>
+          </a:prstGeom>
+          <a:solidFill>
+            <a:srgbClr val="FFFFFF"/>
+          </a:solidFill>
+          <a:ln w="12700">
+            <a:solidFill>
+              <a:srgbClr val="B8D4D0"/>
+            </a:solidFill>
+          </a:ln>
+          <a:effectLst/>
+        </p:spPr>
+        <p:style>
+          <a:lnRef idx="1">
+            <a:schemeClr val="accent1"/>
+          </a:lnRef>
+          <a:fillRef idx="3">
+            <a:schemeClr val="accent1"/>
+          </a:fillRef>
+          <a:effectRef idx="2">
+            <a:schemeClr val="accent1"/>
+          </a:effectRef>
+          <a:fontRef idx="minor">
+            <a:schemeClr val="lt1"/>
+          </a:fontRef>
+        </p:style>
+        <p:txBody>
+          <a:bodyPr rtlCol="0" anchor="ctr"/>
+          <a:lstStyle/>
+          <a:p>
+            <a:pPr algn="ctr"/>
+            <a:endParaRPr sz="1050"/>
+          </a:p>
+        </p:txBody>
+      </p:sp>
+      <p:sp>
+        <p:nvSpPr>
+          <p:cNvPr id="26" name="Oval 25"/>
+          <p:cNvSpPr/>
+          <p:nvPr/>
+        </p:nvSpPr>
+        <p:spPr>
+          <a:xfrm>
+            <a:off x="5891022" y="1501902"/>
+            <a:ext cx="246888" cy="246888"/>
+          </a:xfrm>
+          <a:prstGeom prst="ellipse">
+            <a:avLst/>
+          </a:prstGeom>
+          <a:solidFill>
+            <a:srgbClr val="C27C00"/>
+          </a:solidFill>
+          <a:ln>
+            <a:noFill/>
+          </a:ln>
+          <a:effectLst/>
+        </p:spPr>
+        <p:style>
+          <a:lnRef idx="1">
+            <a:schemeClr val="accent1"/>
+          </a:lnRef>
+          <a:fillRef idx="3">
+            <a:schemeClr val="accent1"/>
+          </a:fillRef>
+          <a:effectRef idx="2">
+            <a:schemeClr val="accent1"/>
+          </a:effectRef>
+          <a:fontRef idx="minor">
+            <a:schemeClr val="lt1"/>
+          </a:fontRef>
+        </p:style>
+        <p:txBody>
+          <a:bodyPr lIns="0" tIns="0" rIns="0" bIns="0" rtlCol="0" anchor="ctr"/>
+          <a:lstStyle/>
+          <a:p>
+            <a:pPr algn="ctr"/>
+            <a:r>
+              <a:rPr sz="975" b="1">
+                <a:solidFill>
+                  <a:srgbClr val="FFFFFF"/>
+                </a:solidFill>
+                <a:latin typeface="Calibri"/>
+              </a:rPr>
+              <a:t>3</a:t>
+            </a:r>
+          </a:p>
+        </p:txBody>
+      </p:sp>
+      <p:sp>
+        <p:nvSpPr>
+          <p:cNvPr id="27" name="TextBox 26"/>
+          <p:cNvSpPr txBox="1"/>
+          <p:nvPr/>
+        </p:nvSpPr>
+        <p:spPr>
+          <a:xfrm>
+            <a:off x="5891022" y="1817370"/>
+            <a:ext cx="1131570" cy="150041"/>
+          </a:xfrm>
+          <a:prstGeom prst="rect">
+            <a:avLst/>
+          </a:prstGeom>
+          <a:noFill/>
+        </p:spPr>
+        <p:txBody>
+          <a:bodyPr wrap="square" lIns="0" tIns="0" rIns="0" bIns="0" anchor="t">
+            <a:spAutoFit/>
+          </a:bodyPr>
+          <a:lstStyle/>
+          <a:p>
+            <a:pPr>
+              <a:spcAft>
+                <a:spcPts val="225"/>
+              </a:spcAft>
+            </a:pPr>
+            <a:r>
+              <a:rPr sz="975" b="1">
+                <a:solidFill>
+                  <a:srgbClr val="12343B"/>
+                </a:solidFill>
+                <a:latin typeface="Calibri"/>
+              </a:rPr>
+              <a:t>Grant Allocator</a:t>
+            </a:r>
+          </a:p>
+        </p:txBody>
+      </p:sp>
+      <p:sp>
+        <p:nvSpPr>
+          <p:cNvPr id="28" name="TextBox 27"/>
+          <p:cNvSpPr txBox="1"/>
+          <p:nvPr/>
+        </p:nvSpPr>
+        <p:spPr>
+          <a:xfrm>
+            <a:off x="5891022" y="2036826"/>
+            <a:ext cx="1131570" cy="380873"/>
+          </a:xfrm>
+          <a:prstGeom prst="rect">
+            <a:avLst/>
+          </a:prstGeom>
+          <a:noFill/>
+        </p:spPr>
+        <p:txBody>
+          <a:bodyPr wrap="square" lIns="0" tIns="0" rIns="0" bIns="0" anchor="t">
+            <a:spAutoFit/>
+          </a:bodyPr>
+          <a:lstStyle/>
+          <a:p>
+            <a:pPr>
+              <a:spcAft>
+                <a:spcPts val="225"/>
+              </a:spcAft>
+            </a:pPr>
+            <a:r>
+              <a:rPr sz="825">
+                <a:solidFill>
+                  <a:srgbClr val="4A5A5D"/>
+                </a:solidFill>
+                <a:latin typeface="Calibri"/>
+              </a:rPr>
+              <a:t>Splits the budget, names the runner-up, tests the assumption</a:t>
+            </a:r>
+          </a:p>
+        </p:txBody>
+      </p:sp>
+      <p:cxnSp>
+        <p:nvCxnSpPr>
+          <p:cNvPr id="29" name="Connector 28"/>
+          <p:cNvCxnSpPr/>
+          <p:nvPr/>
+        </p:nvCxnSpPr>
+        <p:spPr>
+          <a:xfrm>
+            <a:off x="7146036" y="1988820"/>
+            <a:ext cx="164593" cy="0"/>
+          </a:xfrm>
+          <a:prstGeom prst="line">
+            <a:avLst/>
+          </a:prstGeom>
+          <a:ln w="25400">
+            <a:solidFill>
+              <a:srgbClr val="1F6F6B"/>
+            </a:solidFill>
+            <a:tailEnd type="triangle" w="med" len="med"/>
+          </a:ln>
+        </p:spPr>
+        <p:style>
+          <a:lnRef idx="2">
+            <a:schemeClr val="accent1"/>
+          </a:lnRef>
+          <a:fillRef idx="0">
+            <a:schemeClr val="accent1"/>
+          </a:fillRef>
+          <a:effectRef idx="1">
+            <a:schemeClr val="accent1"/>
+          </a:effectRef>
+          <a:fontRef idx="minor">
+            <a:schemeClr val="tx1"/>
+          </a:fontRef>
+        </p:style>
+      </p:cxnSp>
+      <p:sp>
+        <p:nvSpPr>
+          <p:cNvPr id="30" name="Agent 4"/>
+          <p:cNvSpPr/>
+          <p:nvPr/>
+        </p:nvSpPr>
+        <p:spPr>
+          <a:xfrm>
+            <a:off x="7338060" y="1405889"/>
+            <a:ext cx="1323594" cy="1165860"/>
+          </a:xfrm>
+          <a:prstGeom prst="roundRect">
+            <a:avLst>
+              <a:gd name="adj" fmla="val 7058"/>
+            </a:avLst>
+          </a:prstGeom>
+          <a:solidFill>
+            <a:srgbClr val="FFFFFF"/>
+          </a:solidFill>
+          <a:ln w="12700">
+            <a:solidFill>
+              <a:srgbClr val="B8D4D0"/>
+            </a:solidFill>
+          </a:ln>
+          <a:effectLst/>
+        </p:spPr>
+        <p:style>
+          <a:lnRef idx="1">
+            <a:schemeClr val="accent1"/>
+          </a:lnRef>
+          <a:fillRef idx="3">
+            <a:schemeClr val="accent1"/>
+          </a:fillRef>
+          <a:effectRef idx="2">
+            <a:schemeClr val="accent1"/>
+          </a:effectRef>
+          <a:fontRef idx="minor">
+            <a:schemeClr val="lt1"/>
+          </a:fontRef>
+        </p:style>
+        <p:txBody>
+          <a:bodyPr rtlCol="0" anchor="ctr"/>
+          <a:lstStyle/>
+          <a:p>
+            <a:pPr algn="ctr"/>
+            <a:endParaRPr sz="1050"/>
+          </a:p>
+        </p:txBody>
+      </p:sp>
+      <p:sp>
+        <p:nvSpPr>
+          <p:cNvPr id="31" name="Oval 30"/>
+          <p:cNvSpPr/>
+          <p:nvPr/>
+        </p:nvSpPr>
+        <p:spPr>
+          <a:xfrm>
+            <a:off x="7434072" y="1501902"/>
+            <a:ext cx="246888" cy="246888"/>
+          </a:xfrm>
+          <a:prstGeom prst="ellipse">
+            <a:avLst/>
+          </a:prstGeom>
+          <a:solidFill>
+            <a:srgbClr val="1F6F6B"/>
+          </a:solidFill>
+          <a:ln>
+            <a:noFill/>
+          </a:ln>
+          <a:effectLst/>
+        </p:spPr>
+        <p:style>
+          <a:lnRef idx="1">
+            <a:schemeClr val="accent1"/>
+          </a:lnRef>
+          <a:fillRef idx="3">
+            <a:schemeClr val="accent1"/>
+          </a:fillRef>
+          <a:effectRef idx="2">
+            <a:schemeClr val="accent1"/>
+          </a:effectRef>
+          <a:fontRef idx="minor">
+            <a:schemeClr val="lt1"/>
+          </a:fontRef>
+        </p:style>
+        <p:txBody>
+          <a:bodyPr lIns="0" tIns="0" rIns="0" bIns="0" rtlCol="0" anchor="ctr"/>
+          <a:lstStyle/>
+          <a:p>
+            <a:pPr algn="ctr"/>
+            <a:r>
+              <a:rPr sz="975" b="1">
+                <a:solidFill>
+                  <a:srgbClr val="FFFFFF"/>
+                </a:solidFill>
+                <a:latin typeface="Calibri"/>
+              </a:rPr>
+              <a:t>4</a:t>
+            </a:r>
+          </a:p>
+        </p:txBody>
+      </p:sp>
+      <p:sp>
+        <p:nvSpPr>
+          <p:cNvPr id="32" name="TextBox 31"/>
+          <p:cNvSpPr txBox="1"/>
+          <p:nvPr/>
+        </p:nvSpPr>
+        <p:spPr>
+          <a:xfrm>
+            <a:off x="7434072" y="1817370"/>
+            <a:ext cx="1131570" cy="150041"/>
+          </a:xfrm>
+          <a:prstGeom prst="rect">
+            <a:avLst/>
+          </a:prstGeom>
+          <a:noFill/>
+        </p:spPr>
+        <p:txBody>
+          <a:bodyPr wrap="square" lIns="0" tIns="0" rIns="0" bIns="0" anchor="t">
+            <a:spAutoFit/>
+          </a:bodyPr>
+          <a:lstStyle/>
+          <a:p>
+            <a:pPr>
+              <a:spcAft>
+                <a:spcPts val="225"/>
+              </a:spcAft>
+            </a:pPr>
+            <a:r>
+              <a:rPr sz="975" b="1">
+                <a:solidFill>
+                  <a:srgbClr val="12343B"/>
+                </a:solidFill>
+                <a:latin typeface="Calibri"/>
+              </a:rPr>
+              <a:t>Memo Writer</a:t>
+            </a:r>
+          </a:p>
+        </p:txBody>
+      </p:sp>
+      <p:sp>
+        <p:nvSpPr>
+          <p:cNvPr id="33" name="TextBox 32"/>
+          <p:cNvSpPr txBox="1"/>
+          <p:nvPr/>
+        </p:nvSpPr>
+        <p:spPr>
+          <a:xfrm>
+            <a:off x="7434072" y="2036826"/>
+            <a:ext cx="1131570" cy="253916"/>
+          </a:xfrm>
+          <a:prstGeom prst="rect">
+            <a:avLst/>
+          </a:prstGeom>
+          <a:noFill/>
+        </p:spPr>
+        <p:txBody>
+          <a:bodyPr wrap="square" lIns="0" tIns="0" rIns="0" bIns="0" anchor="t">
+            <a:spAutoFit/>
+          </a:bodyPr>
+          <a:lstStyle/>
+          <a:p>
+            <a:pPr>
+              <a:spcAft>
+                <a:spcPts val="225"/>
+              </a:spcAft>
+            </a:pPr>
+            <a:r>
+              <a:rPr sz="825">
+                <a:solidFill>
+                  <a:srgbClr val="4A5A5D"/>
+                </a:solidFill>
+                <a:latin typeface="Calibri"/>
+              </a:rPr>
+              <a:t>Writes every justification and the grant memo</a:t>
+            </a:r>
+          </a:p>
+        </p:txBody>
+      </p:sp>
+      <p:sp>
+        <p:nvSpPr>
+          <p:cNvPr id="34" name="Session state"/>
+          <p:cNvSpPr/>
+          <p:nvPr/>
+        </p:nvSpPr>
+        <p:spPr>
+          <a:xfrm>
+            <a:off x="2708910" y="2647188"/>
+            <a:ext cx="5952744" cy="274320"/>
+          </a:xfrm>
+          <a:prstGeom prst="roundRect">
+            <a:avLst>
+              <a:gd name="adj" fmla="val 12000"/>
+            </a:avLst>
+          </a:prstGeom>
+          <a:solidFill>
+            <a:srgbClr val="FFFFFF"/>
+          </a:solidFill>
+          <a:ln w="12700">
+            <a:solidFill>
+              <a:srgbClr val="B8D4D0"/>
+            </a:solidFill>
+          </a:ln>
+          <a:effectLst/>
+        </p:spPr>
+        <p:style>
+          <a:lnRef idx="1">
+            <a:schemeClr val="accent1"/>
+          </a:lnRef>
+          <a:fillRef idx="3">
+            <a:schemeClr val="accent1"/>
+          </a:fillRef>
+          <a:effectRef idx="2">
+            <a:schemeClr val="accent1"/>
+          </a:effectRef>
+          <a:fontRef idx="minor">
+            <a:schemeClr val="lt1"/>
+          </a:fontRef>
+        </p:style>
+        <p:txBody>
+          <a:bodyPr rtlCol="0" anchor="ctr"/>
+          <a:lstStyle/>
+          <a:p>
+            <a:pPr algn="ctr"/>
+            <a:endParaRPr sz="1050"/>
+          </a:p>
+        </p:txBody>
+      </p:sp>
+      <p:sp>
+        <p:nvSpPr>
+          <p:cNvPr id="35" name="TextBox 34"/>
+          <p:cNvSpPr txBox="1"/>
+          <p:nvPr/>
+        </p:nvSpPr>
+        <p:spPr>
+          <a:xfrm>
+            <a:off x="2811780" y="2720870"/>
+            <a:ext cx="5747004" cy="126958"/>
+          </a:xfrm>
+          <a:prstGeom prst="rect">
+            <a:avLst/>
+          </a:prstGeom>
+          <a:noFill/>
+        </p:spPr>
+        <p:txBody>
+          <a:bodyPr wrap="square" lIns="0" tIns="0" rIns="0" bIns="0" anchor="ctr">
+            <a:spAutoFit/>
+          </a:bodyPr>
+          <a:lstStyle/>
+          <a:p>
+            <a:pPr>
+              <a:spcAft>
+                <a:spcPts val="225"/>
+              </a:spcAft>
+            </a:pPr>
+            <a:r>
+              <a:rPr sz="825" b="1">
+                <a:solidFill>
+                  <a:srgbClr val="1F6F6B"/>
+                </a:solidFill>
+                <a:latin typeface="Calibri"/>
+              </a:rPr>
+              <a:t>Shared session.state   </a:t>
+            </a:r>
+            <a:r>
+              <a:rPr sz="825">
+                <a:solidFill>
+                  <a:srgbClr val="12343B"/>
+                </a:solidFill>
+                <a:latin typeface="Calibri"/>
+              </a:rPr>
+              <a:t>cascade  →  risk  →  allocation  →  decisions</a:t>
+            </a:r>
+          </a:p>
+        </p:txBody>
+      </p:sp>
+      <p:sp>
+        <p:nvSpPr>
+          <p:cNvPr id="36" name="MCP Toolbox"/>
+          <p:cNvSpPr/>
+          <p:nvPr/>
+        </p:nvSpPr>
+        <p:spPr>
+          <a:xfrm>
+            <a:off x="2708911" y="3326130"/>
+            <a:ext cx="2866643" cy="720090"/>
+          </a:xfrm>
+          <a:prstGeom prst="roundRect">
+            <a:avLst>
+              <a:gd name="adj" fmla="val 11428"/>
+            </a:avLst>
+          </a:prstGeom>
+          <a:solidFill>
+            <a:srgbClr val="FFFFFF"/>
+          </a:solidFill>
+          <a:ln w="19050">
+            <a:solidFill>
+              <a:srgbClr val="1F6F6B"/>
+            </a:solidFill>
+          </a:ln>
+          <a:effectLst/>
+        </p:spPr>
+        <p:style>
+          <a:lnRef idx="1">
+            <a:schemeClr val="accent1"/>
+          </a:lnRef>
+          <a:fillRef idx="3">
+            <a:schemeClr val="accent1"/>
+          </a:fillRef>
+          <a:effectRef idx="2">
+            <a:schemeClr val="accent1"/>
+          </a:effectRef>
+          <a:fontRef idx="minor">
+            <a:schemeClr val="lt1"/>
+          </a:fontRef>
+        </p:style>
+        <p:txBody>
+          <a:bodyPr rtlCol="0" anchor="ctr"/>
+          <a:lstStyle/>
+          <a:p>
+            <a:pPr algn="ctr"/>
+            <a:endParaRPr sz="1050"/>
+          </a:p>
+        </p:txBody>
+      </p:sp>
+      <p:sp>
+        <p:nvSpPr>
+          <p:cNvPr id="37" name="TextBox 36"/>
+          <p:cNvSpPr txBox="1"/>
+          <p:nvPr/>
+        </p:nvSpPr>
+        <p:spPr>
+          <a:xfrm>
+            <a:off x="2832354" y="3394710"/>
+            <a:ext cx="2619756" cy="429605"/>
+          </a:xfrm>
+          <a:prstGeom prst="rect">
+            <a:avLst/>
+          </a:prstGeom>
+          <a:noFill/>
+        </p:spPr>
+        <p:txBody>
+          <a:bodyPr wrap="square" lIns="0" tIns="0" rIns="0" bIns="0" anchor="t">
+            <a:spAutoFit/>
+          </a:bodyPr>
+          <a:lstStyle/>
+          <a:p>
+            <a:pPr>
+              <a:spcAft>
+                <a:spcPts val="225"/>
+              </a:spcAft>
+            </a:pPr>
+            <a:r>
+              <a:rPr sz="975" b="1">
+                <a:solidFill>
+                  <a:srgbClr val="12343B"/>
+                </a:solidFill>
+                <a:latin typeface="Calibri"/>
+              </a:rPr>
+              <a:t>MCP Toolbox for Databases </a:t>
+            </a:r>
+            <a:r>
+              <a:rPr sz="825">
+                <a:solidFill>
+                  <a:srgbClr val="1F6F6B"/>
+                </a:solidFill>
+                <a:latin typeface="Calibri"/>
+              </a:rPr>
+              <a:t>· Cloud Run</a:t>
+            </a:r>
+          </a:p>
+          <a:p>
+            <a:pPr>
+              <a:spcAft>
+                <a:spcPts val="225"/>
+              </a:spcAft>
+            </a:pPr>
+            <a:r>
+              <a:rPr sz="825">
+                <a:solidFill>
+                  <a:srgbClr val="4A5A5D"/>
+                </a:solidFill>
+                <a:latin typeface="Calibri"/>
+              </a:rPr>
+              <a:t>anchor_cascade (GQL) · supply_cascade · business_profile · tract_profile · loan_history</a:t>
+            </a:r>
+          </a:p>
+        </p:txBody>
+      </p:sp>
+      <p:sp>
+        <p:nvSpPr>
+          <p:cNvPr id="38" name="Python tools"/>
+          <p:cNvSpPr/>
+          <p:nvPr/>
+        </p:nvSpPr>
+        <p:spPr>
+          <a:xfrm>
+            <a:off x="5795010" y="3326130"/>
+            <a:ext cx="2866643" cy="720090"/>
+          </a:xfrm>
+          <a:prstGeom prst="roundRect">
+            <a:avLst>
+              <a:gd name="adj" fmla="val 11428"/>
+            </a:avLst>
+          </a:prstGeom>
+          <a:solidFill>
+            <a:srgbClr val="FFFFFF"/>
+          </a:solidFill>
+          <a:ln w="19050">
+            <a:solidFill>
+              <a:srgbClr val="C27C00"/>
+            </a:solidFill>
+          </a:ln>
+          <a:effectLst/>
+        </p:spPr>
+        <p:style>
+          <a:lnRef idx="1">
+            <a:schemeClr val="accent1"/>
+          </a:lnRef>
+          <a:fillRef idx="3">
+            <a:schemeClr val="accent1"/>
+          </a:fillRef>
+          <a:effectRef idx="2">
+            <a:schemeClr val="accent1"/>
+          </a:effectRef>
+          <a:fontRef idx="minor">
+            <a:schemeClr val="lt1"/>
+          </a:fontRef>
+        </p:style>
+        <p:txBody>
+          <a:bodyPr rtlCol="0" anchor="ctr"/>
+          <a:lstStyle/>
+          <a:p>
+            <a:pPr algn="ctr"/>
+            <a:endParaRPr sz="1050"/>
+          </a:p>
+        </p:txBody>
+      </p:sp>
+      <p:sp>
+        <p:nvSpPr>
+          <p:cNvPr id="39" name="TextBox 38"/>
+          <p:cNvSpPr txBox="1"/>
+          <p:nvPr/>
+        </p:nvSpPr>
+        <p:spPr>
+          <a:xfrm>
+            <a:off x="5918453" y="3394710"/>
+            <a:ext cx="2619756" cy="429605"/>
+          </a:xfrm>
+          <a:prstGeom prst="rect">
+            <a:avLst/>
+          </a:prstGeom>
+          <a:noFill/>
+        </p:spPr>
+        <p:txBody>
+          <a:bodyPr wrap="square" lIns="0" tIns="0" rIns="0" bIns="0" anchor="t">
+            <a:spAutoFit/>
+          </a:bodyPr>
+          <a:lstStyle/>
+          <a:p>
+            <a:pPr>
+              <a:spcAft>
+                <a:spcPts val="225"/>
+              </a:spcAft>
+            </a:pPr>
+            <a:r>
+              <a:rPr sz="975" b="1">
+                <a:solidFill>
+                  <a:srgbClr val="12343B"/>
+                </a:solidFill>
+                <a:latin typeface="Calibri"/>
+              </a:rPr>
+              <a:t>Custom Python tools </a:t>
+            </a:r>
+            <a:r>
+              <a:rPr sz="825">
+                <a:solidFill>
+                  <a:srgbClr val="C27C00"/>
+                </a:solidFill>
+                <a:latin typeface="Calibri"/>
+              </a:rPr>
+              <a:t>· ADK FunctionTool</a:t>
+            </a:r>
+          </a:p>
+          <a:p>
+            <a:pPr>
+              <a:spcAft>
+                <a:spcPts val="225"/>
+              </a:spcAft>
+            </a:pPr>
+            <a:r>
+              <a:rPr sz="825">
+                <a:solidFill>
+                  <a:srgbClr val="4A5A5D"/>
+                </a:solidFill>
+                <a:latin typeface="Calibri"/>
+              </a:rPr>
+              <a:t>score_exposure · fragility · allocate_budget · sensitivity · equity_audit · build_memo</a:t>
+            </a:r>
+          </a:p>
+        </p:txBody>
+      </p:sp>
+      <p:cxnSp>
+        <p:nvCxnSpPr>
+          <p:cNvPr id="40" name="Connector 39"/>
+          <p:cNvCxnSpPr/>
+          <p:nvPr/>
+        </p:nvCxnSpPr>
+        <p:spPr>
+          <a:xfrm>
+            <a:off x="3370707" y="3051810"/>
+            <a:ext cx="0" cy="274320"/>
+          </a:xfrm>
+          <a:prstGeom prst="line">
+            <a:avLst/>
+          </a:prstGeom>
+          <a:ln w="22225">
+            <a:solidFill>
+              <a:srgbClr val="1F6F6B"/>
+            </a:solidFill>
+            <a:prstDash val="dash"/>
+            <a:tailEnd type="triangle" w="med" len="med"/>
+          </a:ln>
+        </p:spPr>
+        <p:style>
+          <a:lnRef idx="2">
+            <a:schemeClr val="accent1"/>
+          </a:lnRef>
+          <a:fillRef idx="0">
+            <a:schemeClr val="accent1"/>
+          </a:fillRef>
+          <a:effectRef idx="1">
+            <a:schemeClr val="accent1"/>
+          </a:effectRef>
+          <a:fontRef idx="minor">
+            <a:schemeClr val="tx1"/>
+          </a:fontRef>
+        </p:style>
+      </p:cxnSp>
+      <p:cxnSp>
+        <p:nvCxnSpPr>
+          <p:cNvPr id="41" name="Connector 40"/>
+          <p:cNvCxnSpPr/>
+          <p:nvPr/>
+        </p:nvCxnSpPr>
+        <p:spPr>
+          <a:xfrm>
+            <a:off x="4913757" y="3051810"/>
+            <a:ext cx="0" cy="274320"/>
+          </a:xfrm>
+          <a:prstGeom prst="line">
+            <a:avLst/>
+          </a:prstGeom>
+          <a:ln w="22225">
+            <a:solidFill>
+              <a:srgbClr val="1F6F6B"/>
+            </a:solidFill>
+            <a:prstDash val="dash"/>
+            <a:tailEnd type="triangle" w="med" len="med"/>
+          </a:ln>
+        </p:spPr>
+        <p:style>
+          <a:lnRef idx="2">
+            <a:schemeClr val="accent1"/>
+          </a:lnRef>
+          <a:fillRef idx="0">
+            <a:schemeClr val="accent1"/>
+          </a:fillRef>
+          <a:effectRef idx="1">
+            <a:schemeClr val="accent1"/>
+          </a:effectRef>
+          <a:fontRef idx="minor">
+            <a:schemeClr val="tx1"/>
+          </a:fontRef>
+        </p:style>
+      </p:cxnSp>
+      <p:cxnSp>
+        <p:nvCxnSpPr>
+          <p:cNvPr id="42" name="Connector 41"/>
+          <p:cNvCxnSpPr/>
+          <p:nvPr/>
+        </p:nvCxnSpPr>
+        <p:spPr>
+          <a:xfrm>
+            <a:off x="6456807" y="3051810"/>
+            <a:ext cx="0" cy="274320"/>
+          </a:xfrm>
+          <a:prstGeom prst="line">
+            <a:avLst/>
+          </a:prstGeom>
+          <a:ln w="22225">
+            <a:solidFill>
+              <a:srgbClr val="C27C00"/>
+            </a:solidFill>
+            <a:prstDash val="sysDot"/>
+            <a:tailEnd type="triangle" w="med" len="med"/>
+          </a:ln>
+        </p:spPr>
+        <p:style>
+          <a:lnRef idx="2">
+            <a:schemeClr val="accent1"/>
+          </a:lnRef>
+          <a:fillRef idx="0">
+            <a:schemeClr val="accent1"/>
+          </a:fillRef>
+          <a:effectRef idx="1">
+            <a:schemeClr val="accent1"/>
+          </a:effectRef>
+          <a:fontRef idx="minor">
+            <a:schemeClr val="tx1"/>
+          </a:fontRef>
+        </p:style>
+      </p:cxnSp>
+      <p:cxnSp>
+        <p:nvCxnSpPr>
+          <p:cNvPr id="43" name="Connector 42"/>
+          <p:cNvCxnSpPr/>
+          <p:nvPr/>
+        </p:nvCxnSpPr>
+        <p:spPr>
+          <a:xfrm>
+            <a:off x="7999857" y="3051810"/>
+            <a:ext cx="0" cy="274320"/>
+          </a:xfrm>
+          <a:prstGeom prst="line">
+            <a:avLst/>
+          </a:prstGeom>
+          <a:ln w="22225">
+            <a:solidFill>
+              <a:srgbClr val="C27C00"/>
+            </a:solidFill>
+            <a:prstDash val="sysDot"/>
+            <a:tailEnd type="triangle" w="med" len="med"/>
+          </a:ln>
+        </p:spPr>
+        <p:style>
+          <a:lnRef idx="2">
+            <a:schemeClr val="accent1"/>
+          </a:lnRef>
+          <a:fillRef idx="0">
+            <a:schemeClr val="accent1"/>
+          </a:fillRef>
+          <a:effectRef idx="1">
+            <a:schemeClr val="accent1"/>
+          </a:effectRef>
+          <a:fontRef idx="minor">
+            <a:schemeClr val="tx1"/>
+          </a:fontRef>
+        </p:style>
+      </p:cxnSp>
+      <p:sp>
+        <p:nvSpPr>
+          <p:cNvPr id="44" name="BigQuery"/>
+          <p:cNvSpPr/>
+          <p:nvPr/>
+        </p:nvSpPr>
+        <p:spPr>
+          <a:xfrm>
+            <a:off x="2708910" y="4286250"/>
+            <a:ext cx="5952744" cy="534924"/>
+          </a:xfrm>
+          <a:prstGeom prst="roundRect">
+            <a:avLst>
+              <a:gd name="adj" fmla="val 12000"/>
+            </a:avLst>
+          </a:prstGeom>
+          <a:solidFill>
+            <a:srgbClr val="12343B"/>
+          </a:solidFill>
+          <a:ln>
+            <a:noFill/>
+          </a:ln>
+          <a:effectLst/>
+        </p:spPr>
+        <p:style>
+          <a:lnRef idx="1">
+            <a:schemeClr val="accent1"/>
+          </a:lnRef>
+          <a:fillRef idx="3">
+            <a:schemeClr val="accent1"/>
+          </a:fillRef>
+          <a:effectRef idx="2">
+            <a:schemeClr val="accent1"/>
+          </a:effectRef>
+          <a:fontRef idx="minor">
+            <a:schemeClr val="lt1"/>
+          </a:fontRef>
+        </p:style>
+        <p:txBody>
+          <a:bodyPr rtlCol="0" anchor="ctr"/>
+          <a:lstStyle/>
+          <a:p>
+            <a:pPr algn="ctr"/>
+            <a:endParaRPr sz="1050"/>
+          </a:p>
+        </p:txBody>
+      </p:sp>
+      <p:sp>
+        <p:nvSpPr>
+          <p:cNvPr id="45" name="TextBox 44"/>
+          <p:cNvSpPr txBox="1"/>
+          <p:nvPr/>
+        </p:nvSpPr>
+        <p:spPr>
+          <a:xfrm>
+            <a:off x="2846071" y="4416105"/>
+            <a:ext cx="5678423" cy="302647"/>
+          </a:xfrm>
+          <a:prstGeom prst="rect">
+            <a:avLst/>
+          </a:prstGeom>
+          <a:noFill/>
+        </p:spPr>
+        <p:txBody>
+          <a:bodyPr wrap="square" lIns="0" tIns="0" rIns="0" bIns="0" anchor="ctr">
+            <a:spAutoFit/>
+          </a:bodyPr>
+          <a:lstStyle/>
+          <a:p>
+            <a:pPr>
+              <a:spcAft>
+                <a:spcPts val="225"/>
+              </a:spcAft>
+            </a:pPr>
+            <a:r>
+              <a:rPr sz="975" b="1">
+                <a:solidFill>
+                  <a:srgbClr val="FFFFFF"/>
+                </a:solidFill>
+                <a:latin typeface="Calibri"/>
+              </a:rPr>
+              <a:t>BigQuery </a:t>
+            </a:r>
+            <a:r>
+              <a:rPr sz="825">
+                <a:solidFill>
+                  <a:srgbClr val="B8D4D0"/>
+                </a:solidFill>
+                <a:latin typeface="Calibri"/>
+              </a:rPr>
+              <a:t>· a4i_econ · property graph LocalEconomy, queried with GQL · Enterprise reservation</a:t>
+            </a:r>
+          </a:p>
+          <a:p>
+            <a:pPr>
+              <a:spcAft>
+                <a:spcPts val="225"/>
+              </a:spcAft>
+            </a:pPr>
+            <a:r>
+              <a:rPr sz="825">
+                <a:solidFill>
+                  <a:srgbClr val="FFFFFF"/>
+                </a:solidFill>
+                <a:latin typeface="Calibri"/>
+              </a:rPr>
+              <a:t>businesses · employer_blocks · supplies · draws_footfall_from · borrowed_from · tract_demographics</a:t>
+            </a:r>
+          </a:p>
+        </p:txBody>
+      </p:sp>
+      <p:cxnSp>
+        <p:nvCxnSpPr>
+          <p:cNvPr id="46" name="Connector 45"/>
+          <p:cNvCxnSpPr/>
+          <p:nvPr/>
+        </p:nvCxnSpPr>
+        <p:spPr>
+          <a:xfrm>
+            <a:off x="4142232" y="4046220"/>
+            <a:ext cx="0" cy="240031"/>
+          </a:xfrm>
+          <a:prstGeom prst="line">
+            <a:avLst/>
+          </a:prstGeom>
+          <a:ln w="22225">
+            <a:solidFill>
+              <a:srgbClr val="1F6F6B"/>
+            </a:solidFill>
+            <a:prstDash val="dash"/>
+            <a:tailEnd type="triangle" w="med" len="med"/>
+          </a:ln>
+        </p:spPr>
+        <p:style>
+          <a:lnRef idx="2">
+            <a:schemeClr val="accent1"/>
+          </a:lnRef>
+          <a:fillRef idx="0">
+            <a:schemeClr val="accent1"/>
+          </a:fillRef>
+          <a:effectRef idx="1">
+            <a:schemeClr val="accent1"/>
+          </a:effectRef>
+          <a:fontRef idx="minor">
+            <a:schemeClr val="tx1"/>
+          </a:fontRef>
+        </p:style>
+      </p:cxnSp>
+      <p:sp>
+        <p:nvSpPr>
+          <p:cNvPr id="47" name="Legend"/>
+          <p:cNvSpPr/>
+          <p:nvPr/>
+        </p:nvSpPr>
+        <p:spPr>
+          <a:xfrm>
+            <a:off x="342900" y="3566160"/>
+            <a:ext cx="1577340" cy="1255014"/>
+          </a:xfrm>
+          <a:prstGeom prst="roundRect">
+            <a:avLst>
+              <a:gd name="adj" fmla="val 6557"/>
+            </a:avLst>
+          </a:prstGeom>
+          <a:solidFill>
+            <a:srgbClr val="FFFFFF"/>
+          </a:solidFill>
+          <a:ln w="12700">
+            <a:solidFill>
+              <a:srgbClr val="B8D4D0"/>
+            </a:solidFill>
+          </a:ln>
+          <a:effectLst/>
+        </p:spPr>
+        <p:style>
+          <a:lnRef idx="1">
+            <a:schemeClr val="accent1"/>
+          </a:lnRef>
+          <a:fillRef idx="3">
+            <a:schemeClr val="accent1"/>
+          </a:fillRef>
+          <a:effectRef idx="2">
+            <a:schemeClr val="accent1"/>
+          </a:effectRef>
+          <a:fontRef idx="minor">
+            <a:schemeClr val="lt1"/>
+          </a:fontRef>
+        </p:style>
+        <p:txBody>
+          <a:bodyPr rtlCol="0" anchor="ctr"/>
+          <a:lstStyle/>
+          <a:p>
+            <a:pPr algn="ctr"/>
+            <a:endParaRPr sz="1050"/>
+          </a:p>
+        </p:txBody>
+      </p:sp>
+      <p:sp>
+        <p:nvSpPr>
+          <p:cNvPr id="48" name="TextBox 47"/>
+          <p:cNvSpPr txBox="1"/>
+          <p:nvPr/>
+        </p:nvSpPr>
+        <p:spPr>
+          <a:xfrm>
+            <a:off x="466344" y="3634740"/>
+            <a:ext cx="1330452" cy="150041"/>
+          </a:xfrm>
+          <a:prstGeom prst="rect">
+            <a:avLst/>
+          </a:prstGeom>
+          <a:noFill/>
+        </p:spPr>
+        <p:txBody>
+          <a:bodyPr wrap="square" lIns="0" tIns="0" rIns="0" bIns="0" anchor="t">
+            <a:spAutoFit/>
+          </a:bodyPr>
+          <a:lstStyle/>
+          <a:p>
+            <a:pPr>
+              <a:spcAft>
+                <a:spcPts val="225"/>
+              </a:spcAft>
+            </a:pPr>
+            <a:r>
+              <a:rPr sz="975" b="1">
+                <a:solidFill>
+                  <a:srgbClr val="12343B"/>
+                </a:solidFill>
+                <a:latin typeface="Calibri"/>
+              </a:rPr>
+              <a:t>How they talk</a:t>
+            </a:r>
+          </a:p>
+        </p:txBody>
+      </p:sp>
+      <p:cxnSp>
+        <p:nvCxnSpPr>
+          <p:cNvPr id="49" name="Connector 48"/>
+          <p:cNvCxnSpPr/>
+          <p:nvPr/>
+        </p:nvCxnSpPr>
+        <p:spPr>
+          <a:xfrm>
+            <a:off x="466344" y="3963924"/>
+            <a:ext cx="342900" cy="0"/>
+          </a:xfrm>
+          <a:prstGeom prst="line">
+            <a:avLst/>
+          </a:prstGeom>
+          <a:ln w="22225">
+            <a:solidFill>
+              <a:srgbClr val="C27C00"/>
+            </a:solidFill>
+            <a:tailEnd type="triangle" w="med" len="med"/>
+          </a:ln>
+        </p:spPr>
+        <p:style>
+          <a:lnRef idx="2">
+            <a:schemeClr val="accent1"/>
+          </a:lnRef>
+          <a:fillRef idx="0">
+            <a:schemeClr val="accent1"/>
+          </a:fillRef>
+          <a:effectRef idx="1">
+            <a:schemeClr val="accent1"/>
+          </a:effectRef>
+          <a:fontRef idx="minor">
+            <a:schemeClr val="tx1"/>
+          </a:fontRef>
+        </p:style>
+      </p:cxnSp>
+      <p:sp>
+        <p:nvSpPr>
+          <p:cNvPr id="50" name="TextBox 49"/>
+          <p:cNvSpPr txBox="1"/>
+          <p:nvPr/>
+        </p:nvSpPr>
+        <p:spPr>
+          <a:xfrm>
+            <a:off x="891541" y="3907304"/>
+            <a:ext cx="925829" cy="126958"/>
+          </a:xfrm>
+          <a:prstGeom prst="rect">
+            <a:avLst/>
+          </a:prstGeom>
+          <a:noFill/>
+        </p:spPr>
+        <p:txBody>
+          <a:bodyPr wrap="square" lIns="0" tIns="0" rIns="0" bIns="0" anchor="ctr">
+            <a:spAutoFit/>
+          </a:bodyPr>
+          <a:lstStyle/>
+          <a:p>
+            <a:pPr>
+              <a:spcAft>
+                <a:spcPts val="225"/>
+              </a:spcAft>
+            </a:pPr>
+            <a:r>
+              <a:rPr sz="825">
+                <a:solidFill>
+                  <a:srgbClr val="4A5A5D"/>
+                </a:solidFill>
+                <a:latin typeface="Calibri"/>
+              </a:rPr>
+              <a:t>HTTPS request</a:t>
+            </a:r>
+          </a:p>
+        </p:txBody>
+      </p:sp>
+      <p:cxnSp>
+        <p:nvCxnSpPr>
+          <p:cNvPr id="51" name="Connector 50"/>
+          <p:cNvCxnSpPr/>
+          <p:nvPr/>
+        </p:nvCxnSpPr>
+        <p:spPr>
+          <a:xfrm>
+            <a:off x="466344" y="4169664"/>
+            <a:ext cx="342900" cy="0"/>
+          </a:xfrm>
+          <a:prstGeom prst="line">
+            <a:avLst/>
+          </a:prstGeom>
+          <a:ln w="22225">
+            <a:solidFill>
+              <a:srgbClr val="1F6F6B"/>
+            </a:solidFill>
+            <a:tailEnd type="triangle" w="med" len="med"/>
+          </a:ln>
+        </p:spPr>
+        <p:style>
+          <a:lnRef idx="2">
+            <a:schemeClr val="accent1"/>
+          </a:lnRef>
+          <a:fillRef idx="0">
+            <a:schemeClr val="accent1"/>
+          </a:fillRef>
+          <a:effectRef idx="1">
+            <a:schemeClr val="accent1"/>
+          </a:effectRef>
+          <a:fontRef idx="minor">
+            <a:schemeClr val="tx1"/>
+          </a:fontRef>
+        </p:style>
+      </p:cxnSp>
+      <p:sp>
+        <p:nvSpPr>
+          <p:cNvPr id="52" name="TextBox 51"/>
+          <p:cNvSpPr txBox="1"/>
+          <p:nvPr/>
+        </p:nvSpPr>
+        <p:spPr>
+          <a:xfrm>
+            <a:off x="891541" y="4113044"/>
+            <a:ext cx="925829" cy="126958"/>
+          </a:xfrm>
+          <a:prstGeom prst="rect">
+            <a:avLst/>
+          </a:prstGeom>
+          <a:noFill/>
+        </p:spPr>
+        <p:txBody>
+          <a:bodyPr wrap="square" lIns="0" tIns="0" rIns="0" bIns="0" anchor="ctr">
+            <a:spAutoFit/>
+          </a:bodyPr>
+          <a:lstStyle/>
+          <a:p>
+            <a:pPr>
+              <a:spcAft>
+                <a:spcPts val="225"/>
+              </a:spcAft>
+            </a:pPr>
+            <a:r>
+              <a:rPr sz="825">
+                <a:solidFill>
+                  <a:srgbClr val="4A5A5D"/>
+                </a:solidFill>
+                <a:latin typeface="Calibri"/>
+              </a:rPr>
+              <a:t>ADK state handoff</a:t>
+            </a:r>
+          </a:p>
+        </p:txBody>
+      </p:sp>
+      <p:cxnSp>
+        <p:nvCxnSpPr>
+          <p:cNvPr id="53" name="Connector 52"/>
+          <p:cNvCxnSpPr/>
+          <p:nvPr/>
+        </p:nvCxnSpPr>
+        <p:spPr>
+          <a:xfrm>
+            <a:off x="466344" y="4375404"/>
+            <a:ext cx="342900" cy="0"/>
+          </a:xfrm>
+          <a:prstGeom prst="line">
+            <a:avLst/>
+          </a:prstGeom>
+          <a:ln w="22225">
+            <a:solidFill>
+              <a:srgbClr val="1F6F6B"/>
+            </a:solidFill>
+            <a:prstDash val="dash"/>
+            <a:tailEnd type="triangle" w="med" len="med"/>
+          </a:ln>
+        </p:spPr>
+        <p:style>
+          <a:lnRef idx="2">
+            <a:schemeClr val="accent1"/>
+          </a:lnRef>
+          <a:fillRef idx="0">
+            <a:schemeClr val="accent1"/>
+          </a:fillRef>
+          <a:effectRef idx="1">
+            <a:schemeClr val="accent1"/>
+          </a:effectRef>
+          <a:fontRef idx="minor">
+            <a:schemeClr val="tx1"/>
+          </a:fontRef>
+        </p:style>
+      </p:cxnSp>
+      <p:sp>
+        <p:nvSpPr>
+          <p:cNvPr id="54" name="TextBox 53"/>
+          <p:cNvSpPr txBox="1"/>
+          <p:nvPr/>
+        </p:nvSpPr>
+        <p:spPr>
+          <a:xfrm>
+            <a:off x="891541" y="4318784"/>
+            <a:ext cx="925829" cy="126958"/>
+          </a:xfrm>
+          <a:prstGeom prst="rect">
+            <a:avLst/>
+          </a:prstGeom>
+          <a:noFill/>
+        </p:spPr>
+        <p:txBody>
+          <a:bodyPr wrap="square" lIns="0" tIns="0" rIns="0" bIns="0" anchor="ctr">
+            <a:spAutoFit/>
+          </a:bodyPr>
+          <a:lstStyle/>
+          <a:p>
+            <a:pPr>
+              <a:spcAft>
+                <a:spcPts val="225"/>
+              </a:spcAft>
+            </a:pPr>
+            <a:r>
+              <a:rPr sz="825">
+                <a:solidFill>
+                  <a:srgbClr val="4A5A5D"/>
+                </a:solidFill>
+                <a:latin typeface="Calibri"/>
+              </a:rPr>
+              <a:t>MCP tool call</a:t>
+            </a:r>
+          </a:p>
+        </p:txBody>
+      </p:sp>
+      <p:cxnSp>
+        <p:nvCxnSpPr>
+          <p:cNvPr id="55" name="Connector 54"/>
+          <p:cNvCxnSpPr/>
+          <p:nvPr/>
+        </p:nvCxnSpPr>
+        <p:spPr>
+          <a:xfrm>
+            <a:off x="466344" y="4581144"/>
+            <a:ext cx="342900" cy="0"/>
+          </a:xfrm>
+          <a:prstGeom prst="line">
+            <a:avLst/>
+          </a:prstGeom>
+          <a:ln w="22225">
+            <a:solidFill>
+              <a:srgbClr val="C27C00"/>
+            </a:solidFill>
+            <a:prstDash val="sysDot"/>
+            <a:tailEnd type="triangle" w="med" len="med"/>
+          </a:ln>
+        </p:spPr>
+        <p:style>
+          <a:lnRef idx="2">
+            <a:schemeClr val="accent1"/>
+          </a:lnRef>
+          <a:fillRef idx="0">
+            <a:schemeClr val="accent1"/>
+          </a:fillRef>
+          <a:effectRef idx="1">
+            <a:schemeClr val="accent1"/>
+          </a:effectRef>
+          <a:fontRef idx="minor">
+            <a:schemeClr val="tx1"/>
+          </a:fontRef>
+        </p:style>
+      </p:cxnSp>
+      <p:sp>
+        <p:nvSpPr>
+          <p:cNvPr id="56" name="TextBox 55"/>
+          <p:cNvSpPr txBox="1"/>
+          <p:nvPr/>
+        </p:nvSpPr>
+        <p:spPr>
+          <a:xfrm>
+            <a:off x="891541" y="4524524"/>
+            <a:ext cx="925829" cy="126958"/>
+          </a:xfrm>
+          <a:prstGeom prst="rect">
+            <a:avLst/>
+          </a:prstGeom>
+          <a:noFill/>
+        </p:spPr>
+        <p:txBody>
+          <a:bodyPr wrap="square" lIns="0" tIns="0" rIns="0" bIns="0" anchor="ctr">
+            <a:spAutoFit/>
+          </a:bodyPr>
+          <a:lstStyle/>
+          <a:p>
+            <a:pPr>
+              <a:spcAft>
+                <a:spcPts val="225"/>
+              </a:spcAft>
+            </a:pPr>
+            <a:r>
+              <a:rPr sz="825">
+                <a:solidFill>
+                  <a:srgbClr val="4A5A5D"/>
+                </a:solidFill>
+                <a:latin typeface="Calibri"/>
+              </a:rPr>
+              <a:t>Python function call</a:t>
             </a:r>
           </a:p>
         </p:txBody>
